--- a/clients/affg/presentation/AFFG_Proposal_Revision_Review_Technijian.pptx
+++ b/clients/affg/presentation/AFFG_Proposal_Revision_Review_Technijian.pptx
@@ -12,6 +12,7 @@
     <p:sldId id="260" r:id="rId6"/>
     <p:sldId id="261" r:id="rId7"/>
     <p:sldId id="262" r:id="rId8"/>
+    <p:sldId id="269" r:id="rId20"/>
     <p:sldId id="263" r:id="rId9"/>
     <p:sldId id="264" r:id="rId10"/>
     <p:sldId id="265" r:id="rId11"/>
@@ -1969,6 +1970,10 @@
             <a:prstDash val="solid"/>
           </a:ln>
         </p:spPr>
+        <p:txBody>
+          <a:bodyPr/>
+          <a:p/>
+        </p:txBody>
       </p:sp>
       <p:sp>
         <p:nvSpPr>
@@ -1996,6 +2001,10 @@
             <a:prstDash val="solid"/>
           </a:ln>
         </p:spPr>
+        <p:txBody>
+          <a:bodyPr/>
+          <a:p/>
+        </p:txBody>
       </p:sp>
       <p:sp>
         <p:nvSpPr>
@@ -2025,6 +2034,10 @@
             <a:prstDash val="solid"/>
           </a:ln>
         </p:spPr>
+        <p:txBody>
+          <a:bodyPr/>
+          <a:p/>
+        </p:txBody>
       </p:sp>
       <p:sp>
         <p:nvSpPr>
@@ -2054,6 +2067,10 @@
             <a:prstDash val="solid"/>
           </a:ln>
         </p:spPr>
+        <p:txBody>
+          <a:bodyPr/>
+          <a:p/>
+        </p:txBody>
       </p:sp>
       <p:sp>
         <p:nvSpPr>
@@ -2083,6 +2100,10 @@
             <a:prstDash val="solid"/>
           </a:ln>
         </p:spPr>
+        <p:txBody>
+          <a:bodyPr/>
+          <a:p/>
+        </p:txBody>
       </p:sp>
       <p:sp>
         <p:nvSpPr>
@@ -2112,6 +2133,10 @@
             <a:prstDash val="solid"/>
           </a:ln>
         </p:spPr>
+        <p:txBody>
+          <a:bodyPr/>
+          <a:p/>
+        </p:txBody>
       </p:sp>
       <p:sp>
         <p:nvSpPr>
@@ -2141,6 +2166,10 @@
             <a:prstDash val="solid"/>
           </a:ln>
         </p:spPr>
+        <p:txBody>
+          <a:bodyPr/>
+          <a:p/>
+        </p:txBody>
       </p:sp>
       <p:sp>
         <p:nvSpPr>
@@ -2170,6 +2199,10 @@
             <a:prstDash val="solid"/>
           </a:ln>
         </p:spPr>
+        <p:txBody>
+          <a:bodyPr/>
+          <a:p/>
+        </p:txBody>
       </p:sp>
       <p:sp>
         <p:nvSpPr>
@@ -2199,6 +2232,10 @@
             <a:prstDash val="solid"/>
           </a:ln>
         </p:spPr>
+        <p:txBody>
+          <a:bodyPr/>
+          <a:p/>
+        </p:txBody>
       </p:sp>
       <p:sp>
         <p:nvSpPr>
@@ -2228,6 +2265,10 @@
             <a:prstDash val="solid"/>
           </a:ln>
         </p:spPr>
+        <p:txBody>
+          <a:bodyPr/>
+          <a:p/>
+        </p:txBody>
       </p:sp>
       <p:sp>
         <p:nvSpPr>
@@ -2257,6 +2298,10 @@
             <a:prstDash val="solid"/>
           </a:ln>
         </p:spPr>
+        <p:txBody>
+          <a:bodyPr/>
+          <a:p/>
+        </p:txBody>
       </p:sp>
       <p:sp>
         <p:nvSpPr>
@@ -2286,6 +2331,10 @@
             <a:prstDash val="solid"/>
           </a:ln>
         </p:spPr>
+        <p:txBody>
+          <a:bodyPr/>
+          <a:p/>
+        </p:txBody>
       </p:sp>
       <p:sp>
         <p:nvSpPr>
@@ -2315,6 +2364,10 @@
             <a:prstDash val="solid"/>
           </a:ln>
         </p:spPr>
+        <p:txBody>
+          <a:bodyPr/>
+          <a:p/>
+        </p:txBody>
       </p:sp>
       <p:sp>
         <p:nvSpPr>
@@ -2344,6 +2397,10 @@
             <a:prstDash val="solid"/>
           </a:ln>
         </p:spPr>
+        <p:txBody>
+          <a:bodyPr/>
+          <a:p/>
+        </p:txBody>
       </p:sp>
       <p:sp>
         <p:nvSpPr>
@@ -2410,6 +2467,10 @@
             <a:prstDash val="solid"/>
           </a:ln>
         </p:spPr>
+        <p:txBody>
+          <a:bodyPr/>
+          <a:p/>
+        </p:txBody>
       </p:sp>
       <p:sp>
         <p:nvSpPr>
@@ -2554,6 +2615,10 @@
             <a:prstDash val="solid"/>
           </a:ln>
         </p:spPr>
+        <p:txBody>
+          <a:bodyPr/>
+          <a:p/>
+        </p:txBody>
       </p:sp>
       <p:sp>
         <p:nvSpPr>
@@ -2620,6 +2685,10 @@
             <a:prstDash val="solid"/>
           </a:ln>
         </p:spPr>
+        <p:txBody>
+          <a:bodyPr/>
+          <a:p/>
+        </p:txBody>
       </p:sp>
       <p:sp>
         <p:nvSpPr>
@@ -2686,6 +2755,10 @@
             <a:prstDash val="solid"/>
           </a:ln>
         </p:spPr>
+        <p:txBody>
+          <a:bodyPr/>
+          <a:p/>
+        </p:txBody>
       </p:sp>
       <p:sp>
         <p:nvSpPr>
@@ -2752,6 +2825,10 @@
             <a:prstDash val="solid"/>
           </a:ln>
         </p:spPr>
+        <p:txBody>
+          <a:bodyPr/>
+          <a:p/>
+        </p:txBody>
       </p:sp>
       <p:sp>
         <p:nvSpPr>
@@ -2818,6 +2895,10 @@
             <a:prstDash val="solid"/>
           </a:ln>
         </p:spPr>
+        <p:txBody>
+          <a:bodyPr/>
+          <a:p/>
+        </p:txBody>
       </p:sp>
       <p:sp>
         <p:nvSpPr>
@@ -2884,6 +2965,10 @@
             <a:prstDash val="solid"/>
           </a:ln>
         </p:spPr>
+        <p:txBody>
+          <a:bodyPr/>
+          <a:p/>
+        </p:txBody>
       </p:sp>
       <p:sp>
         <p:nvSpPr>
@@ -2957,7 +3042,7 @@
                 <a:ea typeface="Arial" pitchFamily="34" charset="-122"/>
                 <a:cs typeface="Arial" pitchFamily="34" charset="-120"/>
               </a:rPr>
-              <a:t>Prepared for AFFG  |  April 15, 2026</a:t>
+              <a:t>Prepared for AFFG  |  April 16, 2026</a:t>
             </a:r>
             <a:endParaRPr lang="en-US" sz="1000" dirty="0"/>
           </a:p>
@@ -2972,6 +3057,1386 @@
 </file>
 
 <file path=ppt/slides/slide10.xml><?xml version="1.0" encoding="utf-8"?>
+<p:sld xmlns:a="http://schemas.openxmlformats.org/drawingml/2006/main" xmlns:r="http://schemas.openxmlformats.org/officeDocument/2006/relationships" xmlns:p="http://schemas.openxmlformats.org/presentationml/2006/main">
+  <p:cSld name="Slide 9">
+    <p:bg>
+      <p:bgPr>
+        <a:solidFill>
+          <a:srgbClr val="F8FAFC"/>
+        </a:solidFill>
+      </p:bgPr>
+    </p:bg>
+    <p:spTree>
+      <p:nvGrpSpPr>
+        <p:cNvPr id="1" name=""/>
+        <p:cNvGrpSpPr/>
+        <p:nvPr/>
+      </p:nvGrpSpPr>
+      <p:grpSpPr>
+        <a:xfrm>
+          <a:off x="0" y="0"/>
+          <a:ext cx="0" cy="0"/>
+          <a:chOff x="0" y="0"/>
+          <a:chExt cx="0" cy="0"/>
+        </a:xfrm>
+      </p:grpSpPr>
+      <p:sp>
+        <p:nvSpPr>
+          <p:cNvPr id="2" name="Shape 0"/>
+          <p:cNvSpPr/>
+          <p:nvPr/>
+        </p:nvSpPr>
+        <p:spPr>
+          <a:xfrm>
+            <a:off x="0" y="0"/>
+            <a:ext cx="12188952" cy="164592"/>
+          </a:xfrm>
+          <a:prstGeom prst="rect">
+            <a:avLst/>
+          </a:prstGeom>
+          <a:solidFill>
+            <a:srgbClr val="006DB6"/>
+          </a:solidFill>
+          <a:ln w="12700">
+            <a:solidFill>
+              <a:srgbClr val="006DB6">
+                <a:alpha val="0"/>
+              </a:srgbClr>
+            </a:solidFill>
+            <a:prstDash val="solid"/>
+          </a:ln>
+        </p:spPr>
+        <p:txBody>
+          <a:bodyPr/>
+          <a:p/>
+        </p:txBody>
+      </p:sp>
+      <p:sp>
+        <p:nvSpPr>
+          <p:cNvPr id="3" name="Shape 1"/>
+          <p:cNvSpPr/>
+          <p:nvPr/>
+        </p:nvSpPr>
+        <p:spPr>
+          <a:xfrm>
+            <a:off x="502920" y="320040"/>
+            <a:ext cx="82296" cy="82296"/>
+          </a:xfrm>
+          <a:prstGeom prst="roundRect">
+            <a:avLst>
+              <a:gd name="adj" fmla="val 16667"/>
+            </a:avLst>
+          </a:prstGeom>
+          <a:solidFill>
+            <a:srgbClr val="64748B"/>
+          </a:solidFill>
+          <a:ln w="12700">
+            <a:solidFill>
+              <a:srgbClr val="64748B">
+                <a:alpha val="0"/>
+              </a:srgbClr>
+            </a:solidFill>
+            <a:prstDash val="solid"/>
+          </a:ln>
+        </p:spPr>
+        <p:txBody>
+          <a:bodyPr/>
+          <a:p/>
+        </p:txBody>
+      </p:sp>
+      <p:sp>
+        <p:nvSpPr>
+          <p:cNvPr id="4" name="Shape 2"/>
+          <p:cNvSpPr/>
+          <p:nvPr/>
+        </p:nvSpPr>
+        <p:spPr>
+          <a:xfrm>
+            <a:off x="601675" y="320040"/>
+            <a:ext cx="82296" cy="82296"/>
+          </a:xfrm>
+          <a:prstGeom prst="roundRect">
+            <a:avLst>
+              <a:gd name="adj" fmla="val 16667"/>
+            </a:avLst>
+          </a:prstGeom>
+          <a:solidFill>
+            <a:srgbClr val="006DB6"/>
+          </a:solidFill>
+          <a:ln w="12700">
+            <a:solidFill>
+              <a:srgbClr val="006DB6">
+                <a:alpha val="0"/>
+              </a:srgbClr>
+            </a:solidFill>
+            <a:prstDash val="solid"/>
+          </a:ln>
+        </p:spPr>
+        <p:txBody>
+          <a:bodyPr/>
+          <a:p/>
+        </p:txBody>
+      </p:sp>
+      <p:sp>
+        <p:nvSpPr>
+          <p:cNvPr id="5" name="Shape 3"/>
+          <p:cNvSpPr/>
+          <p:nvPr/>
+        </p:nvSpPr>
+        <p:spPr>
+          <a:xfrm>
+            <a:off x="700430" y="320040"/>
+            <a:ext cx="82296" cy="82296"/>
+          </a:xfrm>
+          <a:prstGeom prst="roundRect">
+            <a:avLst>
+              <a:gd name="adj" fmla="val 16667"/>
+            </a:avLst>
+          </a:prstGeom>
+          <a:solidFill>
+            <a:srgbClr val="F67D4B"/>
+          </a:solidFill>
+          <a:ln w="12700">
+            <a:solidFill>
+              <a:srgbClr val="F67D4B">
+                <a:alpha val="0"/>
+              </a:srgbClr>
+            </a:solidFill>
+            <a:prstDash val="solid"/>
+          </a:ln>
+        </p:spPr>
+        <p:txBody>
+          <a:bodyPr/>
+          <a:p/>
+        </p:txBody>
+      </p:sp>
+      <p:sp>
+        <p:nvSpPr>
+          <p:cNvPr id="6" name="Shape 4"/>
+          <p:cNvSpPr/>
+          <p:nvPr/>
+        </p:nvSpPr>
+        <p:spPr>
+          <a:xfrm>
+            <a:off x="799186" y="320040"/>
+            <a:ext cx="82296" cy="82296"/>
+          </a:xfrm>
+          <a:prstGeom prst="roundRect">
+            <a:avLst>
+              <a:gd name="adj" fmla="val 16667"/>
+            </a:avLst>
+          </a:prstGeom>
+          <a:solidFill>
+            <a:srgbClr val="64748B"/>
+          </a:solidFill>
+          <a:ln w="12700">
+            <a:solidFill>
+              <a:srgbClr val="64748B">
+                <a:alpha val="0"/>
+              </a:srgbClr>
+            </a:solidFill>
+            <a:prstDash val="solid"/>
+          </a:ln>
+        </p:spPr>
+        <p:txBody>
+          <a:bodyPr/>
+          <a:p/>
+        </p:txBody>
+      </p:sp>
+      <p:sp>
+        <p:nvSpPr>
+          <p:cNvPr id="7" name="Shape 5"/>
+          <p:cNvSpPr/>
+          <p:nvPr/>
+        </p:nvSpPr>
+        <p:spPr>
+          <a:xfrm>
+            <a:off x="502920" y="418795"/>
+            <a:ext cx="82296" cy="82296"/>
+          </a:xfrm>
+          <a:prstGeom prst="roundRect">
+            <a:avLst>
+              <a:gd name="adj" fmla="val 16667"/>
+            </a:avLst>
+          </a:prstGeom>
+          <a:solidFill>
+            <a:srgbClr val="64748B"/>
+          </a:solidFill>
+          <a:ln w="12700">
+            <a:solidFill>
+              <a:srgbClr val="64748B">
+                <a:alpha val="0"/>
+              </a:srgbClr>
+            </a:solidFill>
+            <a:prstDash val="solid"/>
+          </a:ln>
+        </p:spPr>
+        <p:txBody>
+          <a:bodyPr/>
+          <a:p/>
+        </p:txBody>
+      </p:sp>
+      <p:sp>
+        <p:nvSpPr>
+          <p:cNvPr id="8" name="Shape 6"/>
+          <p:cNvSpPr/>
+          <p:nvPr/>
+        </p:nvSpPr>
+        <p:spPr>
+          <a:xfrm>
+            <a:off x="601675" y="418795"/>
+            <a:ext cx="82296" cy="82296"/>
+          </a:xfrm>
+          <a:prstGeom prst="roundRect">
+            <a:avLst>
+              <a:gd name="adj" fmla="val 16667"/>
+            </a:avLst>
+          </a:prstGeom>
+          <a:solidFill>
+            <a:srgbClr val="1EAAC8"/>
+          </a:solidFill>
+          <a:ln w="12700">
+            <a:solidFill>
+              <a:srgbClr val="1EAAC8">
+                <a:alpha val="0"/>
+              </a:srgbClr>
+            </a:solidFill>
+            <a:prstDash val="solid"/>
+          </a:ln>
+        </p:spPr>
+        <p:txBody>
+          <a:bodyPr/>
+          <a:p/>
+        </p:txBody>
+      </p:sp>
+      <p:sp>
+        <p:nvSpPr>
+          <p:cNvPr id="9" name="Shape 7"/>
+          <p:cNvSpPr/>
+          <p:nvPr/>
+        </p:nvSpPr>
+        <p:spPr>
+          <a:xfrm>
+            <a:off x="700430" y="418795"/>
+            <a:ext cx="82296" cy="82296"/>
+          </a:xfrm>
+          <a:prstGeom prst="roundRect">
+            <a:avLst>
+              <a:gd name="adj" fmla="val 16667"/>
+            </a:avLst>
+          </a:prstGeom>
+          <a:solidFill>
+            <a:srgbClr val="64748B"/>
+          </a:solidFill>
+          <a:ln w="12700">
+            <a:solidFill>
+              <a:srgbClr val="64748B">
+                <a:alpha val="0"/>
+              </a:srgbClr>
+            </a:solidFill>
+            <a:prstDash val="solid"/>
+          </a:ln>
+        </p:spPr>
+        <p:txBody>
+          <a:bodyPr/>
+          <a:p/>
+        </p:txBody>
+      </p:sp>
+      <p:sp>
+        <p:nvSpPr>
+          <p:cNvPr id="10" name="Shape 8"/>
+          <p:cNvSpPr/>
+          <p:nvPr/>
+        </p:nvSpPr>
+        <p:spPr>
+          <a:xfrm>
+            <a:off x="799186" y="418795"/>
+            <a:ext cx="82296" cy="82296"/>
+          </a:xfrm>
+          <a:prstGeom prst="roundRect">
+            <a:avLst>
+              <a:gd name="adj" fmla="val 16667"/>
+            </a:avLst>
+          </a:prstGeom>
+          <a:solidFill>
+            <a:srgbClr val="1EAAC8"/>
+          </a:solidFill>
+          <a:ln w="12700">
+            <a:solidFill>
+              <a:srgbClr val="1EAAC8">
+                <a:alpha val="0"/>
+              </a:srgbClr>
+            </a:solidFill>
+            <a:prstDash val="solid"/>
+          </a:ln>
+        </p:spPr>
+        <p:txBody>
+          <a:bodyPr/>
+          <a:p/>
+        </p:txBody>
+      </p:sp>
+      <p:sp>
+        <p:nvSpPr>
+          <p:cNvPr id="11" name="Shape 9"/>
+          <p:cNvSpPr/>
+          <p:nvPr/>
+        </p:nvSpPr>
+        <p:spPr>
+          <a:xfrm>
+            <a:off x="502920" y="517550"/>
+            <a:ext cx="82296" cy="82296"/>
+          </a:xfrm>
+          <a:prstGeom prst="roundRect">
+            <a:avLst>
+              <a:gd name="adj" fmla="val 16667"/>
+            </a:avLst>
+          </a:prstGeom>
+          <a:solidFill>
+            <a:srgbClr val="94A3AF"/>
+          </a:solidFill>
+          <a:ln w="12700">
+            <a:solidFill>
+              <a:srgbClr val="94A3AF">
+                <a:alpha val="0"/>
+              </a:srgbClr>
+            </a:solidFill>
+            <a:prstDash val="solid"/>
+          </a:ln>
+        </p:spPr>
+        <p:txBody>
+          <a:bodyPr/>
+          <a:p/>
+        </p:txBody>
+      </p:sp>
+      <p:sp>
+        <p:nvSpPr>
+          <p:cNvPr id="12" name="Shape 10"/>
+          <p:cNvSpPr/>
+          <p:nvPr/>
+        </p:nvSpPr>
+        <p:spPr>
+          <a:xfrm>
+            <a:off x="601675" y="517550"/>
+            <a:ext cx="82296" cy="82296"/>
+          </a:xfrm>
+          <a:prstGeom prst="roundRect">
+            <a:avLst>
+              <a:gd name="adj" fmla="val 16667"/>
+            </a:avLst>
+          </a:prstGeom>
+          <a:solidFill>
+            <a:srgbClr val="006DB6"/>
+          </a:solidFill>
+          <a:ln w="12700">
+            <a:solidFill>
+              <a:srgbClr val="006DB6">
+                <a:alpha val="0"/>
+              </a:srgbClr>
+            </a:solidFill>
+            <a:prstDash val="solid"/>
+          </a:ln>
+        </p:spPr>
+        <p:txBody>
+          <a:bodyPr/>
+          <a:p/>
+        </p:txBody>
+      </p:sp>
+      <p:sp>
+        <p:nvSpPr>
+          <p:cNvPr id="13" name="Shape 11"/>
+          <p:cNvSpPr/>
+          <p:nvPr/>
+        </p:nvSpPr>
+        <p:spPr>
+          <a:xfrm>
+            <a:off x="700430" y="517550"/>
+            <a:ext cx="82296" cy="82296"/>
+          </a:xfrm>
+          <a:prstGeom prst="roundRect">
+            <a:avLst>
+              <a:gd name="adj" fmla="val 16667"/>
+            </a:avLst>
+          </a:prstGeom>
+          <a:solidFill>
+            <a:srgbClr val="1EAAC8"/>
+          </a:solidFill>
+          <a:ln w="12700">
+            <a:solidFill>
+              <a:srgbClr val="1EAAC8">
+                <a:alpha val="0"/>
+              </a:srgbClr>
+            </a:solidFill>
+            <a:prstDash val="solid"/>
+          </a:ln>
+        </p:spPr>
+        <p:txBody>
+          <a:bodyPr/>
+          <a:p/>
+        </p:txBody>
+      </p:sp>
+      <p:sp>
+        <p:nvSpPr>
+          <p:cNvPr id="14" name="Shape 12"/>
+          <p:cNvSpPr/>
+          <p:nvPr/>
+        </p:nvSpPr>
+        <p:spPr>
+          <a:xfrm>
+            <a:off x="799186" y="517550"/>
+            <a:ext cx="82296" cy="82296"/>
+          </a:xfrm>
+          <a:prstGeom prst="roundRect">
+            <a:avLst>
+              <a:gd name="adj" fmla="val 16667"/>
+            </a:avLst>
+          </a:prstGeom>
+          <a:solidFill>
+            <a:srgbClr val="64748B"/>
+          </a:solidFill>
+          <a:ln w="12700">
+            <a:solidFill>
+              <a:srgbClr val="64748B">
+                <a:alpha val="0"/>
+              </a:srgbClr>
+            </a:solidFill>
+            <a:prstDash val="solid"/>
+          </a:ln>
+        </p:spPr>
+        <p:txBody>
+          <a:bodyPr/>
+          <a:p/>
+        </p:txBody>
+      </p:sp>
+      <p:sp>
+        <p:nvSpPr>
+          <p:cNvPr id="15" name="Text 13"/>
+          <p:cNvSpPr/>
+          <p:nvPr/>
+        </p:nvSpPr>
+        <p:spPr>
+          <a:xfrm>
+            <a:off x="989381" y="301752"/>
+            <a:ext cx="1645920" cy="329184"/>
+          </a:xfrm>
+          <a:prstGeom prst="rect">
+            <a:avLst/>
+          </a:prstGeom>
+          <a:noFill/>
+          <a:ln/>
+        </p:spPr>
+        <p:txBody>
+          <a:bodyPr wrap="square" lIns="0" tIns="0" rIns="0" bIns="0" rtlCol="0" anchor="ctr"/>
+          <a:lstStyle/>
+          <a:p>
+            <a:pPr indent="0" marL="0">
+              <a:buNone/>
+            </a:pPr>
+            <a:r>
+              <a:rPr lang="en-US" sz="1700" b="1" dirty="0">
+                <a:solidFill>
+                  <a:srgbClr val="1A1A2E"/>
+                </a:solidFill>
+                <a:latin typeface="Arial" pitchFamily="34" charset="0"/>
+                <a:ea typeface="Arial" pitchFamily="34" charset="-122"/>
+                <a:cs typeface="Arial" pitchFamily="34" charset="-120"/>
+              </a:rPr>
+              <a:t>TECHNIJIAN</a:t>
+            </a:r>
+            <a:endParaRPr lang="en-US" sz="1700" dirty="0"/>
+          </a:p>
+        </p:txBody>
+      </p:sp>
+      <p:sp>
+        <p:nvSpPr>
+          <p:cNvPr id="16" name="Text 14"/>
+          <p:cNvSpPr/>
+          <p:nvPr/>
+        </p:nvSpPr>
+        <p:spPr>
+          <a:xfrm>
+            <a:off x="502920" y="868680"/>
+            <a:ext cx="5486400" cy="256032"/>
+          </a:xfrm>
+          <a:prstGeom prst="rect">
+            <a:avLst/>
+          </a:prstGeom>
+          <a:noFill/>
+          <a:ln/>
+        </p:spPr>
+        <p:txBody>
+          <a:bodyPr wrap="square" lIns="0" tIns="0" rIns="0" bIns="0" rtlCol="0" anchor="ctr"/>
+          <a:lstStyle/>
+          <a:p>
+            <a:pPr indent="0" marL="0">
+              <a:buNone/>
+            </a:pPr>
+            <a:r>
+              <a:rPr lang="en-US" sz="1000" b="1" dirty="0">
+                <a:solidFill>
+                  <a:srgbClr val="006DB6"/>
+                </a:solidFill>
+                <a:latin typeface="Arial" pitchFamily="34" charset="0"/>
+                <a:ea typeface="Arial" pitchFamily="34" charset="-122"/>
+                <a:cs typeface="Arial" pitchFamily="34" charset="-120"/>
+              </a:rPr>
+              <a:t>TENANT BACKUP</a:t>
+            </a:r>
+            <a:endParaRPr lang="en-US" sz="1000" dirty="0"/>
+          </a:p>
+        </p:txBody>
+      </p:sp>
+      <p:sp>
+        <p:nvSpPr>
+          <p:cNvPr id="17" name="Text 15"/>
+          <p:cNvSpPr/>
+          <p:nvPr/>
+        </p:nvSpPr>
+        <p:spPr>
+          <a:xfrm>
+            <a:off x="502920" y="1097280"/>
+            <a:ext cx="11338560" cy="502920"/>
+          </a:xfrm>
+          <a:prstGeom prst="rect">
+            <a:avLst/>
+          </a:prstGeom>
+          <a:noFill/>
+          <a:ln/>
+        </p:spPr>
+        <p:txBody>
+          <a:bodyPr wrap="square" lIns="0" tIns="0" rIns="0" bIns="0" rtlCol="0" anchor="ctr"/>
+          <a:lstStyle/>
+          <a:p>
+            <a:pPr indent="0" marL="0">
+              <a:buNone/>
+            </a:pPr>
+            <a:r>
+              <a:rPr lang="en-US" sz="2200" b="1" dirty="0">
+                <a:solidFill>
+                  <a:srgbClr val="1A1A2E"/>
+                </a:solidFill>
+                <a:latin typeface="Arial" pitchFamily="34" charset="0"/>
+                <a:ea typeface="Arial" pitchFamily="34" charset="-122"/>
+                <a:cs typeface="Arial" pitchFamily="34" charset="-120"/>
+              </a:rPr>
+              <a:t>Veeam Is Full-Tenant Backup - M365 Retention Is Not A Backup</a:t>
+            </a:r>
+            <a:endParaRPr lang="en-US" sz="2200" dirty="0"/>
+          </a:p>
+        </p:txBody>
+      </p:sp>
+      <p:sp>
+        <p:nvSpPr>
+          <p:cNvPr id="18" name="Text 16"/>
+          <p:cNvSpPr/>
+          <p:nvPr/>
+        </p:nvSpPr>
+        <p:spPr>
+          <a:xfrm>
+            <a:off x="502920" y="1554480"/>
+            <a:ext cx="11338560" cy="320040"/>
+          </a:xfrm>
+          <a:prstGeom prst="rect">
+            <a:avLst/>
+          </a:prstGeom>
+          <a:noFill/>
+          <a:ln/>
+        </p:spPr>
+        <p:txBody>
+          <a:bodyPr wrap="square" lIns="0" tIns="0" rIns="0" bIns="0" rtlCol="0" anchor="ctr"/>
+          <a:lstStyle/>
+          <a:p>
+            <a:pPr indent="0" marL="0">
+              <a:buNone/>
+            </a:pPr>
+            <a:r>
+              <a:rPr lang="en-US" sz="1100" dirty="0">
+                <a:solidFill>
+                  <a:srgbClr val="334155"/>
+                </a:solidFill>
+                <a:latin typeface="Arial" pitchFamily="34" charset="0"/>
+                <a:ea typeface="Arial" pitchFamily="34" charset="-122"/>
+                <a:cs typeface="Arial" pitchFamily="34" charset="-120"/>
+              </a:rPr>
+              <a:t>SEC Rule 17a-4(f) requires non-rewriteable, non-erasable preservation. Microsoft native retention does not meet that standard on its own.</a:t>
+            </a:r>
+            <a:endParaRPr lang="en-US" sz="1100" dirty="0"/>
+          </a:p>
+        </p:txBody>
+      </p:sp>
+      <p:sp>
+        <p:nvSpPr>
+          <p:cNvPr id="19" name="Shape 17"/>
+          <p:cNvSpPr/>
+          <p:nvPr/>
+        </p:nvSpPr>
+        <p:spPr>
+          <a:xfrm>
+            <a:off x="502920" y="1874520"/>
+            <a:ext cx="11201400" cy="9144"/>
+          </a:xfrm>
+          <a:prstGeom prst="rect">
+            <a:avLst/>
+          </a:prstGeom>
+          <a:solidFill>
+            <a:srgbClr val="D8E0EA"/>
+          </a:solidFill>
+          <a:ln w="12700">
+            <a:solidFill>
+              <a:srgbClr val="D8E0EA">
+                <a:alpha val="0"/>
+              </a:srgbClr>
+            </a:solidFill>
+            <a:prstDash val="solid"/>
+          </a:ln>
+        </p:spPr>
+        <p:txBody>
+          <a:bodyPr/>
+          <a:p/>
+        </p:txBody>
+      </p:sp>
+      <p:sp>
+        <p:nvSpPr>
+          <p:cNvPr id="20" name="Shape 18"/>
+          <p:cNvSpPr/>
+          <p:nvPr/>
+        </p:nvSpPr>
+        <p:spPr>
+          <a:xfrm>
+            <a:off x="457200" y="6446520"/>
+            <a:ext cx="11292840" cy="10973"/>
+          </a:xfrm>
+          <a:prstGeom prst="rect">
+            <a:avLst/>
+          </a:prstGeom>
+          <a:solidFill>
+            <a:srgbClr val="D8E0EA"/>
+          </a:solidFill>
+          <a:ln w="12700">
+            <a:solidFill>
+              <a:srgbClr val="D8E0EA">
+                <a:alpha val="0"/>
+              </a:srgbClr>
+            </a:solidFill>
+            <a:prstDash val="solid"/>
+          </a:ln>
+        </p:spPr>
+        <p:txBody>
+          <a:bodyPr/>
+          <a:p/>
+        </p:txBody>
+      </p:sp>
+      <p:sp>
+        <p:nvSpPr>
+          <p:cNvPr id="21" name="Text 19"/>
+          <p:cNvSpPr/>
+          <p:nvPr/>
+        </p:nvSpPr>
+        <p:spPr>
+          <a:xfrm>
+            <a:off x="502920" y="6492240"/>
+            <a:ext cx="6858000" cy="228600"/>
+          </a:xfrm>
+          <a:prstGeom prst="rect">
+            <a:avLst/>
+          </a:prstGeom>
+          <a:noFill/>
+          <a:ln/>
+        </p:spPr>
+        <p:txBody>
+          <a:bodyPr wrap="square" lIns="0" tIns="0" rIns="0" bIns="0" rtlCol="0" anchor="ctr"/>
+          <a:lstStyle/>
+          <a:p>
+            <a:pPr indent="0" marL="0">
+              <a:buNone/>
+            </a:pPr>
+            <a:r>
+              <a:rPr lang="en-US" sz="900" dirty="0">
+                <a:solidFill>
+                  <a:srgbClr val="64748B"/>
+                </a:solidFill>
+                <a:latin typeface="Arial" pitchFamily="34" charset="0"/>
+                <a:ea typeface="Arial" pitchFamily="34" charset="-122"/>
+                <a:cs typeface="Arial" pitchFamily="34" charset="-120"/>
+              </a:rPr>
+              <a:t>Technijian  |  AFFG IT Compliance Strategy - Revised Proposal Review</a:t>
+            </a:r>
+            <a:endParaRPr lang="en-US" sz="900" dirty="0"/>
+          </a:p>
+        </p:txBody>
+      </p:sp>
+      <p:sp>
+        <p:nvSpPr>
+          <p:cNvPr id="22" name="Text 20"/>
+          <p:cNvSpPr/>
+          <p:nvPr/>
+        </p:nvSpPr>
+        <p:spPr>
+          <a:xfrm>
+            <a:off x="11155680" y="6473952"/>
+            <a:ext cx="548640" cy="228600"/>
+          </a:xfrm>
+          <a:prstGeom prst="rect">
+            <a:avLst/>
+          </a:prstGeom>
+          <a:noFill/>
+          <a:ln/>
+        </p:spPr>
+        <p:txBody>
+          <a:bodyPr wrap="square" lIns="0" tIns="0" rIns="0" bIns="0" rtlCol="0" anchor="ctr"/>
+          <a:lstStyle/>
+          <a:p>
+            <a:pPr algn="r" indent="0" marL="0">
+              <a:buNone/>
+            </a:pPr>
+            <a:r>
+              <a:rPr lang="en-US" sz="1000" b="1" dirty="0">
+                <a:solidFill>
+                  <a:srgbClr val="006DB6"/>
+                </a:solidFill>
+                <a:latin typeface="Arial" pitchFamily="34" charset="0"/>
+                <a:ea typeface="Arial" pitchFamily="34" charset="-122"/>
+                <a:cs typeface="Arial" pitchFamily="34" charset="-120"/>
+              </a:rPr>
+              <a:t>10</a:t>
+            </a:r>
+            <a:endParaRPr lang="en-US" sz="1000" dirty="0"/>
+          </a:p>
+        </p:txBody>
+      </p:sp>
+      <p:sp>
+        <p:nvSpPr>
+          <p:cNvPr id="23" name="Shape 21"/>
+          <p:cNvSpPr/>
+          <p:nvPr/>
+        </p:nvSpPr>
+        <p:spPr>
+          <a:xfrm>
+            <a:off x="594360" y="2103120"/>
+            <a:ext cx="5486400" cy="3977640"/>
+          </a:xfrm>
+          <a:prstGeom prst="roundRect">
+            <a:avLst>
+              <a:gd name="adj" fmla="val 1839"/>
+            </a:avLst>
+          </a:prstGeom>
+          <a:solidFill>
+            <a:srgbClr val="FFFFFF"/>
+          </a:solidFill>
+          <a:ln w="12700">
+            <a:solidFill>
+              <a:srgbClr val="D8E0EA"/>
+            </a:solidFill>
+            <a:prstDash val="solid"/>
+          </a:ln>
+        </p:spPr>
+        <p:txBody>
+          <a:bodyPr/>
+          <a:p/>
+        </p:txBody>
+      </p:sp>
+      <p:sp>
+        <p:nvSpPr>
+          <p:cNvPr id="24" name="Shape 22"/>
+          <p:cNvSpPr/>
+          <p:nvPr/>
+        </p:nvSpPr>
+        <p:spPr>
+          <a:xfrm>
+            <a:off x="594360" y="2103120"/>
+            <a:ext cx="5486400" cy="91440"/>
+          </a:xfrm>
+          <a:prstGeom prst="rect">
+            <a:avLst/>
+          </a:prstGeom>
+          <a:solidFill>
+            <a:srgbClr val="B42318"/>
+          </a:solidFill>
+          <a:ln w="12700">
+            <a:solidFill>
+              <a:srgbClr val="B42318">
+                <a:alpha val="0"/>
+              </a:srgbClr>
+            </a:solidFill>
+            <a:prstDash val="solid"/>
+          </a:ln>
+        </p:spPr>
+        <p:txBody>
+          <a:bodyPr/>
+          <a:p/>
+        </p:txBody>
+      </p:sp>
+      <p:sp>
+        <p:nvSpPr>
+          <p:cNvPr id="25" name="Text 23"/>
+          <p:cNvSpPr/>
+          <p:nvPr/>
+        </p:nvSpPr>
+        <p:spPr>
+          <a:xfrm>
+            <a:off x="758952" y="2286000"/>
+            <a:ext cx="5157216" cy="201168"/>
+          </a:xfrm>
+          <a:prstGeom prst="rect">
+            <a:avLst/>
+          </a:prstGeom>
+          <a:noFill/>
+          <a:ln/>
+        </p:spPr>
+        <p:txBody>
+          <a:bodyPr wrap="square" lIns="0" tIns="0" rIns="0" bIns="0" rtlCol="0" anchor="ctr"/>
+          <a:lstStyle/>
+          <a:p>
+            <a:pPr indent="0" marL="0">
+              <a:buNone/>
+            </a:pPr>
+            <a:r>
+              <a:rPr lang="en-US" sz="900" b="1" dirty="0">
+                <a:solidFill>
+                  <a:srgbClr val="B42318"/>
+                </a:solidFill>
+                <a:latin typeface="Arial" pitchFamily="34" charset="0"/>
+                <a:ea typeface="Arial" pitchFamily="34" charset="-122"/>
+                <a:cs typeface="Arial" pitchFamily="34" charset="-120"/>
+              </a:rPr>
+              <a:t>WHAT M365 RETENTION DOES NOT COVER</a:t>
+            </a:r>
+            <a:endParaRPr lang="en-US" sz="900" dirty="0"/>
+          </a:p>
+        </p:txBody>
+      </p:sp>
+      <p:sp>
+        <p:nvSpPr>
+          <p:cNvPr id="26" name="Text 24"/>
+          <p:cNvSpPr/>
+          <p:nvPr/>
+        </p:nvSpPr>
+        <p:spPr>
+          <a:xfrm>
+            <a:off x="758952" y="2889504"/>
+            <a:ext cx="5157216" cy="2779776"/>
+          </a:xfrm>
+          <a:prstGeom prst="rect">
+            <a:avLst/>
+          </a:prstGeom>
+          <a:noFill/>
+          <a:ln/>
+        </p:spPr>
+        <p:txBody>
+          <a:bodyPr wrap="square" lIns="0" tIns="0" rIns="0" bIns="0" rtlCol="0" anchor="t"/>
+          <a:lstStyle/>
+          <a:p>
+            <a:pPr indent="0" marL="0">
+              <a:buNone/>
+            </a:pPr>
+            <a:r>
+              <a:rPr lang="en-US" sz="1050" dirty="0">
+                <a:solidFill>
+                  <a:srgbClr val="334155"/>
+                </a:solidFill>
+                <a:latin typeface="Arial" pitchFamily="34" charset="0"/>
+                <a:ea typeface="Arial" pitchFamily="34" charset="-122"/>
+                <a:cs typeface="Arial" pitchFamily="34" charset="-120"/>
+              </a:rPr>
+              <a:t>- Tenant-level events (malicious admin, account takeover)</a:t>
+            </a:r>
+            <a:endParaRPr lang="en-US" sz="1050" dirty="0"/>
+          </a:p>
+          <a:p>
+            <a:pPr indent="0" marL="0">
+              <a:buNone/>
+            </a:pPr>
+            <a:r>
+              <a:rPr lang="en-US" sz="1050" dirty="0">
+                <a:solidFill>
+                  <a:srgbClr val="334155"/>
+                </a:solidFill>
+                <a:latin typeface="Arial" pitchFamily="34" charset="0"/>
+                <a:ea typeface="Arial" pitchFamily="34" charset="-122"/>
+                <a:cs typeface="Arial" pitchFamily="34" charset="-120"/>
+              </a:rPr>
+              <a:t>- Ransomware encrypting OneDrive / SharePoint via sync</a:t>
+            </a:r>
+            <a:endParaRPr lang="en-US" sz="1050" dirty="0"/>
+          </a:p>
+          <a:p>
+            <a:pPr indent="0" marL="0">
+              <a:buNone/>
+            </a:pPr>
+            <a:r>
+              <a:rPr lang="en-US" sz="1050" dirty="0">
+                <a:solidFill>
+                  <a:srgbClr val="334155"/>
+                </a:solidFill>
+                <a:latin typeface="Arial" pitchFamily="34" charset="0"/>
+                <a:ea typeface="Arial" pitchFamily="34" charset="-122"/>
+                <a:cs typeface="Arial" pitchFamily="34" charset="-120"/>
+              </a:rPr>
+              <a:t>- Accidental or malicious mass deletion across the tenant</a:t>
+            </a:r>
+            <a:endParaRPr lang="en-US" sz="1050" dirty="0"/>
+          </a:p>
+          <a:p>
+            <a:pPr indent="0" marL="0">
+              <a:buNone/>
+            </a:pPr>
+            <a:r>
+              <a:rPr lang="en-US" sz="1050" dirty="0">
+                <a:solidFill>
+                  <a:srgbClr val="334155"/>
+                </a:solidFill>
+                <a:latin typeface="Arial" pitchFamily="34" charset="0"/>
+                <a:ea typeface="Arial" pitchFamily="34" charset="-122"/>
+                <a:cs typeface="Arial" pitchFamily="34" charset="-120"/>
+              </a:rPr>
+              <a:t>- Retention-policy changes that shorten preservation</a:t>
+            </a:r>
+            <a:endParaRPr lang="en-US" sz="1050" dirty="0"/>
+          </a:p>
+          <a:p>
+            <a:pPr indent="0" marL="0">
+              <a:buNone/>
+            </a:pPr>
+            <a:r>
+              <a:rPr lang="en-US" sz="1050" dirty="0">
+                <a:solidFill>
+                  <a:srgbClr val="334155"/>
+                </a:solidFill>
+                <a:latin typeface="Arial" pitchFamily="34" charset="0"/>
+                <a:ea typeface="Arial" pitchFamily="34" charset="-122"/>
+                <a:cs typeface="Arial" pitchFamily="34" charset="-120"/>
+              </a:rPr>
+              <a:t>- Point-in-time restore at item, folder, or site granularity</a:t>
+            </a:r>
+            <a:endParaRPr lang="en-US" sz="1050" dirty="0"/>
+          </a:p>
+          <a:p>
+            <a:pPr indent="0" marL="0">
+              <a:buNone/>
+            </a:pPr>
+            <a:r>
+              <a:rPr lang="en-US" sz="1050" dirty="0">
+                <a:solidFill>
+                  <a:srgbClr val="334155"/>
+                </a:solidFill>
+                <a:latin typeface="Arial" pitchFamily="34" charset="0"/>
+                <a:ea typeface="Arial" pitchFamily="34" charset="-122"/>
+                <a:cs typeface="Arial" pitchFamily="34" charset="-120"/>
+              </a:rPr>
+              <a:t>- SharePoint site recovery after structural damage</a:t>
+            </a:r>
+            <a:endParaRPr lang="en-US" sz="1050" dirty="0"/>
+          </a:p>
+          <a:p>
+            <a:pPr indent="0" marL="0">
+              <a:buNone/>
+            </a:pPr>
+            <a:r>
+              <a:rPr lang="en-US" sz="1050" dirty="0">
+                <a:solidFill>
+                  <a:srgbClr val="334155"/>
+                </a:solidFill>
+                <a:latin typeface="Arial" pitchFamily="34" charset="0"/>
+                <a:ea typeface="Arial" pitchFamily="34" charset="-122"/>
+                <a:cs typeface="Arial" pitchFamily="34" charset="-120"/>
+              </a:rPr>
+              <a:t>- Teams channel, chat, and tab content recovery</a:t>
+            </a:r>
+            <a:endParaRPr lang="en-US" sz="1050" dirty="0"/>
+          </a:p>
+          <a:p>
+            <a:pPr indent="0" marL="0">
+              <a:buNone/>
+            </a:pPr>
+            <a:r>
+              <a:rPr lang="en-US" sz="1050" dirty="0">
+                <a:solidFill>
+                  <a:srgbClr val="334155"/>
+                </a:solidFill>
+                <a:latin typeface="Arial" pitchFamily="34" charset="0"/>
+                <a:ea typeface="Arial" pitchFamily="34" charset="-122"/>
+                <a:cs typeface="Arial" pitchFamily="34" charset="-120"/>
+              </a:rPr>
+              <a:t>- Independent chain-of-custody outside the tenant</a:t>
+            </a:r>
+            <a:endParaRPr lang="en-US" sz="1050" dirty="0"/>
+          </a:p>
+          <a:p>
+            <a:pPr indent="0" marL="0">
+              <a:buNone/>
+            </a:pPr>
+            <a:endParaRPr lang="en-US" sz="1050" dirty="0"/>
+          </a:p>
+          <a:p>
+            <a:pPr indent="0" marL="0">
+              <a:buNone/>
+            </a:pPr>
+            <a:r>
+              <a:rPr lang="en-US" sz="1050" dirty="0">
+                <a:solidFill>
+                  <a:srgbClr val="334155"/>
+                </a:solidFill>
+                <a:latin typeface="Arial" pitchFamily="34" charset="0"/>
+                <a:ea typeface="Arial" pitchFamily="34" charset="-122"/>
+                <a:cs typeface="Arial" pitchFamily="34" charset="-120"/>
+              </a:rPr>
+              <a:t>Microsoft retention is a policy inside the tenant. If the tenant is the attack surface, retention is not a backup.</a:t>
+            </a:r>
+            <a:endParaRPr lang="en-US" sz="1050" dirty="0"/>
+          </a:p>
+        </p:txBody>
+      </p:sp>
+      <p:sp>
+        <p:nvSpPr>
+          <p:cNvPr id="27" name="Text 25"/>
+          <p:cNvSpPr/>
+          <p:nvPr/>
+        </p:nvSpPr>
+        <p:spPr>
+          <a:xfrm>
+            <a:off x="758952" y="5733288"/>
+            <a:ext cx="5157216" cy="256032"/>
+          </a:xfrm>
+          <a:prstGeom prst="rect">
+            <a:avLst/>
+          </a:prstGeom>
+          <a:noFill/>
+          <a:ln/>
+        </p:spPr>
+        <p:txBody>
+          <a:bodyPr wrap="square" lIns="0" tIns="0" rIns="0" bIns="0" rtlCol="0" anchor="ctr"/>
+          <a:lstStyle/>
+          <a:p>
+            <a:pPr indent="0" marL="0">
+              <a:buNone/>
+            </a:pPr>
+            <a:r>
+              <a:rPr lang="en-US" sz="900" b="1" i="1" dirty="0">
+                <a:solidFill>
+                  <a:srgbClr val="B42318"/>
+                </a:solidFill>
+                <a:latin typeface="Arial" pitchFamily="34" charset="0"/>
+                <a:ea typeface="Arial" pitchFamily="34" charset="-122"/>
+                <a:cs typeface="Arial" pitchFamily="34" charset="-120"/>
+              </a:rPr>
+              <a:t>SEC Rule 17a-4(f); FINRA 4511</a:t>
+            </a:r>
+            <a:endParaRPr lang="en-US" sz="900" dirty="0"/>
+          </a:p>
+        </p:txBody>
+      </p:sp>
+      <p:sp>
+        <p:nvSpPr>
+          <p:cNvPr id="28" name="Shape 26"/>
+          <p:cNvSpPr/>
+          <p:nvPr/>
+        </p:nvSpPr>
+        <p:spPr>
+          <a:xfrm>
+            <a:off x="6263640" y="2103120"/>
+            <a:ext cx="5486400" cy="3977640"/>
+          </a:xfrm>
+          <a:prstGeom prst="roundRect">
+            <a:avLst>
+              <a:gd name="adj" fmla="val 1839"/>
+            </a:avLst>
+          </a:prstGeom>
+          <a:solidFill>
+            <a:srgbClr val="FFFFFF"/>
+          </a:solidFill>
+          <a:ln w="12700">
+            <a:solidFill>
+              <a:srgbClr val="D8E0EA"/>
+            </a:solidFill>
+            <a:prstDash val="solid"/>
+          </a:ln>
+        </p:spPr>
+        <p:txBody>
+          <a:bodyPr/>
+          <a:p/>
+        </p:txBody>
+      </p:sp>
+      <p:sp>
+        <p:nvSpPr>
+          <p:cNvPr id="29" name="Shape 27"/>
+          <p:cNvSpPr/>
+          <p:nvPr/>
+        </p:nvSpPr>
+        <p:spPr>
+          <a:xfrm>
+            <a:off x="6263640" y="2103120"/>
+            <a:ext cx="5486400" cy="91440"/>
+          </a:xfrm>
+          <a:prstGeom prst="rect">
+            <a:avLst/>
+          </a:prstGeom>
+          <a:solidFill>
+            <a:srgbClr val="006DB6"/>
+          </a:solidFill>
+          <a:ln w="12700">
+            <a:solidFill>
+              <a:srgbClr val="006DB6">
+                <a:alpha val="0"/>
+              </a:srgbClr>
+            </a:solidFill>
+            <a:prstDash val="solid"/>
+          </a:ln>
+        </p:spPr>
+        <p:txBody>
+          <a:bodyPr/>
+          <a:p/>
+        </p:txBody>
+      </p:sp>
+      <p:sp>
+        <p:nvSpPr>
+          <p:cNvPr id="30" name="Text 28"/>
+          <p:cNvSpPr/>
+          <p:nvPr/>
+        </p:nvSpPr>
+        <p:spPr>
+          <a:xfrm>
+            <a:off x="6428232" y="2286000"/>
+            <a:ext cx="5157216" cy="201168"/>
+          </a:xfrm>
+          <a:prstGeom prst="rect">
+            <a:avLst/>
+          </a:prstGeom>
+          <a:noFill/>
+          <a:ln/>
+        </p:spPr>
+        <p:txBody>
+          <a:bodyPr wrap="square" lIns="0" tIns="0" rIns="0" bIns="0" rtlCol="0" anchor="ctr"/>
+          <a:lstStyle/>
+          <a:p>
+            <a:pPr indent="0" marL="0">
+              <a:buNone/>
+            </a:pPr>
+            <a:r>
+              <a:rPr lang="en-US" sz="900" b="1" dirty="0">
+                <a:solidFill>
+                  <a:srgbClr val="006DB6"/>
+                </a:solidFill>
+                <a:latin typeface="Arial" pitchFamily="34" charset="0"/>
+                <a:ea typeface="Arial" pitchFamily="34" charset="-122"/>
+                <a:cs typeface="Arial" pitchFamily="34" charset="-120"/>
+              </a:rPr>
+              <a:t>WHAT VEEAM BACKUP FOR M365 ADDS</a:t>
+            </a:r>
+            <a:endParaRPr lang="en-US" sz="900" dirty="0"/>
+          </a:p>
+        </p:txBody>
+      </p:sp>
+      <p:sp>
+        <p:nvSpPr>
+          <p:cNvPr id="31" name="Text 29"/>
+          <p:cNvSpPr/>
+          <p:nvPr/>
+        </p:nvSpPr>
+        <p:spPr>
+          <a:xfrm>
+            <a:off x="6428232" y="2889504"/>
+            <a:ext cx="5157216" cy="2779776"/>
+          </a:xfrm>
+          <a:prstGeom prst="rect">
+            <a:avLst/>
+          </a:prstGeom>
+          <a:noFill/>
+          <a:ln/>
+        </p:spPr>
+        <p:txBody>
+          <a:bodyPr wrap="square" lIns="0" tIns="0" rIns="0" bIns="0" rtlCol="0" anchor="t"/>
+          <a:lstStyle/>
+          <a:p>
+            <a:pPr indent="0" marL="0">
+              <a:buNone/>
+            </a:pPr>
+            <a:r>
+              <a:rPr lang="en-US" sz="1050" dirty="0">
+                <a:solidFill>
+                  <a:srgbClr val="334155"/>
+                </a:solidFill>
+                <a:latin typeface="Arial" pitchFamily="34" charset="0"/>
+                <a:ea typeface="Arial" pitchFamily="34" charset="-122"/>
+                <a:cs typeface="Arial" pitchFamily="34" charset="-120"/>
+              </a:rPr>
+              <a:t>- Full tenant backup: Exchange, SharePoint, OneDrive, Teams</a:t>
+            </a:r>
+            <a:endParaRPr lang="en-US" sz="1050" dirty="0"/>
+          </a:p>
+          <a:p>
+            <a:pPr indent="0" marL="0">
+              <a:buNone/>
+            </a:pPr>
+            <a:r>
+              <a:rPr lang="en-US" sz="1050" dirty="0">
+                <a:solidFill>
+                  <a:srgbClr val="334155"/>
+                </a:solidFill>
+                <a:latin typeface="Arial" pitchFamily="34" charset="0"/>
+                <a:ea typeface="Arial" pitchFamily="34" charset="-122"/>
+                <a:cs typeface="Arial" pitchFamily="34" charset="-120"/>
+              </a:rPr>
+              <a:t>- Immutable off-tenant storage (WORM-capable)</a:t>
+            </a:r>
+            <a:endParaRPr lang="en-US" sz="1050" dirty="0"/>
+          </a:p>
+          <a:p>
+            <a:pPr indent="0" marL="0">
+              <a:buNone/>
+            </a:pPr>
+            <a:r>
+              <a:rPr lang="en-US" sz="1050" dirty="0">
+                <a:solidFill>
+                  <a:srgbClr val="334155"/>
+                </a:solidFill>
+                <a:latin typeface="Arial" pitchFamily="34" charset="0"/>
+                <a:ea typeface="Arial" pitchFamily="34" charset="-122"/>
+                <a:cs typeface="Arial" pitchFamily="34" charset="-120"/>
+              </a:rPr>
+              <a:t>- Granular restore to item, folder, mailbox, or site level</a:t>
+            </a:r>
+            <a:endParaRPr lang="en-US" sz="1050" dirty="0"/>
+          </a:p>
+          <a:p>
+            <a:pPr indent="0" marL="0">
+              <a:buNone/>
+            </a:pPr>
+            <a:r>
+              <a:rPr lang="en-US" sz="1050" dirty="0">
+                <a:solidFill>
+                  <a:srgbClr val="334155"/>
+                </a:solidFill>
+                <a:latin typeface="Arial" pitchFamily="34" charset="0"/>
+                <a:ea typeface="Arial" pitchFamily="34" charset="-122"/>
+                <a:cs typeface="Arial" pitchFamily="34" charset="-120"/>
+              </a:rPr>
+              <a:t>- Point-in-time recovery for ransomware scenarios</a:t>
+            </a:r>
+            <a:endParaRPr lang="en-US" sz="1050" dirty="0"/>
+          </a:p>
+          <a:p>
+            <a:pPr indent="0" marL="0">
+              <a:buNone/>
+            </a:pPr>
+            <a:r>
+              <a:rPr lang="en-US" sz="1050" dirty="0">
+                <a:solidFill>
+                  <a:srgbClr val="334155"/>
+                </a:solidFill>
+                <a:latin typeface="Arial" pitchFamily="34" charset="0"/>
+                <a:ea typeface="Arial" pitchFamily="34" charset="-122"/>
+                <a:cs typeface="Arial" pitchFamily="34" charset="-120"/>
+              </a:rPr>
+              <a:t>- Independent encryption keys and access controls</a:t>
+            </a:r>
+            <a:endParaRPr lang="en-US" sz="1050" dirty="0"/>
+          </a:p>
+          <a:p>
+            <a:pPr indent="0" marL="0">
+              <a:buNone/>
+            </a:pPr>
+            <a:r>
+              <a:rPr lang="en-US" sz="1050" dirty="0">
+                <a:solidFill>
+                  <a:srgbClr val="334155"/>
+                </a:solidFill>
+                <a:latin typeface="Arial" pitchFamily="34" charset="0"/>
+                <a:ea typeface="Arial" pitchFamily="34" charset="-122"/>
+                <a:cs typeface="Arial" pitchFamily="34" charset="-120"/>
+              </a:rPr>
+              <a:t>- Restore to alternate tenant for DR</a:t>
+            </a:r>
+            <a:endParaRPr lang="en-US" sz="1050" dirty="0"/>
+          </a:p>
+          <a:p>
+            <a:pPr indent="0" marL="0">
+              <a:buNone/>
+            </a:pPr>
+            <a:r>
+              <a:rPr lang="en-US" sz="1050" dirty="0">
+                <a:solidFill>
+                  <a:srgbClr val="334155"/>
+                </a:solidFill>
+                <a:latin typeface="Arial" pitchFamily="34" charset="0"/>
+                <a:ea typeface="Arial" pitchFamily="34" charset="-122"/>
+                <a:cs typeface="Arial" pitchFamily="34" charset="-120"/>
+              </a:rPr>
+              <a:t>- Evidence chain suitable for 17a-4(f) attestation</a:t>
+            </a:r>
+            <a:endParaRPr lang="en-US" sz="1050" dirty="0"/>
+          </a:p>
+          <a:p>
+            <a:pPr indent="0" marL="0">
+              <a:buNone/>
+            </a:pPr>
+            <a:endParaRPr lang="en-US" sz="1050" dirty="0"/>
+          </a:p>
+          <a:p>
+            <a:pPr indent="0" marL="0">
+              <a:buNone/>
+            </a:pPr>
+            <a:r>
+              <a:rPr lang="en-US" sz="1050" dirty="0">
+                <a:solidFill>
+                  <a:srgbClr val="334155"/>
+                </a:solidFill>
+                <a:latin typeface="Arial" pitchFamily="34" charset="0"/>
+                <a:ea typeface="Arial" pitchFamily="34" charset="-122"/>
+                <a:cs typeface="Arial" pitchFamily="34" charset="-120"/>
+              </a:rPr>
+              <a:t>The $100/month storage line is the backup repository. Not duplicative of M365 retention - it is the control that makes 17a-4(f) defensible.</a:t>
+            </a:r>
+            <a:endParaRPr lang="en-US" sz="1050" dirty="0"/>
+          </a:p>
+        </p:txBody>
+      </p:sp>
+      <p:sp>
+        <p:nvSpPr>
+          <p:cNvPr id="32" name="Text 30"/>
+          <p:cNvSpPr/>
+          <p:nvPr/>
+        </p:nvSpPr>
+        <p:spPr>
+          <a:xfrm>
+            <a:off x="6428232" y="5733288"/>
+            <a:ext cx="5157216" cy="256032"/>
+          </a:xfrm>
+          <a:prstGeom prst="rect">
+            <a:avLst/>
+          </a:prstGeom>
+          <a:noFill/>
+          <a:ln/>
+        </p:spPr>
+        <p:txBody>
+          <a:bodyPr wrap="square" lIns="0" tIns="0" rIns="0" bIns="0" rtlCol="0" anchor="ctr"/>
+          <a:lstStyle/>
+          <a:p>
+            <a:pPr indent="0" marL="0">
+              <a:buNone/>
+            </a:pPr>
+            <a:r>
+              <a:rPr lang="en-US" sz="900" b="1" i="1" dirty="0">
+                <a:solidFill>
+                  <a:srgbClr val="006DB6"/>
+                </a:solidFill>
+                <a:latin typeface="Arial" pitchFamily="34" charset="0"/>
+                <a:ea typeface="Arial" pitchFamily="34" charset="-122"/>
+                <a:cs typeface="Arial" pitchFamily="34" charset="-120"/>
+              </a:rPr>
+              <a:t>SEC Rule 17a-4(b),(f); FINRA 4511; Reg S-P availability</a:t>
+            </a:r>
+            <a:endParaRPr lang="en-US" sz="900" dirty="0"/>
+          </a:p>
+        </p:txBody>
+      </p:sp>
+    </p:spTree>
+  </p:cSld>
+  <p:clrMapOvr>
+    <a:masterClrMapping/>
+  </p:clrMapOvr>
+</p:sld>
+</file>
+
+<file path=ppt/slides/slide11.xml><?xml version="1.0" encoding="utf-8"?>
 <p:sld xmlns:a="http://schemas.openxmlformats.org/drawingml/2006/main" xmlns:r="http://schemas.openxmlformats.org/officeDocument/2006/relationships" xmlns:p="http://schemas.openxmlformats.org/presentationml/2006/main">
   <p:cSld name="Slide 10">
     <p:bg>
@@ -3021,6 +4486,10 @@
             <a:prstDash val="solid"/>
           </a:ln>
         </p:spPr>
+        <p:txBody>
+          <a:bodyPr/>
+          <a:p/>
+        </p:txBody>
       </p:sp>
       <p:sp>
         <p:nvSpPr>
@@ -3050,6 +4519,10 @@
             <a:prstDash val="solid"/>
           </a:ln>
         </p:spPr>
+        <p:txBody>
+          <a:bodyPr/>
+          <a:p/>
+        </p:txBody>
       </p:sp>
       <p:sp>
         <p:nvSpPr>
@@ -3079,6 +4552,10 @@
             <a:prstDash val="solid"/>
           </a:ln>
         </p:spPr>
+        <p:txBody>
+          <a:bodyPr/>
+          <a:p/>
+        </p:txBody>
       </p:sp>
       <p:sp>
         <p:nvSpPr>
@@ -3108,6 +4585,10 @@
             <a:prstDash val="solid"/>
           </a:ln>
         </p:spPr>
+        <p:txBody>
+          <a:bodyPr/>
+          <a:p/>
+        </p:txBody>
       </p:sp>
       <p:sp>
         <p:nvSpPr>
@@ -3137,6 +4618,10 @@
             <a:prstDash val="solid"/>
           </a:ln>
         </p:spPr>
+        <p:txBody>
+          <a:bodyPr/>
+          <a:p/>
+        </p:txBody>
       </p:sp>
       <p:sp>
         <p:nvSpPr>
@@ -3166,6 +4651,10 @@
             <a:prstDash val="solid"/>
           </a:ln>
         </p:spPr>
+        <p:txBody>
+          <a:bodyPr/>
+          <a:p/>
+        </p:txBody>
       </p:sp>
       <p:sp>
         <p:nvSpPr>
@@ -3195,6 +4684,10 @@
             <a:prstDash val="solid"/>
           </a:ln>
         </p:spPr>
+        <p:txBody>
+          <a:bodyPr/>
+          <a:p/>
+        </p:txBody>
       </p:sp>
       <p:sp>
         <p:nvSpPr>
@@ -3224,6 +4717,10 @@
             <a:prstDash val="solid"/>
           </a:ln>
         </p:spPr>
+        <p:txBody>
+          <a:bodyPr/>
+          <a:p/>
+        </p:txBody>
       </p:sp>
       <p:sp>
         <p:nvSpPr>
@@ -3253,6 +4750,10 @@
             <a:prstDash val="solid"/>
           </a:ln>
         </p:spPr>
+        <p:txBody>
+          <a:bodyPr/>
+          <a:p/>
+        </p:txBody>
       </p:sp>
       <p:sp>
         <p:nvSpPr>
@@ -3282,6 +4783,10 @@
             <a:prstDash val="solid"/>
           </a:ln>
         </p:spPr>
+        <p:txBody>
+          <a:bodyPr/>
+          <a:p/>
+        </p:txBody>
       </p:sp>
       <p:sp>
         <p:nvSpPr>
@@ -3311,6 +4816,10 @@
             <a:prstDash val="solid"/>
           </a:ln>
         </p:spPr>
+        <p:txBody>
+          <a:bodyPr/>
+          <a:p/>
+        </p:txBody>
       </p:sp>
       <p:sp>
         <p:nvSpPr>
@@ -3340,6 +4849,10 @@
             <a:prstDash val="solid"/>
           </a:ln>
         </p:spPr>
+        <p:txBody>
+          <a:bodyPr/>
+          <a:p/>
+        </p:txBody>
       </p:sp>
       <p:sp>
         <p:nvSpPr>
@@ -3369,6 +4882,10 @@
             <a:prstDash val="solid"/>
           </a:ln>
         </p:spPr>
+        <p:txBody>
+          <a:bodyPr/>
+          <a:p/>
+        </p:txBody>
       </p:sp>
       <p:sp>
         <p:nvSpPr>
@@ -3552,6 +5069,10 @@
             <a:prstDash val="solid"/>
           </a:ln>
         </p:spPr>
+        <p:txBody>
+          <a:bodyPr/>
+          <a:p/>
+        </p:txBody>
       </p:sp>
       <p:sp>
         <p:nvSpPr>
@@ -3579,6 +5100,10 @@
             <a:prstDash val="solid"/>
           </a:ln>
         </p:spPr>
+        <p:txBody>
+          <a:bodyPr/>
+          <a:p/>
+        </p:txBody>
       </p:sp>
       <p:sp>
         <p:nvSpPr>
@@ -3652,7 +5177,7 @@
                 <a:ea typeface="Arial" pitchFamily="34" charset="-122"/>
                 <a:cs typeface="Arial" pitchFamily="34" charset="-120"/>
               </a:rPr>
-              <a:t>10</a:t>
+              <a:t>11</a:t>
             </a:r>
             <a:endParaRPr lang="en-US" sz="1000" dirty="0"/>
           </a:p>
@@ -3684,6 +5209,10 @@
             <a:prstDash val="solid"/>
           </a:ln>
         </p:spPr>
+        <p:txBody>
+          <a:bodyPr/>
+          <a:p/>
+        </p:txBody>
       </p:sp>
       <p:sp>
         <p:nvSpPr>
@@ -3711,6 +5240,10 @@
             <a:prstDash val="solid"/>
           </a:ln>
         </p:spPr>
+        <p:txBody>
+          <a:bodyPr/>
+          <a:p/>
+        </p:txBody>
       </p:sp>
       <p:sp>
         <p:nvSpPr>
@@ -3940,6 +5473,10 @@
             <a:prstDash val="solid"/>
           </a:ln>
         </p:spPr>
+        <p:txBody>
+          <a:bodyPr/>
+          <a:p/>
+        </p:txBody>
       </p:sp>
       <p:sp>
         <p:nvSpPr>
@@ -3967,6 +5504,10 @@
             <a:prstDash val="solid"/>
           </a:ln>
         </p:spPr>
+        <p:txBody>
+          <a:bodyPr/>
+          <a:p/>
+        </p:txBody>
       </p:sp>
       <p:sp>
         <p:nvSpPr>
@@ -4196,6 +5737,10 @@
             <a:prstDash val="solid"/>
           </a:ln>
         </p:spPr>
+        <p:txBody>
+          <a:bodyPr/>
+          <a:p/>
+        </p:txBody>
       </p:sp>
       <p:sp>
         <p:nvSpPr>
@@ -4223,6 +5768,10 @@
             <a:prstDash val="solid"/>
           </a:ln>
         </p:spPr>
+        <p:txBody>
+          <a:bodyPr/>
+          <a:p/>
+        </p:txBody>
       </p:sp>
       <p:sp>
         <p:nvSpPr>
@@ -4395,7 +5944,7 @@
 </p:sld>
 </file>
 
-<file path=ppt/slides/slide11.xml><?xml version="1.0" encoding="utf-8"?>
+<file path=ppt/slides/slide12.xml><?xml version="1.0" encoding="utf-8"?>
 <p:sld xmlns:a="http://schemas.openxmlformats.org/drawingml/2006/main" xmlns:r="http://schemas.openxmlformats.org/officeDocument/2006/relationships" xmlns:p="http://schemas.openxmlformats.org/presentationml/2006/main">
   <p:cSld name="Slide 11">
     <p:bg>
@@ -4445,6 +5994,10 @@
             <a:prstDash val="solid"/>
           </a:ln>
         </p:spPr>
+        <p:txBody>
+          <a:bodyPr/>
+          <a:p/>
+        </p:txBody>
       </p:sp>
       <p:sp>
         <p:nvSpPr>
@@ -4474,6 +6027,10 @@
             <a:prstDash val="solid"/>
           </a:ln>
         </p:spPr>
+        <p:txBody>
+          <a:bodyPr/>
+          <a:p/>
+        </p:txBody>
       </p:sp>
       <p:sp>
         <p:nvSpPr>
@@ -4503,6 +6060,10 @@
             <a:prstDash val="solid"/>
           </a:ln>
         </p:spPr>
+        <p:txBody>
+          <a:bodyPr/>
+          <a:p/>
+        </p:txBody>
       </p:sp>
       <p:sp>
         <p:nvSpPr>
@@ -4532,6 +6093,10 @@
             <a:prstDash val="solid"/>
           </a:ln>
         </p:spPr>
+        <p:txBody>
+          <a:bodyPr/>
+          <a:p/>
+        </p:txBody>
       </p:sp>
       <p:sp>
         <p:nvSpPr>
@@ -4561,6 +6126,10 @@
             <a:prstDash val="solid"/>
           </a:ln>
         </p:spPr>
+        <p:txBody>
+          <a:bodyPr/>
+          <a:p/>
+        </p:txBody>
       </p:sp>
       <p:sp>
         <p:nvSpPr>
@@ -4590,6 +6159,10 @@
             <a:prstDash val="solid"/>
           </a:ln>
         </p:spPr>
+        <p:txBody>
+          <a:bodyPr/>
+          <a:p/>
+        </p:txBody>
       </p:sp>
       <p:sp>
         <p:nvSpPr>
@@ -4619,6 +6192,10 @@
             <a:prstDash val="solid"/>
           </a:ln>
         </p:spPr>
+        <p:txBody>
+          <a:bodyPr/>
+          <a:p/>
+        </p:txBody>
       </p:sp>
       <p:sp>
         <p:nvSpPr>
@@ -4648,6 +6225,10 @@
             <a:prstDash val="solid"/>
           </a:ln>
         </p:spPr>
+        <p:txBody>
+          <a:bodyPr/>
+          <a:p/>
+        </p:txBody>
       </p:sp>
       <p:sp>
         <p:nvSpPr>
@@ -4677,6 +6258,10 @@
             <a:prstDash val="solid"/>
           </a:ln>
         </p:spPr>
+        <p:txBody>
+          <a:bodyPr/>
+          <a:p/>
+        </p:txBody>
       </p:sp>
       <p:sp>
         <p:nvSpPr>
@@ -4706,6 +6291,10 @@
             <a:prstDash val="solid"/>
           </a:ln>
         </p:spPr>
+        <p:txBody>
+          <a:bodyPr/>
+          <a:p/>
+        </p:txBody>
       </p:sp>
       <p:sp>
         <p:nvSpPr>
@@ -4735,6 +6324,10 @@
             <a:prstDash val="solid"/>
           </a:ln>
         </p:spPr>
+        <p:txBody>
+          <a:bodyPr/>
+          <a:p/>
+        </p:txBody>
       </p:sp>
       <p:sp>
         <p:nvSpPr>
@@ -4764,6 +6357,10 @@
             <a:prstDash val="solid"/>
           </a:ln>
         </p:spPr>
+        <p:txBody>
+          <a:bodyPr/>
+          <a:p/>
+        </p:txBody>
       </p:sp>
       <p:sp>
         <p:nvSpPr>
@@ -4793,6 +6390,10 @@
             <a:prstDash val="solid"/>
           </a:ln>
         </p:spPr>
+        <p:txBody>
+          <a:bodyPr/>
+          <a:p/>
+        </p:txBody>
       </p:sp>
       <p:sp>
         <p:nvSpPr>
@@ -4976,6 +6577,10 @@
             <a:prstDash val="solid"/>
           </a:ln>
         </p:spPr>
+        <p:txBody>
+          <a:bodyPr/>
+          <a:p/>
+        </p:txBody>
       </p:sp>
       <p:sp>
         <p:nvSpPr>
@@ -5003,6 +6608,10 @@
             <a:prstDash val="solid"/>
           </a:ln>
         </p:spPr>
+        <p:txBody>
+          <a:bodyPr/>
+          <a:p/>
+        </p:txBody>
       </p:sp>
       <p:sp>
         <p:nvSpPr>
@@ -5076,7 +6685,7 @@
                 <a:ea typeface="Arial" pitchFamily="34" charset="-122"/>
                 <a:cs typeface="Arial" pitchFamily="34" charset="-120"/>
               </a:rPr>
-              <a:t>11</a:t>
+              <a:t>12</a:t>
             </a:r>
             <a:endParaRPr lang="en-US" sz="1000" dirty="0"/>
           </a:p>
@@ -5110,6 +6719,10 @@
             <a:prstDash val="solid"/>
           </a:ln>
         </p:spPr>
+        <p:txBody>
+          <a:bodyPr/>
+          <a:p/>
+        </p:txBody>
       </p:sp>
       <p:sp>
         <p:nvSpPr>
@@ -5237,7 +6850,7 @@
         <p:spPr>
           <a:xfrm>
             <a:off x="502920" y="2423160"/>
-            <a:ext cx="11155680" cy="530352"/>
+            <a:ext cx="11155680" cy="485354"/>
           </a:xfrm>
           <a:prstGeom prst="rect">
             <a:avLst/>
@@ -5252,6 +6865,10 @@
             <a:prstDash val="solid"/>
           </a:ln>
         </p:spPr>
+        <p:txBody>
+          <a:bodyPr/>
+          <a:p/>
+        </p:txBody>
       </p:sp>
       <p:sp>
         <p:nvSpPr>
@@ -5261,8 +6878,8 @@
         </p:nvSpPr>
         <p:spPr>
           <a:xfrm>
-            <a:off x="576072" y="2505456"/>
-            <a:ext cx="2139696" cy="384048"/>
+            <a:off x="576072" y="2468160"/>
+            <a:ext cx="2139696" cy="425354"/>
           </a:xfrm>
           <a:prstGeom prst="rect">
             <a:avLst/>
@@ -5300,8 +6917,8 @@
         </p:nvSpPr>
         <p:spPr>
           <a:xfrm>
-            <a:off x="2862072" y="2505456"/>
-            <a:ext cx="4014216" cy="384048"/>
+            <a:off x="2862072" y="2468160"/>
+            <a:ext cx="4014216" cy="425354"/>
           </a:xfrm>
           <a:prstGeom prst="rect">
             <a:avLst/>
@@ -5339,8 +6956,8 @@
         </p:nvSpPr>
         <p:spPr>
           <a:xfrm>
-            <a:off x="7022592" y="2505456"/>
-            <a:ext cx="4562856" cy="384048"/>
+            <a:off x="7022592" y="2468160"/>
+            <a:ext cx="4562856" cy="425354"/>
           </a:xfrm>
           <a:prstGeom prst="rect">
             <a:avLst/>
@@ -5378,8 +6995,8 @@
         </p:nvSpPr>
         <p:spPr>
           <a:xfrm>
-            <a:off x="502920" y="2971800"/>
-            <a:ext cx="11155680" cy="530352"/>
+            <a:off x="502920" y="2917658"/>
+            <a:ext cx="11155680" cy="485354"/>
           </a:xfrm>
           <a:prstGeom prst="rect">
             <a:avLst/>
@@ -5394,6 +7011,10 @@
             <a:prstDash val="solid"/>
           </a:ln>
         </p:spPr>
+        <p:txBody>
+          <a:bodyPr/>
+          <a:p/>
+        </p:txBody>
       </p:sp>
       <p:sp>
         <p:nvSpPr>
@@ -5403,8 +7024,8 @@
         </p:nvSpPr>
         <p:spPr>
           <a:xfrm>
-            <a:off x="576072" y="3054096"/>
-            <a:ext cx="2139696" cy="384048"/>
+            <a:off x="576072" y="2962658"/>
+            <a:ext cx="2139696" cy="425354"/>
           </a:xfrm>
           <a:prstGeom prst="rect">
             <a:avLst/>
@@ -5442,8 +7063,8 @@
         </p:nvSpPr>
         <p:spPr>
           <a:xfrm>
-            <a:off x="2862072" y="3054096"/>
-            <a:ext cx="4014216" cy="384048"/>
+            <a:off x="2862072" y="2962658"/>
+            <a:ext cx="4014216" cy="425354"/>
           </a:xfrm>
           <a:prstGeom prst="rect">
             <a:avLst/>
@@ -5481,8 +7102,8 @@
         </p:nvSpPr>
         <p:spPr>
           <a:xfrm>
-            <a:off x="7022592" y="3054096"/>
-            <a:ext cx="4562856" cy="384048"/>
+            <a:off x="7022592" y="2962658"/>
+            <a:ext cx="4562856" cy="425354"/>
           </a:xfrm>
           <a:prstGeom prst="rect">
             <a:avLst/>
@@ -5520,8 +7141,8 @@
         </p:nvSpPr>
         <p:spPr>
           <a:xfrm>
-            <a:off x="502920" y="3520440"/>
-            <a:ext cx="11155680" cy="530352"/>
+            <a:off x="502920" y="3412156"/>
+            <a:ext cx="11155680" cy="485354"/>
           </a:xfrm>
           <a:prstGeom prst="rect">
             <a:avLst/>
@@ -5536,6 +7157,10 @@
             <a:prstDash val="solid"/>
           </a:ln>
         </p:spPr>
+        <p:txBody>
+          <a:bodyPr/>
+          <a:p/>
+        </p:txBody>
       </p:sp>
       <p:sp>
         <p:nvSpPr>
@@ -5545,8 +7170,8 @@
         </p:nvSpPr>
         <p:spPr>
           <a:xfrm>
-            <a:off x="576072" y="3602736"/>
-            <a:ext cx="2139696" cy="384048"/>
+            <a:off x="576072" y="3457156"/>
+            <a:ext cx="2139696" cy="425354"/>
           </a:xfrm>
           <a:prstGeom prst="rect">
             <a:avLst/>
@@ -5584,8 +7209,8 @@
         </p:nvSpPr>
         <p:spPr>
           <a:xfrm>
-            <a:off x="2862072" y="3602736"/>
-            <a:ext cx="4014216" cy="384048"/>
+            <a:off x="2862072" y="3457156"/>
+            <a:ext cx="4014216" cy="425354"/>
           </a:xfrm>
           <a:prstGeom prst="rect">
             <a:avLst/>
@@ -5623,8 +7248,8 @@
         </p:nvSpPr>
         <p:spPr>
           <a:xfrm>
-            <a:off x="7022592" y="3602736"/>
-            <a:ext cx="4562856" cy="384048"/>
+            <a:off x="7022592" y="3457156"/>
+            <a:ext cx="4562856" cy="425354"/>
           </a:xfrm>
           <a:prstGeom prst="rect">
             <a:avLst/>
@@ -5662,8 +7287,8 @@
         </p:nvSpPr>
         <p:spPr>
           <a:xfrm>
-            <a:off x="502920" y="4069080"/>
-            <a:ext cx="11155680" cy="530352"/>
+            <a:off x="502920" y="3906654"/>
+            <a:ext cx="11155680" cy="485354"/>
           </a:xfrm>
           <a:prstGeom prst="rect">
             <a:avLst/>
@@ -5678,6 +7303,10 @@
             <a:prstDash val="solid"/>
           </a:ln>
         </p:spPr>
+        <p:txBody>
+          <a:bodyPr/>
+          <a:p/>
+        </p:txBody>
       </p:sp>
       <p:sp>
         <p:nvSpPr>
@@ -5687,8 +7316,8 @@
         </p:nvSpPr>
         <p:spPr>
           <a:xfrm>
-            <a:off x="576072" y="4151376"/>
-            <a:ext cx="2139696" cy="384048"/>
+            <a:off x="576072" y="3951654"/>
+            <a:ext cx="2139696" cy="425354"/>
           </a:xfrm>
           <a:prstGeom prst="rect">
             <a:avLst/>
@@ -5726,8 +7355,8 @@
         </p:nvSpPr>
         <p:spPr>
           <a:xfrm>
-            <a:off x="2862072" y="4151376"/>
-            <a:ext cx="4014216" cy="384048"/>
+            <a:off x="2862072" y="3951654"/>
+            <a:ext cx="4014216" cy="425354"/>
           </a:xfrm>
           <a:prstGeom prst="rect">
             <a:avLst/>
@@ -5765,8 +7394,8 @@
         </p:nvSpPr>
         <p:spPr>
           <a:xfrm>
-            <a:off x="7022592" y="4151376"/>
-            <a:ext cx="4562856" cy="384048"/>
+            <a:off x="7022592" y="3951654"/>
+            <a:ext cx="4562856" cy="425354"/>
           </a:xfrm>
           <a:prstGeom prst="rect">
             <a:avLst/>
@@ -5804,8 +7433,8 @@
         </p:nvSpPr>
         <p:spPr>
           <a:xfrm>
-            <a:off x="502920" y="4617720"/>
-            <a:ext cx="11155680" cy="530352"/>
+            <a:off x="502920" y="4401152"/>
+            <a:ext cx="11155680" cy="485354"/>
           </a:xfrm>
           <a:prstGeom prst="rect">
             <a:avLst/>
@@ -5820,6 +7449,10 @@
             <a:prstDash val="solid"/>
           </a:ln>
         </p:spPr>
+        <p:txBody>
+          <a:bodyPr/>
+          <a:p/>
+        </p:txBody>
       </p:sp>
       <p:sp>
         <p:nvSpPr>
@@ -5829,8 +7462,8 @@
         </p:nvSpPr>
         <p:spPr>
           <a:xfrm>
-            <a:off x="576072" y="4700016"/>
-            <a:ext cx="2139696" cy="384048"/>
+            <a:off x="576072" y="4446152"/>
+            <a:ext cx="2139696" cy="425354"/>
           </a:xfrm>
           <a:prstGeom prst="rect">
             <a:avLst/>
@@ -5868,8 +7501,8 @@
         </p:nvSpPr>
         <p:spPr>
           <a:xfrm>
-            <a:off x="2862072" y="4700016"/>
-            <a:ext cx="4014216" cy="384048"/>
+            <a:off x="2862072" y="4446152"/>
+            <a:ext cx="4014216" cy="425354"/>
           </a:xfrm>
           <a:prstGeom prst="rect">
             <a:avLst/>
@@ -5907,8 +7540,8 @@
         </p:nvSpPr>
         <p:spPr>
           <a:xfrm>
-            <a:off x="7022592" y="4700016"/>
-            <a:ext cx="4562856" cy="384048"/>
+            <a:off x="7022592" y="4446152"/>
+            <a:ext cx="4562856" cy="425354"/>
           </a:xfrm>
           <a:prstGeom prst="rect">
             <a:avLst/>
@@ -5946,8 +7579,8 @@
         </p:nvSpPr>
         <p:spPr>
           <a:xfrm>
-            <a:off x="502920" y="5166360"/>
-            <a:ext cx="11155680" cy="530352"/>
+            <a:off x="502920" y="4895650"/>
+            <a:ext cx="11155680" cy="485354"/>
           </a:xfrm>
           <a:prstGeom prst="rect">
             <a:avLst/>
@@ -5962,6 +7595,10 @@
             <a:prstDash val="solid"/>
           </a:ln>
         </p:spPr>
+        <p:txBody>
+          <a:bodyPr/>
+          <a:p/>
+        </p:txBody>
       </p:sp>
       <p:sp>
         <p:nvSpPr>
@@ -5971,8 +7608,8 @@
         </p:nvSpPr>
         <p:spPr>
           <a:xfrm>
-            <a:off x="576072" y="5248656"/>
-            <a:ext cx="2139696" cy="384048"/>
+            <a:off x="576072" y="4940650"/>
+            <a:ext cx="2139696" cy="425354"/>
           </a:xfrm>
           <a:prstGeom prst="rect">
             <a:avLst/>
@@ -6010,8 +7647,8 @@
         </p:nvSpPr>
         <p:spPr>
           <a:xfrm>
-            <a:off x="2862072" y="5248656"/>
-            <a:ext cx="4014216" cy="384048"/>
+            <a:off x="2862072" y="4940650"/>
+            <a:ext cx="4014216" cy="425354"/>
           </a:xfrm>
           <a:prstGeom prst="rect">
             <a:avLst/>
@@ -6049,8 +7686,8 @@
         </p:nvSpPr>
         <p:spPr>
           <a:xfrm>
-            <a:off x="7022592" y="5248656"/>
-            <a:ext cx="4562856" cy="384048"/>
+            <a:off x="7022592" y="4940650"/>
+            <a:ext cx="4562856" cy="425354"/>
           </a:xfrm>
           <a:prstGeom prst="rect">
             <a:avLst/>
@@ -6088,8 +7725,8 @@
         </p:nvSpPr>
         <p:spPr>
           <a:xfrm>
-            <a:off x="502920" y="5715000"/>
-            <a:ext cx="11155680" cy="530352"/>
+            <a:off x="502920" y="5390148"/>
+            <a:ext cx="11155680" cy="485354"/>
           </a:xfrm>
           <a:prstGeom prst="rect">
             <a:avLst/>
@@ -6104,6 +7741,10 @@
             <a:prstDash val="solid"/>
           </a:ln>
         </p:spPr>
+        <p:txBody>
+          <a:bodyPr/>
+          <a:p/>
+        </p:txBody>
       </p:sp>
       <p:sp>
         <p:nvSpPr>
@@ -6113,8 +7754,8 @@
         </p:nvSpPr>
         <p:spPr>
           <a:xfrm>
-            <a:off x="576072" y="5797296"/>
-            <a:ext cx="2139696" cy="384048"/>
+            <a:off x="576072" y="5435148"/>
+            <a:ext cx="2139696" cy="425354"/>
           </a:xfrm>
           <a:prstGeom prst="rect">
             <a:avLst/>
@@ -6152,8 +7793,8 @@
         </p:nvSpPr>
         <p:spPr>
           <a:xfrm>
-            <a:off x="2862072" y="5797296"/>
-            <a:ext cx="4014216" cy="384048"/>
+            <a:off x="2862072" y="5435148"/>
+            <a:ext cx="4014216" cy="425354"/>
           </a:xfrm>
           <a:prstGeom prst="rect">
             <a:avLst/>
@@ -6191,8 +7832,8 @@
         </p:nvSpPr>
         <p:spPr>
           <a:xfrm>
-            <a:off x="7022592" y="5797296"/>
-            <a:ext cx="4562856" cy="384048"/>
+            <a:off x="7022592" y="5435148"/>
+            <a:ext cx="4562856" cy="425354"/>
           </a:xfrm>
           <a:prstGeom prst="rect">
             <a:avLst/>
@@ -6219,6 +7860,200 @@
               <a:t>Drift goes undetected. FINRA 3110(c) inspection obligation harder to evidence.</a:t>
             </a:r>
             <a:endParaRPr lang="en-US" sz="950" dirty="0"/>
+          </a:p>
+        </p:txBody>
+      </p:sp>
+      <p:sp>
+        <p:nvSpPr>
+          <p:cNvPr id="55" name="Rectangle 54"/>
+          <p:cNvSpPr/>
+          <p:nvPr/>
+        </p:nvSpPr>
+        <p:spPr>
+          <a:xfrm>
+            <a:off x="502920" y="5884646"/>
+            <a:ext cx="11155680" cy="485354"/>
+          </a:xfrm>
+          <a:prstGeom prst="rect">
+            <a:avLst/>
+          </a:prstGeom>
+          <a:solidFill>
+            <a:srgbClr val="EEF2F7"/>
+          </a:solidFill>
+          <a:ln>
+            <a:noFill/>
+          </a:ln>
+        </p:spPr>
+        <p:style>
+          <a:lnRef idx="1">
+            <a:schemeClr val="accent1"/>
+          </a:lnRef>
+          <a:fillRef idx="3">
+            <a:schemeClr val="accent1"/>
+          </a:fillRef>
+          <a:effectRef idx="2">
+            <a:schemeClr val="accent1"/>
+          </a:effectRef>
+          <a:fontRef idx="minor">
+            <a:schemeClr val="lt1"/>
+          </a:fontRef>
+        </p:style>
+        <p:txBody>
+          <a:bodyPr rtlCol="0" anchor="ctr"/>
+          <a:lstStyle/>
+          <a:p>
+            <a:pPr algn="ctr"/>
+          </a:p>
+        </p:txBody>
+      </p:sp>
+      <p:sp>
+        <p:nvSpPr>
+          <p:cNvPr id="56" name="Rectangle 55"/>
+          <p:cNvSpPr/>
+          <p:nvPr/>
+        </p:nvSpPr>
+        <p:spPr>
+          <a:xfrm>
+            <a:off x="576072" y="5929646"/>
+            <a:ext cx="2139696" cy="425354"/>
+          </a:xfrm>
+          <a:prstGeom prst="rect">
+            <a:avLst/>
+          </a:prstGeom>
+          <a:noFill/>
+          <a:ln>
+            <a:noFill/>
+          </a:ln>
+        </p:spPr>
+        <p:style>
+          <a:lnRef idx="1">
+            <a:schemeClr val="accent1"/>
+          </a:lnRef>
+          <a:fillRef idx="3">
+            <a:schemeClr val="accent1"/>
+          </a:fillRef>
+          <a:effectRef idx="2">
+            <a:schemeClr val="accent1"/>
+          </a:effectRef>
+          <a:fontRef idx="minor">
+            <a:schemeClr val="lt1"/>
+          </a:fontRef>
+        </p:style>
+        <p:txBody>
+          <a:bodyPr rtlCol="0" anchor="ctr" wrap="square"/>
+          <a:lstStyle/>
+          <a:p>
+            <a:pPr algn="ctr"/>
+            <a:r>
+              <a:rPr sz="1050" b="1">
+                <a:solidFill>
+                  <a:srgbClr val="1A1A2E"/>
+                </a:solidFill>
+                <a:latin typeface="Arial"/>
+              </a:rPr>
+              <a:t>Intune MDM/MAM
+(Corporate Mobile)</a:t>
+            </a:r>
+          </a:p>
+        </p:txBody>
+      </p:sp>
+      <p:sp>
+        <p:nvSpPr>
+          <p:cNvPr id="57" name="Rectangle 56"/>
+          <p:cNvSpPr/>
+          <p:nvPr/>
+        </p:nvSpPr>
+        <p:spPr>
+          <a:xfrm>
+            <a:off x="2862072" y="5929646"/>
+            <a:ext cx="4014216" cy="425354"/>
+          </a:xfrm>
+          <a:prstGeom prst="rect">
+            <a:avLst/>
+          </a:prstGeom>
+          <a:noFill/>
+          <a:ln>
+            <a:noFill/>
+          </a:ln>
+        </p:spPr>
+        <p:style>
+          <a:lnRef idx="1">
+            <a:schemeClr val="accent1"/>
+          </a:lnRef>
+          <a:fillRef idx="3">
+            <a:schemeClr val="accent1"/>
+          </a:fillRef>
+          <a:effectRef idx="2">
+            <a:schemeClr val="accent1"/>
+          </a:effectRef>
+          <a:fontRef idx="minor">
+            <a:schemeClr val="lt1"/>
+          </a:fontRef>
+        </p:style>
+        <p:txBody>
+          <a:bodyPr rtlCol="0" anchor="ctr" wrap="square"/>
+          <a:lstStyle/>
+          <a:p>
+            <a:pPr algn="ctr"/>
+            <a:r>
+              <a:rPr sz="1050" b="0">
+                <a:solidFill>
+                  <a:srgbClr val="334155"/>
+                </a:solidFill>
+                <a:latin typeface="Arial"/>
+              </a:rPr>
+              <a:t>Corporate data containerization on phones; enrollment gate; selective and full remote wipe.</a:t>
+            </a:r>
+          </a:p>
+        </p:txBody>
+      </p:sp>
+      <p:sp>
+        <p:nvSpPr>
+          <p:cNvPr id="58" name="Rectangle 57"/>
+          <p:cNvSpPr/>
+          <p:nvPr/>
+        </p:nvSpPr>
+        <p:spPr>
+          <a:xfrm>
+            <a:off x="7022592" y="5929646"/>
+            <a:ext cx="4562856" cy="425354"/>
+          </a:xfrm>
+          <a:prstGeom prst="rect">
+            <a:avLst/>
+          </a:prstGeom>
+          <a:noFill/>
+          <a:ln>
+            <a:noFill/>
+          </a:ln>
+        </p:spPr>
+        <p:style>
+          <a:lnRef idx="1">
+            <a:schemeClr val="accent1"/>
+          </a:lnRef>
+          <a:fillRef idx="3">
+            <a:schemeClr val="accent1"/>
+          </a:fillRef>
+          <a:effectRef idx="2">
+            <a:schemeClr val="accent1"/>
+          </a:effectRef>
+          <a:fontRef idx="minor">
+            <a:schemeClr val="lt1"/>
+          </a:fontRef>
+        </p:style>
+        <p:txBody>
+          <a:bodyPr rtlCol="0" anchor="ctr" wrap="square"/>
+          <a:lstStyle/>
+          <a:p>
+            <a:pPr algn="ctr"/>
+            <a:r>
+              <a:rPr sz="1050" b="0">
+                <a:solidFill>
+                  <a:srgbClr val="334155"/>
+                </a:solidFill>
+                <a:latin typeface="Arial"/>
+              </a:rPr>
+              <a:t>Phone loss/theft exposes all M365 email and OneDrive. No recovery action available. Reg S-P gap.</a:t>
+            </a:r>
           </a:p>
         </p:txBody>
       </p:sp>
@@ -6230,7 +8065,7 @@
 </p:sld>
 </file>
 
-<file path=ppt/slides/slide12.xml><?xml version="1.0" encoding="utf-8"?>
+<file path=ppt/slides/slide13.xml><?xml version="1.0" encoding="utf-8"?>
 <p:sld xmlns:a="http://schemas.openxmlformats.org/drawingml/2006/main" xmlns:r="http://schemas.openxmlformats.org/officeDocument/2006/relationships" xmlns:p="http://schemas.openxmlformats.org/presentationml/2006/main">
   <p:cSld name="Slide 12">
     <p:bg>
@@ -6280,6 +8115,10 @@
             <a:prstDash val="solid"/>
           </a:ln>
         </p:spPr>
+        <p:txBody>
+          <a:bodyPr/>
+          <a:p/>
+        </p:txBody>
       </p:sp>
       <p:sp>
         <p:nvSpPr>
@@ -6309,6 +8148,10 @@
             <a:prstDash val="solid"/>
           </a:ln>
         </p:spPr>
+        <p:txBody>
+          <a:bodyPr/>
+          <a:p/>
+        </p:txBody>
       </p:sp>
       <p:sp>
         <p:nvSpPr>
@@ -6338,6 +8181,10 @@
             <a:prstDash val="solid"/>
           </a:ln>
         </p:spPr>
+        <p:txBody>
+          <a:bodyPr/>
+          <a:p/>
+        </p:txBody>
       </p:sp>
       <p:sp>
         <p:nvSpPr>
@@ -6367,6 +8214,10 @@
             <a:prstDash val="solid"/>
           </a:ln>
         </p:spPr>
+        <p:txBody>
+          <a:bodyPr/>
+          <a:p/>
+        </p:txBody>
       </p:sp>
       <p:sp>
         <p:nvSpPr>
@@ -6396,6 +8247,10 @@
             <a:prstDash val="solid"/>
           </a:ln>
         </p:spPr>
+        <p:txBody>
+          <a:bodyPr/>
+          <a:p/>
+        </p:txBody>
       </p:sp>
       <p:sp>
         <p:nvSpPr>
@@ -6425,6 +8280,10 @@
             <a:prstDash val="solid"/>
           </a:ln>
         </p:spPr>
+        <p:txBody>
+          <a:bodyPr/>
+          <a:p/>
+        </p:txBody>
       </p:sp>
       <p:sp>
         <p:nvSpPr>
@@ -6454,6 +8313,10 @@
             <a:prstDash val="solid"/>
           </a:ln>
         </p:spPr>
+        <p:txBody>
+          <a:bodyPr/>
+          <a:p/>
+        </p:txBody>
       </p:sp>
       <p:sp>
         <p:nvSpPr>
@@ -6483,6 +8346,10 @@
             <a:prstDash val="solid"/>
           </a:ln>
         </p:spPr>
+        <p:txBody>
+          <a:bodyPr/>
+          <a:p/>
+        </p:txBody>
       </p:sp>
       <p:sp>
         <p:nvSpPr>
@@ -6512,6 +8379,10 @@
             <a:prstDash val="solid"/>
           </a:ln>
         </p:spPr>
+        <p:txBody>
+          <a:bodyPr/>
+          <a:p/>
+        </p:txBody>
       </p:sp>
       <p:sp>
         <p:nvSpPr>
@@ -6541,6 +8412,10 @@
             <a:prstDash val="solid"/>
           </a:ln>
         </p:spPr>
+        <p:txBody>
+          <a:bodyPr/>
+          <a:p/>
+        </p:txBody>
       </p:sp>
       <p:sp>
         <p:nvSpPr>
@@ -6570,6 +8445,10 @@
             <a:prstDash val="solid"/>
           </a:ln>
         </p:spPr>
+        <p:txBody>
+          <a:bodyPr/>
+          <a:p/>
+        </p:txBody>
       </p:sp>
       <p:sp>
         <p:nvSpPr>
@@ -6599,6 +8478,10 @@
             <a:prstDash val="solid"/>
           </a:ln>
         </p:spPr>
+        <p:txBody>
+          <a:bodyPr/>
+          <a:p/>
+        </p:txBody>
       </p:sp>
       <p:sp>
         <p:nvSpPr>
@@ -6628,6 +8511,10 @@
             <a:prstDash val="solid"/>
           </a:ln>
         </p:spPr>
+        <p:txBody>
+          <a:bodyPr/>
+          <a:p/>
+        </p:txBody>
       </p:sp>
       <p:sp>
         <p:nvSpPr>
@@ -6811,6 +8698,10 @@
             <a:prstDash val="solid"/>
           </a:ln>
         </p:spPr>
+        <p:txBody>
+          <a:bodyPr/>
+          <a:p/>
+        </p:txBody>
       </p:sp>
       <p:sp>
         <p:nvSpPr>
@@ -6838,6 +8729,10 @@
             <a:prstDash val="solid"/>
           </a:ln>
         </p:spPr>
+        <p:txBody>
+          <a:bodyPr/>
+          <a:p/>
+        </p:txBody>
       </p:sp>
       <p:sp>
         <p:nvSpPr>
@@ -6911,7 +8806,7 @@
                 <a:ea typeface="Arial" pitchFamily="34" charset="-122"/>
                 <a:cs typeface="Arial" pitchFamily="34" charset="-120"/>
               </a:rPr>
-              <a:t>12</a:t>
+              <a:t>13</a:t>
             </a:r>
             <a:endParaRPr lang="en-US" sz="1000" dirty="0"/>
           </a:p>
@@ -6943,6 +8838,10 @@
             <a:prstDash val="solid"/>
           </a:ln>
         </p:spPr>
+        <p:txBody>
+          <a:bodyPr/>
+          <a:p/>
+        </p:txBody>
       </p:sp>
       <p:sp>
         <p:nvSpPr>
@@ -7009,6 +8908,10 @@
             <a:prstDash val="solid"/>
           </a:ln>
         </p:spPr>
+        <p:txBody>
+          <a:bodyPr/>
+          <a:p/>
+        </p:txBody>
       </p:sp>
       <p:sp>
         <p:nvSpPr>
@@ -7075,6 +8978,10 @@
             <a:prstDash val="solid"/>
           </a:ln>
         </p:spPr>
+        <p:txBody>
+          <a:bodyPr/>
+          <a:p/>
+        </p:txBody>
       </p:sp>
       <p:sp>
         <p:nvSpPr>
@@ -7141,6 +9048,10 @@
             <a:prstDash val="solid"/>
           </a:ln>
         </p:spPr>
+        <p:txBody>
+          <a:bodyPr/>
+          <a:p/>
+        </p:txBody>
       </p:sp>
       <p:sp>
         <p:nvSpPr>
@@ -7207,6 +9118,10 @@
             <a:prstDash val="solid"/>
           </a:ln>
         </p:spPr>
+        <p:txBody>
+          <a:bodyPr/>
+          <a:p/>
+        </p:txBody>
       </p:sp>
       <p:sp>
         <p:nvSpPr>
@@ -7273,6 +9188,10 @@
             <a:prstDash val="solid"/>
           </a:ln>
         </p:spPr>
+        <p:txBody>
+          <a:bodyPr/>
+          <a:p/>
+        </p:txBody>
       </p:sp>
       <p:sp>
         <p:nvSpPr>
@@ -7339,6 +9258,10 @@
             <a:prstDash val="solid"/>
           </a:ln>
         </p:spPr>
+        <p:txBody>
+          <a:bodyPr/>
+          <a:p/>
+        </p:txBody>
       </p:sp>
       <p:sp>
         <p:nvSpPr>
@@ -7405,6 +9328,10 @@
             <a:prstDash val="solid"/>
           </a:ln>
         </p:spPr>
+        <p:txBody>
+          <a:bodyPr/>
+          <a:p/>
+        </p:txBody>
       </p:sp>
       <p:sp>
         <p:nvSpPr>
@@ -7471,6 +9398,10 @@
             <a:prstDash val="solid"/>
           </a:ln>
         </p:spPr>
+        <p:txBody>
+          <a:bodyPr/>
+          <a:p/>
+        </p:txBody>
       </p:sp>
       <p:sp>
         <p:nvSpPr>
@@ -7508,6 +9439,99 @@
               <a:t>One-time implementation fee reduced to reflect the 7-user Horizon VDI scope.</a:t>
             </a:r>
             <a:endParaRPr lang="en-US" sz="1400" dirty="0"/>
+          </a:p>
+        </p:txBody>
+      </p:sp>
+      <p:sp>
+        <p:nvSpPr>
+          <p:cNvPr id="41" name="Rectangle 40"/>
+          <p:cNvSpPr/>
+          <p:nvPr/>
+        </p:nvSpPr>
+        <p:spPr>
+          <a:xfrm>
+            <a:off x="868680" y="6089904"/>
+            <a:ext cx="109728" cy="109728"/>
+          </a:xfrm>
+          <a:prstGeom prst="rect">
+            <a:avLst/>
+          </a:prstGeom>
+          <a:solidFill>
+            <a:srgbClr val="F67D4B"/>
+          </a:solidFill>
+          <a:ln>
+            <a:noFill/>
+          </a:ln>
+        </p:spPr>
+        <p:style>
+          <a:lnRef idx="1">
+            <a:schemeClr val="accent1"/>
+          </a:lnRef>
+          <a:fillRef idx="3">
+            <a:schemeClr val="accent1"/>
+          </a:fillRef>
+          <a:effectRef idx="2">
+            <a:schemeClr val="accent1"/>
+          </a:effectRef>
+          <a:fontRef idx="minor">
+            <a:schemeClr val="lt1"/>
+          </a:fontRef>
+        </p:style>
+        <p:txBody>
+          <a:bodyPr rtlCol="0" anchor="ctr"/>
+          <a:lstStyle/>
+          <a:p>
+            <a:pPr algn="ctr"/>
+          </a:p>
+        </p:txBody>
+      </p:sp>
+      <p:sp>
+        <p:nvSpPr>
+          <p:cNvPr id="42" name="Rectangle 41"/>
+          <p:cNvSpPr/>
+          <p:nvPr/>
+        </p:nvSpPr>
+        <p:spPr>
+          <a:xfrm>
+            <a:off x="1069848" y="6016752"/>
+            <a:ext cx="10607040" cy="320040"/>
+          </a:xfrm>
+          <a:prstGeom prst="rect">
+            <a:avLst/>
+          </a:prstGeom>
+          <a:noFill/>
+          <a:ln>
+            <a:noFill/>
+          </a:ln>
+        </p:spPr>
+        <p:style>
+          <a:lnRef idx="1">
+            <a:schemeClr val="accent1"/>
+          </a:lnRef>
+          <a:fillRef idx="3">
+            <a:schemeClr val="accent1"/>
+          </a:fillRef>
+          <a:effectRef idx="2">
+            <a:schemeClr val="accent1"/>
+          </a:effectRef>
+          <a:fontRef idx="minor">
+            <a:schemeClr val="lt1"/>
+          </a:fontRef>
+        </p:style>
+        <p:txBody>
+          <a:bodyPr rtlCol="0" anchor="ctr" wrap="square"/>
+          <a:lstStyle/>
+          <a:p>
+            <a:pPr algn="ctr"/>
+            <a:r>
+              <a:rPr sz="1100" b="0">
+                <a:solidFill>
+                  <a:srgbClr val="334155"/>
+                </a:solidFill>
+                <a:latin typeface="Arial"/>
+              </a:rPr>
+              <a:t>Microsoft Intune MDM required for all corporate phones with M365 email or OneDrive. Selective remote wipe enabled. App containerization prevents data leakage to personal apps. No additional licensing cost (included in E3).</a:t>
+            </a:r>
           </a:p>
         </p:txBody>
       </p:sp>
@@ -7519,7 +9543,7 @@
 </p:sld>
 </file>
 
-<file path=ppt/slides/slide13.xml><?xml version="1.0" encoding="utf-8"?>
+<file path=ppt/slides/slide14.xml><?xml version="1.0" encoding="utf-8"?>
 <p:sld xmlns:a="http://schemas.openxmlformats.org/drawingml/2006/main" xmlns:r="http://schemas.openxmlformats.org/officeDocument/2006/relationships" xmlns:p="http://schemas.openxmlformats.org/presentationml/2006/main">
   <p:cSld name="Slide 13">
     <p:bg>
@@ -7569,6 +9593,10 @@
             <a:prstDash val="solid"/>
           </a:ln>
         </p:spPr>
+        <p:txBody>
+          <a:bodyPr/>
+          <a:p/>
+        </p:txBody>
       </p:sp>
       <p:sp>
         <p:nvSpPr>
@@ -7598,6 +9626,10 @@
             <a:prstDash val="solid"/>
           </a:ln>
         </p:spPr>
+        <p:txBody>
+          <a:bodyPr/>
+          <a:p/>
+        </p:txBody>
       </p:sp>
       <p:sp>
         <p:nvSpPr>
@@ -7627,6 +9659,10 @@
             <a:prstDash val="solid"/>
           </a:ln>
         </p:spPr>
+        <p:txBody>
+          <a:bodyPr/>
+          <a:p/>
+        </p:txBody>
       </p:sp>
       <p:sp>
         <p:nvSpPr>
@@ -7656,6 +9692,10 @@
             <a:prstDash val="solid"/>
           </a:ln>
         </p:spPr>
+        <p:txBody>
+          <a:bodyPr/>
+          <a:p/>
+        </p:txBody>
       </p:sp>
       <p:sp>
         <p:nvSpPr>
@@ -7685,6 +9725,10 @@
             <a:prstDash val="solid"/>
           </a:ln>
         </p:spPr>
+        <p:txBody>
+          <a:bodyPr/>
+          <a:p/>
+        </p:txBody>
       </p:sp>
       <p:sp>
         <p:nvSpPr>
@@ -7714,6 +9758,10 @@
             <a:prstDash val="solid"/>
           </a:ln>
         </p:spPr>
+        <p:txBody>
+          <a:bodyPr/>
+          <a:p/>
+        </p:txBody>
       </p:sp>
       <p:sp>
         <p:nvSpPr>
@@ -7743,6 +9791,10 @@
             <a:prstDash val="solid"/>
           </a:ln>
         </p:spPr>
+        <p:txBody>
+          <a:bodyPr/>
+          <a:p/>
+        </p:txBody>
       </p:sp>
       <p:sp>
         <p:nvSpPr>
@@ -7772,6 +9824,10 @@
             <a:prstDash val="solid"/>
           </a:ln>
         </p:spPr>
+        <p:txBody>
+          <a:bodyPr/>
+          <a:p/>
+        </p:txBody>
       </p:sp>
       <p:sp>
         <p:nvSpPr>
@@ -7801,6 +9857,10 @@
             <a:prstDash val="solid"/>
           </a:ln>
         </p:spPr>
+        <p:txBody>
+          <a:bodyPr/>
+          <a:p/>
+        </p:txBody>
       </p:sp>
       <p:sp>
         <p:nvSpPr>
@@ -7830,6 +9890,10 @@
             <a:prstDash val="solid"/>
           </a:ln>
         </p:spPr>
+        <p:txBody>
+          <a:bodyPr/>
+          <a:p/>
+        </p:txBody>
       </p:sp>
       <p:sp>
         <p:nvSpPr>
@@ -7859,6 +9923,10 @@
             <a:prstDash val="solid"/>
           </a:ln>
         </p:spPr>
+        <p:txBody>
+          <a:bodyPr/>
+          <a:p/>
+        </p:txBody>
       </p:sp>
       <p:sp>
         <p:nvSpPr>
@@ -7888,6 +9956,10 @@
             <a:prstDash val="solid"/>
           </a:ln>
         </p:spPr>
+        <p:txBody>
+          <a:bodyPr/>
+          <a:p/>
+        </p:txBody>
       </p:sp>
       <p:sp>
         <p:nvSpPr>
@@ -7917,6 +9989,10 @@
             <a:prstDash val="solid"/>
           </a:ln>
         </p:spPr>
+        <p:txBody>
+          <a:bodyPr/>
+          <a:p/>
+        </p:txBody>
       </p:sp>
       <p:sp>
         <p:nvSpPr>
@@ -7983,6 +10059,10 @@
             <a:prstDash val="solid"/>
           </a:ln>
         </p:spPr>
+        <p:txBody>
+          <a:bodyPr/>
+          <a:p/>
+        </p:txBody>
       </p:sp>
       <p:sp>
         <p:nvSpPr>
@@ -8088,6 +10168,10 @@
             <a:prstDash val="solid"/>
           </a:ln>
         </p:spPr>
+        <p:txBody>
+          <a:bodyPr/>
+          <a:p/>
+        </p:txBody>
       </p:sp>
       <p:sp>
         <p:nvSpPr>
@@ -8154,6 +10238,10 @@
             <a:prstDash val="solid"/>
           </a:ln>
         </p:spPr>
+        <p:txBody>
+          <a:bodyPr/>
+          <a:p/>
+        </p:txBody>
       </p:sp>
       <p:sp>
         <p:nvSpPr>
@@ -8188,7 +10276,7 @@
                 <a:ea typeface="Arial" pitchFamily="34" charset="-122"/>
                 <a:cs typeface="Arial" pitchFamily="34" charset="-120"/>
               </a:rPr>
-              <a:t>No duplication: every layer solves a distinct regulatory obligation.</a:t>
+              <a:t>No duplication: every layer - including mobile device controls - solves a distinct regulatory obligation.</a:t>
             </a:r>
             <a:endParaRPr lang="en-US" sz="1600" dirty="0"/>
           </a:p>
@@ -8220,6 +10308,10 @@
             <a:prstDash val="solid"/>
           </a:ln>
         </p:spPr>
+        <p:txBody>
+          <a:bodyPr/>
+          <a:p/>
+        </p:txBody>
       </p:sp>
       <p:sp>
         <p:nvSpPr>
@@ -8286,6 +10378,10 @@
             <a:prstDash val="solid"/>
           </a:ln>
         </p:spPr>
+        <p:txBody>
+          <a:bodyPr/>
+          <a:p/>
+        </p:txBody>
       </p:sp>
       <p:sp>
         <p:nvSpPr>
@@ -8320,7 +10416,7 @@
                 <a:ea typeface="Arial" pitchFamily="34" charset="-122"/>
                 <a:cs typeface="Arial" pitchFamily="34" charset="-120"/>
               </a:rPr>
-              <a:t>Every control maps to a specific FINRA or SEC citation.</a:t>
+              <a:t>Every control maps to a specific FINRA or SEC citation. Mobile devices are no exception.</a:t>
             </a:r>
             <a:endParaRPr lang="en-US" sz="1600" dirty="0"/>
           </a:p>
@@ -8423,6 +10519,10 @@
             <a:prstDash val="solid"/>
           </a:ln>
         </p:spPr>
+        <p:txBody>
+          <a:bodyPr/>
+          <a:p/>
+        </p:txBody>
       </p:sp>
       <p:sp>
         <p:nvSpPr>
@@ -8452,6 +10552,10 @@
             <a:prstDash val="solid"/>
           </a:ln>
         </p:spPr>
+        <p:txBody>
+          <a:bodyPr/>
+          <a:p/>
+        </p:txBody>
       </p:sp>
       <p:sp>
         <p:nvSpPr>
@@ -8481,6 +10585,10 @@
             <a:prstDash val="solid"/>
           </a:ln>
         </p:spPr>
+        <p:txBody>
+          <a:bodyPr/>
+          <a:p/>
+        </p:txBody>
       </p:sp>
       <p:sp>
         <p:nvSpPr>
@@ -8510,6 +10618,10 @@
             <a:prstDash val="solid"/>
           </a:ln>
         </p:spPr>
+        <p:txBody>
+          <a:bodyPr/>
+          <a:p/>
+        </p:txBody>
       </p:sp>
       <p:sp>
         <p:nvSpPr>
@@ -8539,6 +10651,10 @@
             <a:prstDash val="solid"/>
           </a:ln>
         </p:spPr>
+        <p:txBody>
+          <a:bodyPr/>
+          <a:p/>
+        </p:txBody>
       </p:sp>
       <p:sp>
         <p:nvSpPr>
@@ -8568,6 +10684,10 @@
             <a:prstDash val="solid"/>
           </a:ln>
         </p:spPr>
+        <p:txBody>
+          <a:bodyPr/>
+          <a:p/>
+        </p:txBody>
       </p:sp>
       <p:sp>
         <p:nvSpPr>
@@ -8597,6 +10717,10 @@
             <a:prstDash val="solid"/>
           </a:ln>
         </p:spPr>
+        <p:txBody>
+          <a:bodyPr/>
+          <a:p/>
+        </p:txBody>
       </p:sp>
       <p:sp>
         <p:nvSpPr>
@@ -8626,6 +10750,10 @@
             <a:prstDash val="solid"/>
           </a:ln>
         </p:spPr>
+        <p:txBody>
+          <a:bodyPr/>
+          <a:p/>
+        </p:txBody>
       </p:sp>
       <p:sp>
         <p:nvSpPr>
@@ -8655,6 +10783,10 @@
             <a:prstDash val="solid"/>
           </a:ln>
         </p:spPr>
+        <p:txBody>
+          <a:bodyPr/>
+          <a:p/>
+        </p:txBody>
       </p:sp>
       <p:sp>
         <p:nvSpPr>
@@ -8684,6 +10816,10 @@
             <a:prstDash val="solid"/>
           </a:ln>
         </p:spPr>
+        <p:txBody>
+          <a:bodyPr/>
+          <a:p/>
+        </p:txBody>
       </p:sp>
       <p:sp>
         <p:nvSpPr>
@@ -8713,6 +10849,10 @@
             <a:prstDash val="solid"/>
           </a:ln>
         </p:spPr>
+        <p:txBody>
+          <a:bodyPr/>
+          <a:p/>
+        </p:txBody>
       </p:sp>
       <p:sp>
         <p:nvSpPr>
@@ -8742,6 +10882,10 @@
             <a:prstDash val="solid"/>
           </a:ln>
         </p:spPr>
+        <p:txBody>
+          <a:bodyPr/>
+          <a:p/>
+        </p:txBody>
       </p:sp>
       <p:sp>
         <p:nvSpPr>
@@ -8771,6 +10915,10 @@
             <a:prstDash val="solid"/>
           </a:ln>
         </p:spPr>
+        <p:txBody>
+          <a:bodyPr/>
+          <a:p/>
+        </p:txBody>
       </p:sp>
       <p:sp>
         <p:nvSpPr>
@@ -8954,6 +11102,10 @@
             <a:prstDash val="solid"/>
           </a:ln>
         </p:spPr>
+        <p:txBody>
+          <a:bodyPr/>
+          <a:p/>
+        </p:txBody>
       </p:sp>
       <p:sp>
         <p:nvSpPr>
@@ -8981,6 +11133,10 @@
             <a:prstDash val="solid"/>
           </a:ln>
         </p:spPr>
+        <p:txBody>
+          <a:bodyPr/>
+          <a:p/>
+        </p:txBody>
       </p:sp>
       <p:sp>
         <p:nvSpPr>
@@ -9086,6 +11242,10 @@
             <a:prstDash val="solid"/>
           </a:ln>
         </p:spPr>
+        <p:txBody>
+          <a:bodyPr/>
+          <a:p/>
+        </p:txBody>
       </p:sp>
       <p:sp>
         <p:nvSpPr>
@@ -9113,6 +11273,10 @@
             <a:prstDash val="solid"/>
           </a:ln>
         </p:spPr>
+        <p:txBody>
+          <a:bodyPr/>
+          <a:p/>
+        </p:txBody>
       </p:sp>
       <p:sp>
         <p:nvSpPr>
@@ -9280,6 +11444,10 @@
             <a:prstDash val="solid"/>
           </a:ln>
         </p:spPr>
+        <p:txBody>
+          <a:bodyPr/>
+          <a:p/>
+        </p:txBody>
       </p:sp>
       <p:sp>
         <p:nvSpPr>
@@ -9307,6 +11475,10 @@
             <a:prstDash val="solid"/>
           </a:ln>
         </p:spPr>
+        <p:txBody>
+          <a:bodyPr/>
+          <a:p/>
+        </p:txBody>
       </p:sp>
       <p:sp>
         <p:nvSpPr>
@@ -9474,6 +11646,10 @@
             <a:prstDash val="solid"/>
           </a:ln>
         </p:spPr>
+        <p:txBody>
+          <a:bodyPr/>
+          <a:p/>
+        </p:txBody>
       </p:sp>
       <p:sp>
         <p:nvSpPr>
@@ -9501,6 +11677,10 @@
             <a:prstDash val="solid"/>
           </a:ln>
         </p:spPr>
+        <p:txBody>
+          <a:bodyPr/>
+          <a:p/>
+        </p:txBody>
       </p:sp>
       <p:sp>
         <p:nvSpPr>
@@ -9808,6 +11988,10 @@
             <a:prstDash val="solid"/>
           </a:ln>
         </p:spPr>
+        <p:txBody>
+          <a:bodyPr/>
+          <a:p/>
+        </p:txBody>
       </p:sp>
       <p:sp>
         <p:nvSpPr>
@@ -9837,6 +12021,10 @@
             <a:prstDash val="solid"/>
           </a:ln>
         </p:spPr>
+        <p:txBody>
+          <a:bodyPr/>
+          <a:p/>
+        </p:txBody>
       </p:sp>
       <p:sp>
         <p:nvSpPr>
@@ -9866,6 +12054,10 @@
             <a:prstDash val="solid"/>
           </a:ln>
         </p:spPr>
+        <p:txBody>
+          <a:bodyPr/>
+          <a:p/>
+        </p:txBody>
       </p:sp>
       <p:sp>
         <p:nvSpPr>
@@ -9895,6 +12087,10 @@
             <a:prstDash val="solid"/>
           </a:ln>
         </p:spPr>
+        <p:txBody>
+          <a:bodyPr/>
+          <a:p/>
+        </p:txBody>
       </p:sp>
       <p:sp>
         <p:nvSpPr>
@@ -9924,6 +12120,10 @@
             <a:prstDash val="solid"/>
           </a:ln>
         </p:spPr>
+        <p:txBody>
+          <a:bodyPr/>
+          <a:p/>
+        </p:txBody>
       </p:sp>
       <p:sp>
         <p:nvSpPr>
@@ -9953,6 +12153,10 @@
             <a:prstDash val="solid"/>
           </a:ln>
         </p:spPr>
+        <p:txBody>
+          <a:bodyPr/>
+          <a:p/>
+        </p:txBody>
       </p:sp>
       <p:sp>
         <p:nvSpPr>
@@ -9982,6 +12186,10 @@
             <a:prstDash val="solid"/>
           </a:ln>
         </p:spPr>
+        <p:txBody>
+          <a:bodyPr/>
+          <a:p/>
+        </p:txBody>
       </p:sp>
       <p:sp>
         <p:nvSpPr>
@@ -10011,6 +12219,10 @@
             <a:prstDash val="solid"/>
           </a:ln>
         </p:spPr>
+        <p:txBody>
+          <a:bodyPr/>
+          <a:p/>
+        </p:txBody>
       </p:sp>
       <p:sp>
         <p:nvSpPr>
@@ -10040,6 +12252,10 @@
             <a:prstDash val="solid"/>
           </a:ln>
         </p:spPr>
+        <p:txBody>
+          <a:bodyPr/>
+          <a:p/>
+        </p:txBody>
       </p:sp>
       <p:sp>
         <p:nvSpPr>
@@ -10069,6 +12285,10 @@
             <a:prstDash val="solid"/>
           </a:ln>
         </p:spPr>
+        <p:txBody>
+          <a:bodyPr/>
+          <a:p/>
+        </p:txBody>
       </p:sp>
       <p:sp>
         <p:nvSpPr>
@@ -10098,6 +12318,10 @@
             <a:prstDash val="solid"/>
           </a:ln>
         </p:spPr>
+        <p:txBody>
+          <a:bodyPr/>
+          <a:p/>
+        </p:txBody>
       </p:sp>
       <p:sp>
         <p:nvSpPr>
@@ -10127,6 +12351,10 @@
             <a:prstDash val="solid"/>
           </a:ln>
         </p:spPr>
+        <p:txBody>
+          <a:bodyPr/>
+          <a:p/>
+        </p:txBody>
       </p:sp>
       <p:sp>
         <p:nvSpPr>
@@ -10156,6 +12384,10 @@
             <a:prstDash val="solid"/>
           </a:ln>
         </p:spPr>
+        <p:txBody>
+          <a:bodyPr/>
+          <a:p/>
+        </p:txBody>
       </p:sp>
       <p:sp>
         <p:nvSpPr>
@@ -10339,6 +12571,10 @@
             <a:prstDash val="solid"/>
           </a:ln>
         </p:spPr>
+        <p:txBody>
+          <a:bodyPr/>
+          <a:p/>
+        </p:txBody>
       </p:sp>
       <p:sp>
         <p:nvSpPr>
@@ -10366,6 +12602,10 @@
             <a:prstDash val="solid"/>
           </a:ln>
         </p:spPr>
+        <p:txBody>
+          <a:bodyPr/>
+          <a:p/>
+        </p:txBody>
       </p:sp>
       <p:sp>
         <p:nvSpPr>
@@ -10473,6 +12713,10 @@
             <a:prstDash val="solid"/>
           </a:ln>
         </p:spPr>
+        <p:txBody>
+          <a:bodyPr/>
+          <a:p/>
+        </p:txBody>
       </p:sp>
       <p:sp>
         <p:nvSpPr>
@@ -10615,6 +12859,10 @@
             <a:prstDash val="solid"/>
           </a:ln>
         </p:spPr>
+        <p:txBody>
+          <a:bodyPr/>
+          <a:p/>
+        </p:txBody>
       </p:sp>
       <p:sp>
         <p:nvSpPr>
@@ -10757,6 +13005,10 @@
             <a:prstDash val="solid"/>
           </a:ln>
         </p:spPr>
+        <p:txBody>
+          <a:bodyPr/>
+          <a:p/>
+        </p:txBody>
       </p:sp>
       <p:sp>
         <p:nvSpPr>
@@ -10899,6 +13151,10 @@
             <a:prstDash val="solid"/>
           </a:ln>
         </p:spPr>
+        <p:txBody>
+          <a:bodyPr/>
+          <a:p/>
+        </p:txBody>
       </p:sp>
       <p:sp>
         <p:nvSpPr>
@@ -11041,6 +13297,10 @@
             <a:prstDash val="solid"/>
           </a:ln>
         </p:spPr>
+        <p:txBody>
+          <a:bodyPr/>
+          <a:p/>
+        </p:txBody>
       </p:sp>
       <p:sp>
         <p:nvSpPr>
@@ -11183,6 +13443,10 @@
             <a:prstDash val="solid"/>
           </a:ln>
         </p:spPr>
+        <p:txBody>
+          <a:bodyPr/>
+          <a:p/>
+        </p:txBody>
       </p:sp>
       <p:sp>
         <p:nvSpPr>
@@ -11325,6 +13589,10 @@
             <a:prstDash val="solid"/>
           </a:ln>
         </p:spPr>
+        <p:txBody>
+          <a:bodyPr/>
+          <a:p/>
+        </p:txBody>
       </p:sp>
       <p:sp>
         <p:nvSpPr>
@@ -11467,6 +13735,10 @@
             <a:prstDash val="solid"/>
           </a:ln>
         </p:spPr>
+        <p:txBody>
+          <a:bodyPr/>
+          <a:p/>
+        </p:txBody>
       </p:sp>
       <p:sp>
         <p:nvSpPr>
@@ -11643,6 +13915,10 @@
             <a:prstDash val="solid"/>
           </a:ln>
         </p:spPr>
+        <p:txBody>
+          <a:bodyPr/>
+          <a:p/>
+        </p:txBody>
       </p:sp>
       <p:sp>
         <p:nvSpPr>
@@ -11672,6 +13948,10 @@
             <a:prstDash val="solid"/>
           </a:ln>
         </p:spPr>
+        <p:txBody>
+          <a:bodyPr/>
+          <a:p/>
+        </p:txBody>
       </p:sp>
       <p:sp>
         <p:nvSpPr>
@@ -11701,6 +13981,10 @@
             <a:prstDash val="solid"/>
           </a:ln>
         </p:spPr>
+        <p:txBody>
+          <a:bodyPr/>
+          <a:p/>
+        </p:txBody>
       </p:sp>
       <p:sp>
         <p:nvSpPr>
@@ -11730,6 +14014,10 @@
             <a:prstDash val="solid"/>
           </a:ln>
         </p:spPr>
+        <p:txBody>
+          <a:bodyPr/>
+          <a:p/>
+        </p:txBody>
       </p:sp>
       <p:sp>
         <p:nvSpPr>
@@ -11759,6 +14047,10 @@
             <a:prstDash val="solid"/>
           </a:ln>
         </p:spPr>
+        <p:txBody>
+          <a:bodyPr/>
+          <a:p/>
+        </p:txBody>
       </p:sp>
       <p:sp>
         <p:nvSpPr>
@@ -11788,6 +14080,10 @@
             <a:prstDash val="solid"/>
           </a:ln>
         </p:spPr>
+        <p:txBody>
+          <a:bodyPr/>
+          <a:p/>
+        </p:txBody>
       </p:sp>
       <p:sp>
         <p:nvSpPr>
@@ -11817,6 +14113,10 @@
             <a:prstDash val="solid"/>
           </a:ln>
         </p:spPr>
+        <p:txBody>
+          <a:bodyPr/>
+          <a:p/>
+        </p:txBody>
       </p:sp>
       <p:sp>
         <p:nvSpPr>
@@ -11846,6 +14146,10 @@
             <a:prstDash val="solid"/>
           </a:ln>
         </p:spPr>
+        <p:txBody>
+          <a:bodyPr/>
+          <a:p/>
+        </p:txBody>
       </p:sp>
       <p:sp>
         <p:nvSpPr>
@@ -11875,6 +14179,10 @@
             <a:prstDash val="solid"/>
           </a:ln>
         </p:spPr>
+        <p:txBody>
+          <a:bodyPr/>
+          <a:p/>
+        </p:txBody>
       </p:sp>
       <p:sp>
         <p:nvSpPr>
@@ -11904,6 +14212,10 @@
             <a:prstDash val="solid"/>
           </a:ln>
         </p:spPr>
+        <p:txBody>
+          <a:bodyPr/>
+          <a:p/>
+        </p:txBody>
       </p:sp>
       <p:sp>
         <p:nvSpPr>
@@ -11933,6 +14245,10 @@
             <a:prstDash val="solid"/>
           </a:ln>
         </p:spPr>
+        <p:txBody>
+          <a:bodyPr/>
+          <a:p/>
+        </p:txBody>
       </p:sp>
       <p:sp>
         <p:nvSpPr>
@@ -11962,6 +14278,10 @@
             <a:prstDash val="solid"/>
           </a:ln>
         </p:spPr>
+        <p:txBody>
+          <a:bodyPr/>
+          <a:p/>
+        </p:txBody>
       </p:sp>
       <p:sp>
         <p:nvSpPr>
@@ -11991,6 +14311,10 @@
             <a:prstDash val="solid"/>
           </a:ln>
         </p:spPr>
+        <p:txBody>
+          <a:bodyPr/>
+          <a:p/>
+        </p:txBody>
       </p:sp>
       <p:sp>
         <p:nvSpPr>
@@ -12174,6 +14498,10 @@
             <a:prstDash val="solid"/>
           </a:ln>
         </p:spPr>
+        <p:txBody>
+          <a:bodyPr/>
+          <a:p/>
+        </p:txBody>
       </p:sp>
       <p:sp>
         <p:nvSpPr>
@@ -12201,6 +14529,10 @@
             <a:prstDash val="solid"/>
           </a:ln>
         </p:spPr>
+        <p:txBody>
+          <a:bodyPr/>
+          <a:p/>
+        </p:txBody>
       </p:sp>
       <p:sp>
         <p:nvSpPr>
@@ -12308,6 +14640,10 @@
             <a:prstDash val="solid"/>
           </a:ln>
         </p:spPr>
+        <p:txBody>
+          <a:bodyPr/>
+          <a:p/>
+        </p:txBody>
       </p:sp>
       <p:sp>
         <p:nvSpPr>
@@ -12435,7 +14771,7 @@
         <p:spPr>
           <a:xfrm>
             <a:off x="502920" y="2423160"/>
-            <a:ext cx="11155680" cy="512064"/>
+            <a:ext cx="11155680" cy="485354"/>
           </a:xfrm>
           <a:prstGeom prst="rect">
             <a:avLst/>
@@ -12450,6 +14786,10 @@
             <a:prstDash val="solid"/>
           </a:ln>
         </p:spPr>
+        <p:txBody>
+          <a:bodyPr/>
+          <a:p/>
+        </p:txBody>
       </p:sp>
       <p:sp>
         <p:nvSpPr>
@@ -12459,8 +14799,8 @@
         </p:nvSpPr>
         <p:spPr>
           <a:xfrm>
-            <a:off x="576072" y="2505456"/>
-            <a:ext cx="2231136" cy="365760"/>
+            <a:off x="576072" y="2468160"/>
+            <a:ext cx="2231136" cy="425354"/>
           </a:xfrm>
           <a:prstGeom prst="rect">
             <a:avLst/>
@@ -12498,8 +14838,8 @@
         </p:nvSpPr>
         <p:spPr>
           <a:xfrm>
-            <a:off x="2953512" y="2505456"/>
-            <a:ext cx="4334256" cy="365760"/>
+            <a:off x="2953512" y="2468160"/>
+            <a:ext cx="4334256" cy="425354"/>
           </a:xfrm>
           <a:prstGeom prst="rect">
             <a:avLst/>
@@ -12537,8 +14877,8 @@
         </p:nvSpPr>
         <p:spPr>
           <a:xfrm>
-            <a:off x="7434072" y="2505456"/>
-            <a:ext cx="4151376" cy="365760"/>
+            <a:off x="7434072" y="2468160"/>
+            <a:ext cx="4151376" cy="425354"/>
           </a:xfrm>
           <a:prstGeom prst="rect">
             <a:avLst/>
@@ -12576,8 +14916,8 @@
         </p:nvSpPr>
         <p:spPr>
           <a:xfrm>
-            <a:off x="502920" y="2953512"/>
-            <a:ext cx="11155680" cy="512064"/>
+            <a:off x="502920" y="2917658"/>
+            <a:ext cx="11155680" cy="485354"/>
           </a:xfrm>
           <a:prstGeom prst="rect">
             <a:avLst/>
@@ -12592,6 +14932,10 @@
             <a:prstDash val="solid"/>
           </a:ln>
         </p:spPr>
+        <p:txBody>
+          <a:bodyPr/>
+          <a:p/>
+        </p:txBody>
       </p:sp>
       <p:sp>
         <p:nvSpPr>
@@ -12601,8 +14945,8 @@
         </p:nvSpPr>
         <p:spPr>
           <a:xfrm>
-            <a:off x="576072" y="3035808"/>
-            <a:ext cx="2231136" cy="365760"/>
+            <a:off x="576072" y="2962658"/>
+            <a:ext cx="2231136" cy="425354"/>
           </a:xfrm>
           <a:prstGeom prst="rect">
             <a:avLst/>
@@ -12640,8 +14984,8 @@
         </p:nvSpPr>
         <p:spPr>
           <a:xfrm>
-            <a:off x="2953512" y="3035808"/>
-            <a:ext cx="4334256" cy="365760"/>
+            <a:off x="2953512" y="2962658"/>
+            <a:ext cx="4334256" cy="425354"/>
           </a:xfrm>
           <a:prstGeom prst="rect">
             <a:avLst/>
@@ -12679,8 +15023,8 @@
         </p:nvSpPr>
         <p:spPr>
           <a:xfrm>
-            <a:off x="7434072" y="3035808"/>
-            <a:ext cx="4151376" cy="365760"/>
+            <a:off x="7434072" y="2962658"/>
+            <a:ext cx="4151376" cy="425354"/>
           </a:xfrm>
           <a:prstGeom prst="rect">
             <a:avLst/>
@@ -12718,8 +15062,8 @@
         </p:nvSpPr>
         <p:spPr>
           <a:xfrm>
-            <a:off x="502920" y="3483864"/>
-            <a:ext cx="11155680" cy="512064"/>
+            <a:off x="502920" y="3412156"/>
+            <a:ext cx="11155680" cy="485354"/>
           </a:xfrm>
           <a:prstGeom prst="rect">
             <a:avLst/>
@@ -12734,6 +15078,10 @@
             <a:prstDash val="solid"/>
           </a:ln>
         </p:spPr>
+        <p:txBody>
+          <a:bodyPr/>
+          <a:p/>
+        </p:txBody>
       </p:sp>
       <p:sp>
         <p:nvSpPr>
@@ -12743,8 +15091,8 @@
         </p:nvSpPr>
         <p:spPr>
           <a:xfrm>
-            <a:off x="576072" y="3566160"/>
-            <a:ext cx="2231136" cy="365760"/>
+            <a:off x="576072" y="3457156"/>
+            <a:ext cx="2231136" cy="425354"/>
           </a:xfrm>
           <a:prstGeom prst="rect">
             <a:avLst/>
@@ -12782,8 +15130,8 @@
         </p:nvSpPr>
         <p:spPr>
           <a:xfrm>
-            <a:off x="2953512" y="3566160"/>
-            <a:ext cx="4334256" cy="365760"/>
+            <a:off x="2953512" y="3457156"/>
+            <a:ext cx="4334256" cy="425354"/>
           </a:xfrm>
           <a:prstGeom prst="rect">
             <a:avLst/>
@@ -12821,8 +15169,8 @@
         </p:nvSpPr>
         <p:spPr>
           <a:xfrm>
-            <a:off x="7434072" y="3566160"/>
-            <a:ext cx="4151376" cy="365760"/>
+            <a:off x="7434072" y="3457156"/>
+            <a:ext cx="4151376" cy="425354"/>
           </a:xfrm>
           <a:prstGeom prst="rect">
             <a:avLst/>
@@ -12860,8 +15208,8 @@
         </p:nvSpPr>
         <p:spPr>
           <a:xfrm>
-            <a:off x="502920" y="4014216"/>
-            <a:ext cx="11155680" cy="512064"/>
+            <a:off x="502920" y="3906654"/>
+            <a:ext cx="11155680" cy="485354"/>
           </a:xfrm>
           <a:prstGeom prst="rect">
             <a:avLst/>
@@ -12876,6 +15224,10 @@
             <a:prstDash val="solid"/>
           </a:ln>
         </p:spPr>
+        <p:txBody>
+          <a:bodyPr/>
+          <a:p/>
+        </p:txBody>
       </p:sp>
       <p:sp>
         <p:nvSpPr>
@@ -12885,8 +15237,8 @@
         </p:nvSpPr>
         <p:spPr>
           <a:xfrm>
-            <a:off x="576072" y="4096512"/>
-            <a:ext cx="2231136" cy="365760"/>
+            <a:off x="576072" y="3951654"/>
+            <a:ext cx="2231136" cy="425354"/>
           </a:xfrm>
           <a:prstGeom prst="rect">
             <a:avLst/>
@@ -12924,8 +15276,8 @@
         </p:nvSpPr>
         <p:spPr>
           <a:xfrm>
-            <a:off x="2953512" y="4096512"/>
-            <a:ext cx="4334256" cy="365760"/>
+            <a:off x="2953512" y="3951654"/>
+            <a:ext cx="4334256" cy="425354"/>
           </a:xfrm>
           <a:prstGeom prst="rect">
             <a:avLst/>
@@ -12963,8 +15315,8 @@
         </p:nvSpPr>
         <p:spPr>
           <a:xfrm>
-            <a:off x="7434072" y="4096512"/>
-            <a:ext cx="4151376" cy="365760"/>
+            <a:off x="7434072" y="3951654"/>
+            <a:ext cx="4151376" cy="425354"/>
           </a:xfrm>
           <a:prstGeom prst="rect">
             <a:avLst/>
@@ -13002,8 +15354,8 @@
         </p:nvSpPr>
         <p:spPr>
           <a:xfrm>
-            <a:off x="502920" y="4544568"/>
-            <a:ext cx="11155680" cy="512064"/>
+            <a:off x="502920" y="4401152"/>
+            <a:ext cx="11155680" cy="485354"/>
           </a:xfrm>
           <a:prstGeom prst="rect">
             <a:avLst/>
@@ -13018,6 +15370,10 @@
             <a:prstDash val="solid"/>
           </a:ln>
         </p:spPr>
+        <p:txBody>
+          <a:bodyPr/>
+          <a:p/>
+        </p:txBody>
       </p:sp>
       <p:sp>
         <p:nvSpPr>
@@ -13027,8 +15383,8 @@
         </p:nvSpPr>
         <p:spPr>
           <a:xfrm>
-            <a:off x="576072" y="4626864"/>
-            <a:ext cx="2231136" cy="365760"/>
+            <a:off x="576072" y="4446152"/>
+            <a:ext cx="2231136" cy="425354"/>
           </a:xfrm>
           <a:prstGeom prst="rect">
             <a:avLst/>
@@ -13066,8 +15422,8 @@
         </p:nvSpPr>
         <p:spPr>
           <a:xfrm>
-            <a:off x="2953512" y="4626864"/>
-            <a:ext cx="4334256" cy="365760"/>
+            <a:off x="2953512" y="4446152"/>
+            <a:ext cx="4334256" cy="425354"/>
           </a:xfrm>
           <a:prstGeom prst="rect">
             <a:avLst/>
@@ -13105,8 +15461,8 @@
         </p:nvSpPr>
         <p:spPr>
           <a:xfrm>
-            <a:off x="7434072" y="4626864"/>
-            <a:ext cx="4151376" cy="365760"/>
+            <a:off x="7434072" y="4446152"/>
+            <a:ext cx="4151376" cy="425354"/>
           </a:xfrm>
           <a:prstGeom prst="rect">
             <a:avLst/>
@@ -13144,8 +15500,8 @@
         </p:nvSpPr>
         <p:spPr>
           <a:xfrm>
-            <a:off x="502920" y="5074920"/>
-            <a:ext cx="11155680" cy="512064"/>
+            <a:off x="502920" y="4895650"/>
+            <a:ext cx="11155680" cy="485354"/>
           </a:xfrm>
           <a:prstGeom prst="rect">
             <a:avLst/>
@@ -13160,6 +15516,10 @@
             <a:prstDash val="solid"/>
           </a:ln>
         </p:spPr>
+        <p:txBody>
+          <a:bodyPr/>
+          <a:p/>
+        </p:txBody>
       </p:sp>
       <p:sp>
         <p:nvSpPr>
@@ -13169,8 +15529,8 @@
         </p:nvSpPr>
         <p:spPr>
           <a:xfrm>
-            <a:off x="576072" y="5157216"/>
-            <a:ext cx="2231136" cy="365760"/>
+            <a:off x="576072" y="4940650"/>
+            <a:ext cx="2231136" cy="425354"/>
           </a:xfrm>
           <a:prstGeom prst="rect">
             <a:avLst/>
@@ -13208,8 +15568,8 @@
         </p:nvSpPr>
         <p:spPr>
           <a:xfrm>
-            <a:off x="2953512" y="5157216"/>
-            <a:ext cx="4334256" cy="365760"/>
+            <a:off x="2953512" y="4940650"/>
+            <a:ext cx="4334256" cy="425354"/>
           </a:xfrm>
           <a:prstGeom prst="rect">
             <a:avLst/>
@@ -13247,8 +15607,8 @@
         </p:nvSpPr>
         <p:spPr>
           <a:xfrm>
-            <a:off x="7434072" y="5157216"/>
-            <a:ext cx="4151376" cy="365760"/>
+            <a:off x="7434072" y="4940650"/>
+            <a:ext cx="4151376" cy="425354"/>
           </a:xfrm>
           <a:prstGeom prst="rect">
             <a:avLst/>
@@ -13286,8 +15646,8 @@
         </p:nvSpPr>
         <p:spPr>
           <a:xfrm>
-            <a:off x="502920" y="5605272"/>
-            <a:ext cx="11155680" cy="512064"/>
+            <a:off x="502920" y="5390148"/>
+            <a:ext cx="11155680" cy="485354"/>
           </a:xfrm>
           <a:prstGeom prst="rect">
             <a:avLst/>
@@ -13302,6 +15662,10 @@
             <a:prstDash val="solid"/>
           </a:ln>
         </p:spPr>
+        <p:txBody>
+          <a:bodyPr/>
+          <a:p/>
+        </p:txBody>
       </p:sp>
       <p:sp>
         <p:nvSpPr>
@@ -13311,8 +15675,8 @@
         </p:nvSpPr>
         <p:spPr>
           <a:xfrm>
-            <a:off x="576072" y="5687568"/>
-            <a:ext cx="2231136" cy="365760"/>
+            <a:off x="576072" y="5435148"/>
+            <a:ext cx="2231136" cy="425354"/>
           </a:xfrm>
           <a:prstGeom prst="rect">
             <a:avLst/>
@@ -13350,8 +15714,8 @@
         </p:nvSpPr>
         <p:spPr>
           <a:xfrm>
-            <a:off x="2953512" y="5687568"/>
-            <a:ext cx="4334256" cy="365760"/>
+            <a:off x="2953512" y="5435148"/>
+            <a:ext cx="4334256" cy="425354"/>
           </a:xfrm>
           <a:prstGeom prst="rect">
             <a:avLst/>
@@ -13389,8 +15753,8 @@
         </p:nvSpPr>
         <p:spPr>
           <a:xfrm>
-            <a:off x="7434072" y="5687568"/>
-            <a:ext cx="4151376" cy="365760"/>
+            <a:off x="7434072" y="5435148"/>
+            <a:ext cx="4151376" cy="425354"/>
           </a:xfrm>
           <a:prstGeom prst="rect">
             <a:avLst/>
@@ -13417,6 +15781,200 @@
               <a:t>SEC 17a-4(b)(4),(e)(7); FINRA 4511; Reg S-P §248.30(a)</a:t>
             </a:r>
             <a:endParaRPr lang="en-US" sz="950" dirty="0"/>
+          </a:p>
+        </p:txBody>
+      </p:sp>
+      <p:sp>
+        <p:nvSpPr>
+          <p:cNvPr id="55" name="Rectangle 54"/>
+          <p:cNvSpPr/>
+          <p:nvPr/>
+        </p:nvSpPr>
+        <p:spPr>
+          <a:xfrm>
+            <a:off x="502920" y="5884646"/>
+            <a:ext cx="11155680" cy="485354"/>
+          </a:xfrm>
+          <a:prstGeom prst="rect">
+            <a:avLst/>
+          </a:prstGeom>
+          <a:solidFill>
+            <a:srgbClr val="EEF2F7"/>
+          </a:solidFill>
+          <a:ln>
+            <a:noFill/>
+          </a:ln>
+        </p:spPr>
+        <p:style>
+          <a:lnRef idx="1">
+            <a:schemeClr val="accent1"/>
+          </a:lnRef>
+          <a:fillRef idx="3">
+            <a:schemeClr val="accent1"/>
+          </a:fillRef>
+          <a:effectRef idx="2">
+            <a:schemeClr val="accent1"/>
+          </a:effectRef>
+          <a:fontRef idx="minor">
+            <a:schemeClr val="lt1"/>
+          </a:fontRef>
+        </p:style>
+        <p:txBody>
+          <a:bodyPr rtlCol="0" anchor="ctr"/>
+          <a:lstStyle/>
+          <a:p>
+            <a:pPr algn="ctr"/>
+          </a:p>
+        </p:txBody>
+      </p:sp>
+      <p:sp>
+        <p:nvSpPr>
+          <p:cNvPr id="56" name="Rectangle 55"/>
+          <p:cNvSpPr/>
+          <p:nvPr/>
+        </p:nvSpPr>
+        <p:spPr>
+          <a:xfrm>
+            <a:off x="576072" y="5929646"/>
+            <a:ext cx="2231136" cy="425354"/>
+          </a:xfrm>
+          <a:prstGeom prst="rect">
+            <a:avLst/>
+          </a:prstGeom>
+          <a:noFill/>
+          <a:ln>
+            <a:noFill/>
+          </a:ln>
+        </p:spPr>
+        <p:style>
+          <a:lnRef idx="1">
+            <a:schemeClr val="accent1"/>
+          </a:lnRef>
+          <a:fillRef idx="3">
+            <a:schemeClr val="accent1"/>
+          </a:fillRef>
+          <a:effectRef idx="2">
+            <a:schemeClr val="accent1"/>
+          </a:effectRef>
+          <a:fontRef idx="minor">
+            <a:schemeClr val="lt1"/>
+          </a:fontRef>
+        </p:style>
+        <p:txBody>
+          <a:bodyPr rtlCol="0" anchor="ctr" wrap="square"/>
+          <a:lstStyle/>
+          <a:p>
+            <a:pPr algn="ctr"/>
+            <a:r>
+              <a:rPr sz="1050" b="1">
+                <a:solidFill>
+                  <a:srgbClr val="1A1A2E"/>
+                </a:solidFill>
+                <a:latin typeface="Arial"/>
+              </a:rPr>
+              <a:t>Microsoft Intune MDM/MAM
+(Corporate Mobile)</a:t>
+            </a:r>
+          </a:p>
+        </p:txBody>
+      </p:sp>
+      <p:sp>
+        <p:nvSpPr>
+          <p:cNvPr id="57" name="Rectangle 56"/>
+          <p:cNvSpPr/>
+          <p:nvPr/>
+        </p:nvSpPr>
+        <p:spPr>
+          <a:xfrm>
+            <a:off x="2953512" y="5929646"/>
+            <a:ext cx="4334256" cy="425354"/>
+          </a:xfrm>
+          <a:prstGeom prst="rect">
+            <a:avLst/>
+          </a:prstGeom>
+          <a:noFill/>
+          <a:ln>
+            <a:noFill/>
+          </a:ln>
+        </p:spPr>
+        <p:style>
+          <a:lnRef idx="1">
+            <a:schemeClr val="accent1"/>
+          </a:lnRef>
+          <a:fillRef idx="3">
+            <a:schemeClr val="accent1"/>
+          </a:fillRef>
+          <a:effectRef idx="2">
+            <a:schemeClr val="accent1"/>
+          </a:effectRef>
+          <a:fontRef idx="minor">
+            <a:schemeClr val="lt1"/>
+          </a:fontRef>
+        </p:style>
+        <p:txBody>
+          <a:bodyPr rtlCol="0" anchor="ctr" wrap="square"/>
+          <a:lstStyle/>
+          <a:p>
+            <a:pPr algn="ctr"/>
+            <a:r>
+              <a:rPr sz="1050" b="0">
+                <a:solidFill>
+                  <a:srgbClr val="334155"/>
+                </a:solidFill>
+                <a:latin typeface="Arial"/>
+              </a:rPr>
+              <a:t>Corporate phones: enforced enrollment, app containerization, remote wipe for M365 email and OneDrive.</a:t>
+            </a:r>
+          </a:p>
+        </p:txBody>
+      </p:sp>
+      <p:sp>
+        <p:nvSpPr>
+          <p:cNvPr id="58" name="Rectangle 57"/>
+          <p:cNvSpPr/>
+          <p:nvPr/>
+        </p:nvSpPr>
+        <p:spPr>
+          <a:xfrm>
+            <a:off x="7434072" y="5929646"/>
+            <a:ext cx="4151376" cy="425354"/>
+          </a:xfrm>
+          <a:prstGeom prst="rect">
+            <a:avLst/>
+          </a:prstGeom>
+          <a:noFill/>
+          <a:ln>
+            <a:noFill/>
+          </a:ln>
+        </p:spPr>
+        <p:style>
+          <a:lnRef idx="1">
+            <a:schemeClr val="accent1"/>
+          </a:lnRef>
+          <a:fillRef idx="3">
+            <a:schemeClr val="accent1"/>
+          </a:fillRef>
+          <a:effectRef idx="2">
+            <a:schemeClr val="accent1"/>
+          </a:effectRef>
+          <a:fontRef idx="minor">
+            <a:schemeClr val="lt1"/>
+          </a:fontRef>
+        </p:style>
+        <p:txBody>
+          <a:bodyPr rtlCol="0" anchor="ctr" wrap="square"/>
+          <a:lstStyle/>
+          <a:p>
+            <a:pPr algn="ctr"/>
+            <a:r>
+              <a:rPr sz="1050" b="0">
+                <a:solidFill>
+                  <a:srgbClr val="334155"/>
+                </a:solidFill>
+                <a:latin typeface="Arial"/>
+              </a:rPr>
+              <a:t>Reg S-P §248.30(a)(1)-(3); FINRA 3110(a); NIST AC-19, MP-5, MP-6</a:t>
+            </a:r>
           </a:p>
         </p:txBody>
       </p:sp>
@@ -13478,6 +16036,10 @@
             <a:prstDash val="solid"/>
           </a:ln>
         </p:spPr>
+        <p:txBody>
+          <a:bodyPr/>
+          <a:p/>
+        </p:txBody>
       </p:sp>
       <p:sp>
         <p:nvSpPr>
@@ -13507,6 +16069,10 @@
             <a:prstDash val="solid"/>
           </a:ln>
         </p:spPr>
+        <p:txBody>
+          <a:bodyPr/>
+          <a:p/>
+        </p:txBody>
       </p:sp>
       <p:sp>
         <p:nvSpPr>
@@ -13536,6 +16102,10 @@
             <a:prstDash val="solid"/>
           </a:ln>
         </p:spPr>
+        <p:txBody>
+          <a:bodyPr/>
+          <a:p/>
+        </p:txBody>
       </p:sp>
       <p:sp>
         <p:nvSpPr>
@@ -13565,6 +16135,10 @@
             <a:prstDash val="solid"/>
           </a:ln>
         </p:spPr>
+        <p:txBody>
+          <a:bodyPr/>
+          <a:p/>
+        </p:txBody>
       </p:sp>
       <p:sp>
         <p:nvSpPr>
@@ -13594,6 +16168,10 @@
             <a:prstDash val="solid"/>
           </a:ln>
         </p:spPr>
+        <p:txBody>
+          <a:bodyPr/>
+          <a:p/>
+        </p:txBody>
       </p:sp>
       <p:sp>
         <p:nvSpPr>
@@ -13623,6 +16201,10 @@
             <a:prstDash val="solid"/>
           </a:ln>
         </p:spPr>
+        <p:txBody>
+          <a:bodyPr/>
+          <a:p/>
+        </p:txBody>
       </p:sp>
       <p:sp>
         <p:nvSpPr>
@@ -13652,6 +16234,10 @@
             <a:prstDash val="solid"/>
           </a:ln>
         </p:spPr>
+        <p:txBody>
+          <a:bodyPr/>
+          <a:p/>
+        </p:txBody>
       </p:sp>
       <p:sp>
         <p:nvSpPr>
@@ -13681,6 +16267,10 @@
             <a:prstDash val="solid"/>
           </a:ln>
         </p:spPr>
+        <p:txBody>
+          <a:bodyPr/>
+          <a:p/>
+        </p:txBody>
       </p:sp>
       <p:sp>
         <p:nvSpPr>
@@ -13710,6 +16300,10 @@
             <a:prstDash val="solid"/>
           </a:ln>
         </p:spPr>
+        <p:txBody>
+          <a:bodyPr/>
+          <a:p/>
+        </p:txBody>
       </p:sp>
       <p:sp>
         <p:nvSpPr>
@@ -13739,6 +16333,10 @@
             <a:prstDash val="solid"/>
           </a:ln>
         </p:spPr>
+        <p:txBody>
+          <a:bodyPr/>
+          <a:p/>
+        </p:txBody>
       </p:sp>
       <p:sp>
         <p:nvSpPr>
@@ -13768,6 +16366,10 @@
             <a:prstDash val="solid"/>
           </a:ln>
         </p:spPr>
+        <p:txBody>
+          <a:bodyPr/>
+          <a:p/>
+        </p:txBody>
       </p:sp>
       <p:sp>
         <p:nvSpPr>
@@ -13797,6 +16399,10 @@
             <a:prstDash val="solid"/>
           </a:ln>
         </p:spPr>
+        <p:txBody>
+          <a:bodyPr/>
+          <a:p/>
+        </p:txBody>
       </p:sp>
       <p:sp>
         <p:nvSpPr>
@@ -13826,6 +16432,10 @@
             <a:prstDash val="solid"/>
           </a:ln>
         </p:spPr>
+        <p:txBody>
+          <a:bodyPr/>
+          <a:p/>
+        </p:txBody>
       </p:sp>
       <p:sp>
         <p:nvSpPr>
@@ -14009,6 +16619,10 @@
             <a:prstDash val="solid"/>
           </a:ln>
         </p:spPr>
+        <p:txBody>
+          <a:bodyPr/>
+          <a:p/>
+        </p:txBody>
       </p:sp>
       <p:sp>
         <p:nvSpPr>
@@ -14036,6 +16650,10 @@
             <a:prstDash val="solid"/>
           </a:ln>
         </p:spPr>
+        <p:txBody>
+          <a:bodyPr/>
+          <a:p/>
+        </p:txBody>
       </p:sp>
       <p:sp>
         <p:nvSpPr>
@@ -14141,6 +16759,10 @@
             <a:prstDash val="solid"/>
           </a:ln>
         </p:spPr>
+        <p:txBody>
+          <a:bodyPr/>
+          <a:p/>
+        </p:txBody>
       </p:sp>
       <p:sp>
         <p:nvSpPr>
@@ -14285,6 +16907,10 @@
             <a:prstDash val="solid"/>
           </a:ln>
         </p:spPr>
+        <p:txBody>
+          <a:bodyPr/>
+          <a:p/>
+        </p:txBody>
       </p:sp>
       <p:sp>
         <p:nvSpPr>
@@ -14312,6 +16938,10 @@
             <a:prstDash val="solid"/>
           </a:ln>
         </p:spPr>
+        <p:txBody>
+          <a:bodyPr/>
+          <a:p/>
+        </p:txBody>
       </p:sp>
       <p:sp>
         <p:nvSpPr>
@@ -14417,6 +17047,10 @@
             <a:prstDash val="solid"/>
           </a:ln>
         </p:spPr>
+        <p:txBody>
+          <a:bodyPr/>
+          <a:p/>
+        </p:txBody>
       </p:sp>
       <p:sp>
         <p:nvSpPr>
@@ -14444,6 +17078,10 @@
             <a:prstDash val="solid"/>
           </a:ln>
         </p:spPr>
+        <p:txBody>
+          <a:bodyPr/>
+          <a:p/>
+        </p:txBody>
       </p:sp>
       <p:sp>
         <p:nvSpPr>
@@ -14549,6 +17187,10 @@
             <a:prstDash val="solid"/>
           </a:ln>
         </p:spPr>
+        <p:txBody>
+          <a:bodyPr/>
+          <a:p/>
+        </p:txBody>
       </p:sp>
       <p:sp>
         <p:nvSpPr>
@@ -14576,6 +17218,10 @@
             <a:prstDash val="solid"/>
           </a:ln>
         </p:spPr>
+        <p:txBody>
+          <a:bodyPr/>
+          <a:p/>
+        </p:txBody>
       </p:sp>
       <p:sp>
         <p:nvSpPr>
@@ -14713,6 +17359,10 @@
             <a:prstDash val="solid"/>
           </a:ln>
         </p:spPr>
+        <p:txBody>
+          <a:bodyPr/>
+          <a:p/>
+        </p:txBody>
       </p:sp>
       <p:sp>
         <p:nvSpPr>
@@ -14742,6 +17392,10 @@
             <a:prstDash val="solid"/>
           </a:ln>
         </p:spPr>
+        <p:txBody>
+          <a:bodyPr/>
+          <a:p/>
+        </p:txBody>
       </p:sp>
       <p:sp>
         <p:nvSpPr>
@@ -14771,6 +17425,10 @@
             <a:prstDash val="solid"/>
           </a:ln>
         </p:spPr>
+        <p:txBody>
+          <a:bodyPr/>
+          <a:p/>
+        </p:txBody>
       </p:sp>
       <p:sp>
         <p:nvSpPr>
@@ -14800,6 +17458,10 @@
             <a:prstDash val="solid"/>
           </a:ln>
         </p:spPr>
+        <p:txBody>
+          <a:bodyPr/>
+          <a:p/>
+        </p:txBody>
       </p:sp>
       <p:sp>
         <p:nvSpPr>
@@ -14829,6 +17491,10 @@
             <a:prstDash val="solid"/>
           </a:ln>
         </p:spPr>
+        <p:txBody>
+          <a:bodyPr/>
+          <a:p/>
+        </p:txBody>
       </p:sp>
       <p:sp>
         <p:nvSpPr>
@@ -14858,6 +17524,10 @@
             <a:prstDash val="solid"/>
           </a:ln>
         </p:spPr>
+        <p:txBody>
+          <a:bodyPr/>
+          <a:p/>
+        </p:txBody>
       </p:sp>
       <p:sp>
         <p:nvSpPr>
@@ -14887,6 +17557,10 @@
             <a:prstDash val="solid"/>
           </a:ln>
         </p:spPr>
+        <p:txBody>
+          <a:bodyPr/>
+          <a:p/>
+        </p:txBody>
       </p:sp>
       <p:sp>
         <p:nvSpPr>
@@ -14916,6 +17590,10 @@
             <a:prstDash val="solid"/>
           </a:ln>
         </p:spPr>
+        <p:txBody>
+          <a:bodyPr/>
+          <a:p/>
+        </p:txBody>
       </p:sp>
       <p:sp>
         <p:nvSpPr>
@@ -14945,6 +17623,10 @@
             <a:prstDash val="solid"/>
           </a:ln>
         </p:spPr>
+        <p:txBody>
+          <a:bodyPr/>
+          <a:p/>
+        </p:txBody>
       </p:sp>
       <p:sp>
         <p:nvSpPr>
@@ -14974,6 +17656,10 @@
             <a:prstDash val="solid"/>
           </a:ln>
         </p:spPr>
+        <p:txBody>
+          <a:bodyPr/>
+          <a:p/>
+        </p:txBody>
       </p:sp>
       <p:sp>
         <p:nvSpPr>
@@ -15003,6 +17689,10 @@
             <a:prstDash val="solid"/>
           </a:ln>
         </p:spPr>
+        <p:txBody>
+          <a:bodyPr/>
+          <a:p/>
+        </p:txBody>
       </p:sp>
       <p:sp>
         <p:nvSpPr>
@@ -15032,6 +17722,10 @@
             <a:prstDash val="solid"/>
           </a:ln>
         </p:spPr>
+        <p:txBody>
+          <a:bodyPr/>
+          <a:p/>
+        </p:txBody>
       </p:sp>
       <p:sp>
         <p:nvSpPr>
@@ -15061,6 +17755,10 @@
             <a:prstDash val="solid"/>
           </a:ln>
         </p:spPr>
+        <p:txBody>
+          <a:bodyPr/>
+          <a:p/>
+        </p:txBody>
       </p:sp>
       <p:sp>
         <p:nvSpPr>
@@ -15244,6 +17942,10 @@
             <a:prstDash val="solid"/>
           </a:ln>
         </p:spPr>
+        <p:txBody>
+          <a:bodyPr/>
+          <a:p/>
+        </p:txBody>
       </p:sp>
       <p:sp>
         <p:nvSpPr>
@@ -15271,6 +17973,10 @@
             <a:prstDash val="solid"/>
           </a:ln>
         </p:spPr>
+        <p:txBody>
+          <a:bodyPr/>
+          <a:p/>
+        </p:txBody>
       </p:sp>
       <p:sp>
         <p:nvSpPr>
@@ -15378,6 +18084,10 @@
             <a:prstDash val="solid"/>
           </a:ln>
         </p:spPr>
+        <p:txBody>
+          <a:bodyPr/>
+          <a:p/>
+        </p:txBody>
       </p:sp>
       <p:sp>
         <p:nvSpPr>
@@ -15520,6 +18230,10 @@
             <a:prstDash val="solid"/>
           </a:ln>
         </p:spPr>
+        <p:txBody>
+          <a:bodyPr/>
+          <a:p/>
+        </p:txBody>
       </p:sp>
       <p:sp>
         <p:nvSpPr>
@@ -15662,6 +18376,10 @@
             <a:prstDash val="solid"/>
           </a:ln>
         </p:spPr>
+        <p:txBody>
+          <a:bodyPr/>
+          <a:p/>
+        </p:txBody>
       </p:sp>
       <p:sp>
         <p:nvSpPr>
@@ -15804,6 +18522,10 @@
             <a:prstDash val="solid"/>
           </a:ln>
         </p:spPr>
+        <p:txBody>
+          <a:bodyPr/>
+          <a:p/>
+        </p:txBody>
       </p:sp>
       <p:sp>
         <p:nvSpPr>
@@ -15946,6 +18668,10 @@
             <a:prstDash val="solid"/>
           </a:ln>
         </p:spPr>
+        <p:txBody>
+          <a:bodyPr/>
+          <a:p/>
+        </p:txBody>
       </p:sp>
       <p:sp>
         <p:nvSpPr>
@@ -16088,6 +18814,10 @@
             <a:prstDash val="solid"/>
           </a:ln>
         </p:spPr>
+        <p:txBody>
+          <a:bodyPr/>
+          <a:p/>
+        </p:txBody>
       </p:sp>
       <p:sp>
         <p:nvSpPr>
@@ -16232,6 +18962,10 @@
             <a:prstDash val="solid"/>
           </a:ln>
         </p:spPr>
+        <p:txBody>
+          <a:bodyPr/>
+          <a:p/>
+        </p:txBody>
       </p:sp>
       <p:sp>
         <p:nvSpPr>
@@ -16330,6 +19064,10 @@
             <a:prstDash val="solid"/>
           </a:ln>
         </p:spPr>
+        <p:txBody>
+          <a:bodyPr/>
+          <a:p/>
+        </p:txBody>
       </p:sp>
       <p:sp>
         <p:nvSpPr>
@@ -16359,6 +19097,10 @@
             <a:prstDash val="solid"/>
           </a:ln>
         </p:spPr>
+        <p:txBody>
+          <a:bodyPr/>
+          <a:p/>
+        </p:txBody>
       </p:sp>
       <p:sp>
         <p:nvSpPr>
@@ -16388,6 +19130,10 @@
             <a:prstDash val="solid"/>
           </a:ln>
         </p:spPr>
+        <p:txBody>
+          <a:bodyPr/>
+          <a:p/>
+        </p:txBody>
       </p:sp>
       <p:sp>
         <p:nvSpPr>
@@ -16417,6 +19163,10 @@
             <a:prstDash val="solid"/>
           </a:ln>
         </p:spPr>
+        <p:txBody>
+          <a:bodyPr/>
+          <a:p/>
+        </p:txBody>
       </p:sp>
       <p:sp>
         <p:nvSpPr>
@@ -16446,6 +19196,10 @@
             <a:prstDash val="solid"/>
           </a:ln>
         </p:spPr>
+        <p:txBody>
+          <a:bodyPr/>
+          <a:p/>
+        </p:txBody>
       </p:sp>
       <p:sp>
         <p:nvSpPr>
@@ -16475,6 +19229,10 @@
             <a:prstDash val="solid"/>
           </a:ln>
         </p:spPr>
+        <p:txBody>
+          <a:bodyPr/>
+          <a:p/>
+        </p:txBody>
       </p:sp>
       <p:sp>
         <p:nvSpPr>
@@ -16504,6 +19262,10 @@
             <a:prstDash val="solid"/>
           </a:ln>
         </p:spPr>
+        <p:txBody>
+          <a:bodyPr/>
+          <a:p/>
+        </p:txBody>
       </p:sp>
       <p:sp>
         <p:nvSpPr>
@@ -16533,6 +19295,10 @@
             <a:prstDash val="solid"/>
           </a:ln>
         </p:spPr>
+        <p:txBody>
+          <a:bodyPr/>
+          <a:p/>
+        </p:txBody>
       </p:sp>
       <p:sp>
         <p:nvSpPr>
@@ -16562,6 +19328,10 @@
             <a:prstDash val="solid"/>
           </a:ln>
         </p:spPr>
+        <p:txBody>
+          <a:bodyPr/>
+          <a:p/>
+        </p:txBody>
       </p:sp>
       <p:sp>
         <p:nvSpPr>
@@ -16591,6 +19361,10 @@
             <a:prstDash val="solid"/>
           </a:ln>
         </p:spPr>
+        <p:txBody>
+          <a:bodyPr/>
+          <a:p/>
+        </p:txBody>
       </p:sp>
       <p:sp>
         <p:nvSpPr>
@@ -16620,6 +19394,10 @@
             <a:prstDash val="solid"/>
           </a:ln>
         </p:spPr>
+        <p:txBody>
+          <a:bodyPr/>
+          <a:p/>
+        </p:txBody>
       </p:sp>
       <p:sp>
         <p:nvSpPr>
@@ -16649,6 +19427,10 @@
             <a:prstDash val="solid"/>
           </a:ln>
         </p:spPr>
+        <p:txBody>
+          <a:bodyPr/>
+          <a:p/>
+        </p:txBody>
       </p:sp>
       <p:sp>
         <p:nvSpPr>
@@ -16678,6 +19460,10 @@
             <a:prstDash val="solid"/>
           </a:ln>
         </p:spPr>
+        <p:txBody>
+          <a:bodyPr/>
+          <a:p/>
+        </p:txBody>
       </p:sp>
       <p:sp>
         <p:nvSpPr>
@@ -16829,7 +19615,7 @@
                 <a:ea typeface="Arial" pitchFamily="34" charset="-122"/>
                 <a:cs typeface="Arial" pitchFamily="34" charset="-120"/>
               </a:rPr>
-              <a:t>Without conditional access, a user at home on a personal laptop can still MFA into OneDrive or a custodian portal and exfiltrate data.</a:t>
+              <a:t>Without conditional access, a user at home on a personal laptop can still MFA into OneDrive or a custodian portal and exfiltrate data. Without mobile device management, a phone with Outlook is an uncontrolled copy of every email.</a:t>
             </a:r>
             <a:endParaRPr lang="en-US" sz="1100" dirty="0"/>
           </a:p>
@@ -16861,6 +19647,10 @@
             <a:prstDash val="solid"/>
           </a:ln>
         </p:spPr>
+        <p:txBody>
+          <a:bodyPr/>
+          <a:p/>
+        </p:txBody>
       </p:sp>
       <p:sp>
         <p:nvSpPr>
@@ -16888,6 +19678,10 @@
             <a:prstDash val="solid"/>
           </a:ln>
         </p:spPr>
+        <p:txBody>
+          <a:bodyPr/>
+          <a:p/>
+        </p:txBody>
       </p:sp>
       <p:sp>
         <p:nvSpPr>
@@ -16993,6 +19787,10 @@
             <a:prstDash val="solid"/>
           </a:ln>
         </p:spPr>
+        <p:txBody>
+          <a:bodyPr/>
+          <a:p/>
+        </p:txBody>
       </p:sp>
       <p:sp>
         <p:nvSpPr>
@@ -17020,6 +19818,10 @@
             <a:prstDash val="solid"/>
           </a:ln>
         </p:spPr>
+        <p:txBody>
+          <a:bodyPr/>
+          <a:p/>
+        </p:txBody>
       </p:sp>
       <p:sp>
         <p:nvSpPr>
@@ -17226,6 +20028,10 @@
             <a:prstDash val="solid"/>
           </a:ln>
         </p:spPr>
+        <p:txBody>
+          <a:bodyPr/>
+          <a:p/>
+        </p:txBody>
       </p:sp>
       <p:sp>
         <p:nvSpPr>
@@ -17253,6 +20059,10 @@
             <a:prstDash val="solid"/>
           </a:ln>
         </p:spPr>
+        <p:txBody>
+          <a:bodyPr/>
+          <a:p/>
+        </p:txBody>
       </p:sp>
       <p:sp>
         <p:nvSpPr>
@@ -17459,6 +20269,10 @@
             <a:prstDash val="solid"/>
           </a:ln>
         </p:spPr>
+        <p:txBody>
+          <a:bodyPr/>
+          <a:p/>
+        </p:txBody>
       </p:sp>
       <p:sp>
         <p:nvSpPr>
@@ -17486,6 +20300,10 @@
             <a:prstDash val="solid"/>
           </a:ln>
         </p:spPr>
+        <p:txBody>
+          <a:bodyPr/>
+          <a:p/>
+        </p:txBody>
       </p:sp>
       <p:sp>
         <p:nvSpPr>
@@ -17698,6 +20516,2369 @@
 </file>
 
 <file path=ppt/slides/slide8.xml><?xml version="1.0" encoding="utf-8"?>
+<p:sld xmlns:a="http://schemas.openxmlformats.org/drawingml/2006/main" xmlns:p="http://schemas.openxmlformats.org/presentationml/2006/main" xmlns:r="http://schemas.openxmlformats.org/officeDocument/2006/relationships">
+  <p:cSld>
+    <p:spTree>
+      <p:nvGrpSpPr>
+        <p:cNvPr id="1" name=""/>
+        <p:cNvGrpSpPr/>
+        <p:nvPr/>
+      </p:nvGrpSpPr>
+      <p:grpSpPr/>
+      <p:sp>
+        <p:nvSpPr>
+          <p:cNvPr id="2" name="Rectangle 1"/>
+          <p:cNvSpPr/>
+          <p:nvPr/>
+        </p:nvSpPr>
+        <p:spPr>
+          <a:xfrm>
+            <a:off x="0" y="0"/>
+            <a:ext cx="12188952" cy="164592"/>
+          </a:xfrm>
+          <a:prstGeom prst="rect">
+            <a:avLst/>
+          </a:prstGeom>
+          <a:solidFill>
+            <a:srgbClr val="006DB6"/>
+          </a:solidFill>
+          <a:ln>
+            <a:noFill/>
+          </a:ln>
+        </p:spPr>
+        <p:style>
+          <a:lnRef idx="1">
+            <a:schemeClr val="accent1"/>
+          </a:lnRef>
+          <a:fillRef idx="3">
+            <a:schemeClr val="accent1"/>
+          </a:fillRef>
+          <a:effectRef idx="2">
+            <a:schemeClr val="accent1"/>
+          </a:effectRef>
+          <a:fontRef idx="minor">
+            <a:schemeClr val="lt1"/>
+          </a:fontRef>
+        </p:style>
+        <p:txBody>
+          <a:bodyPr rtlCol="0" anchor="ctr"/>
+          <a:lstStyle/>
+          <a:p>
+            <a:pPr algn="ctr"/>
+          </a:p>
+        </p:txBody>
+      </p:sp>
+      <p:sp>
+        <p:nvSpPr>
+          <p:cNvPr id="3" name="Rectangle 2"/>
+          <p:cNvSpPr/>
+          <p:nvPr/>
+        </p:nvSpPr>
+        <p:spPr>
+          <a:xfrm>
+            <a:off x="502920" y="320040"/>
+            <a:ext cx="82296" cy="82296"/>
+          </a:xfrm>
+          <a:prstGeom prst="rect">
+            <a:avLst/>
+          </a:prstGeom>
+          <a:solidFill>
+            <a:srgbClr val="64748B"/>
+          </a:solidFill>
+          <a:ln>
+            <a:noFill/>
+          </a:ln>
+        </p:spPr>
+        <p:style>
+          <a:lnRef idx="1">
+            <a:schemeClr val="accent1"/>
+          </a:lnRef>
+          <a:fillRef idx="3">
+            <a:schemeClr val="accent1"/>
+          </a:fillRef>
+          <a:effectRef idx="2">
+            <a:schemeClr val="accent1"/>
+          </a:effectRef>
+          <a:fontRef idx="minor">
+            <a:schemeClr val="lt1"/>
+          </a:fontRef>
+        </p:style>
+        <p:txBody>
+          <a:bodyPr rtlCol="0" anchor="ctr"/>
+          <a:lstStyle/>
+          <a:p>
+            <a:pPr algn="ctr"/>
+          </a:p>
+        </p:txBody>
+      </p:sp>
+      <p:sp>
+        <p:nvSpPr>
+          <p:cNvPr id="4" name="Rectangle 3"/>
+          <p:cNvSpPr/>
+          <p:nvPr/>
+        </p:nvSpPr>
+        <p:spPr>
+          <a:xfrm>
+            <a:off x="601675" y="320040"/>
+            <a:ext cx="82296" cy="82296"/>
+          </a:xfrm>
+          <a:prstGeom prst="rect">
+            <a:avLst/>
+          </a:prstGeom>
+          <a:solidFill>
+            <a:srgbClr val="006DB6"/>
+          </a:solidFill>
+          <a:ln>
+            <a:noFill/>
+          </a:ln>
+        </p:spPr>
+        <p:style>
+          <a:lnRef idx="1">
+            <a:schemeClr val="accent1"/>
+          </a:lnRef>
+          <a:fillRef idx="3">
+            <a:schemeClr val="accent1"/>
+          </a:fillRef>
+          <a:effectRef idx="2">
+            <a:schemeClr val="accent1"/>
+          </a:effectRef>
+          <a:fontRef idx="minor">
+            <a:schemeClr val="lt1"/>
+          </a:fontRef>
+        </p:style>
+        <p:txBody>
+          <a:bodyPr rtlCol="0" anchor="ctr"/>
+          <a:lstStyle/>
+          <a:p>
+            <a:pPr algn="ctr"/>
+          </a:p>
+        </p:txBody>
+      </p:sp>
+      <p:sp>
+        <p:nvSpPr>
+          <p:cNvPr id="5" name="Rectangle 4"/>
+          <p:cNvSpPr/>
+          <p:nvPr/>
+        </p:nvSpPr>
+        <p:spPr>
+          <a:xfrm>
+            <a:off x="700430" y="320040"/>
+            <a:ext cx="82296" cy="82296"/>
+          </a:xfrm>
+          <a:prstGeom prst="rect">
+            <a:avLst/>
+          </a:prstGeom>
+          <a:solidFill>
+            <a:srgbClr val="F67D4B"/>
+          </a:solidFill>
+          <a:ln>
+            <a:noFill/>
+          </a:ln>
+        </p:spPr>
+        <p:style>
+          <a:lnRef idx="1">
+            <a:schemeClr val="accent1"/>
+          </a:lnRef>
+          <a:fillRef idx="3">
+            <a:schemeClr val="accent1"/>
+          </a:fillRef>
+          <a:effectRef idx="2">
+            <a:schemeClr val="accent1"/>
+          </a:effectRef>
+          <a:fontRef idx="minor">
+            <a:schemeClr val="lt1"/>
+          </a:fontRef>
+        </p:style>
+        <p:txBody>
+          <a:bodyPr rtlCol="0" anchor="ctr"/>
+          <a:lstStyle/>
+          <a:p>
+            <a:pPr algn="ctr"/>
+          </a:p>
+        </p:txBody>
+      </p:sp>
+      <p:sp>
+        <p:nvSpPr>
+          <p:cNvPr id="6" name="Rectangle 5"/>
+          <p:cNvSpPr/>
+          <p:nvPr/>
+        </p:nvSpPr>
+        <p:spPr>
+          <a:xfrm>
+            <a:off x="799186" y="320040"/>
+            <a:ext cx="82296" cy="82296"/>
+          </a:xfrm>
+          <a:prstGeom prst="rect">
+            <a:avLst/>
+          </a:prstGeom>
+          <a:solidFill>
+            <a:srgbClr val="64748B"/>
+          </a:solidFill>
+          <a:ln>
+            <a:noFill/>
+          </a:ln>
+        </p:spPr>
+        <p:style>
+          <a:lnRef idx="1">
+            <a:schemeClr val="accent1"/>
+          </a:lnRef>
+          <a:fillRef idx="3">
+            <a:schemeClr val="accent1"/>
+          </a:fillRef>
+          <a:effectRef idx="2">
+            <a:schemeClr val="accent1"/>
+          </a:effectRef>
+          <a:fontRef idx="minor">
+            <a:schemeClr val="lt1"/>
+          </a:fontRef>
+        </p:style>
+        <p:txBody>
+          <a:bodyPr rtlCol="0" anchor="ctr"/>
+          <a:lstStyle/>
+          <a:p>
+            <a:pPr algn="ctr"/>
+          </a:p>
+        </p:txBody>
+      </p:sp>
+      <p:sp>
+        <p:nvSpPr>
+          <p:cNvPr id="7" name="Rectangle 6"/>
+          <p:cNvSpPr/>
+          <p:nvPr/>
+        </p:nvSpPr>
+        <p:spPr>
+          <a:xfrm>
+            <a:off x="502920" y="418795"/>
+            <a:ext cx="82296" cy="82296"/>
+          </a:xfrm>
+          <a:prstGeom prst="rect">
+            <a:avLst/>
+          </a:prstGeom>
+          <a:solidFill>
+            <a:srgbClr val="64748B"/>
+          </a:solidFill>
+          <a:ln>
+            <a:noFill/>
+          </a:ln>
+        </p:spPr>
+        <p:style>
+          <a:lnRef idx="1">
+            <a:schemeClr val="accent1"/>
+          </a:lnRef>
+          <a:fillRef idx="3">
+            <a:schemeClr val="accent1"/>
+          </a:fillRef>
+          <a:effectRef idx="2">
+            <a:schemeClr val="accent1"/>
+          </a:effectRef>
+          <a:fontRef idx="minor">
+            <a:schemeClr val="lt1"/>
+          </a:fontRef>
+        </p:style>
+        <p:txBody>
+          <a:bodyPr rtlCol="0" anchor="ctr"/>
+          <a:lstStyle/>
+          <a:p>
+            <a:pPr algn="ctr"/>
+          </a:p>
+        </p:txBody>
+      </p:sp>
+      <p:sp>
+        <p:nvSpPr>
+          <p:cNvPr id="8" name="Rectangle 7"/>
+          <p:cNvSpPr/>
+          <p:nvPr/>
+        </p:nvSpPr>
+        <p:spPr>
+          <a:xfrm>
+            <a:off x="601675" y="418795"/>
+            <a:ext cx="82296" cy="82296"/>
+          </a:xfrm>
+          <a:prstGeom prst="rect">
+            <a:avLst/>
+          </a:prstGeom>
+          <a:solidFill>
+            <a:srgbClr val="1EAAC8"/>
+          </a:solidFill>
+          <a:ln>
+            <a:noFill/>
+          </a:ln>
+        </p:spPr>
+        <p:style>
+          <a:lnRef idx="1">
+            <a:schemeClr val="accent1"/>
+          </a:lnRef>
+          <a:fillRef idx="3">
+            <a:schemeClr val="accent1"/>
+          </a:fillRef>
+          <a:effectRef idx="2">
+            <a:schemeClr val="accent1"/>
+          </a:effectRef>
+          <a:fontRef idx="minor">
+            <a:schemeClr val="lt1"/>
+          </a:fontRef>
+        </p:style>
+        <p:txBody>
+          <a:bodyPr rtlCol="0" anchor="ctr"/>
+          <a:lstStyle/>
+          <a:p>
+            <a:pPr algn="ctr"/>
+          </a:p>
+        </p:txBody>
+      </p:sp>
+      <p:sp>
+        <p:nvSpPr>
+          <p:cNvPr id="9" name="Rectangle 8"/>
+          <p:cNvSpPr/>
+          <p:nvPr/>
+        </p:nvSpPr>
+        <p:spPr>
+          <a:xfrm>
+            <a:off x="700430" y="418795"/>
+            <a:ext cx="82296" cy="82296"/>
+          </a:xfrm>
+          <a:prstGeom prst="rect">
+            <a:avLst/>
+          </a:prstGeom>
+          <a:solidFill>
+            <a:srgbClr val="64748B"/>
+          </a:solidFill>
+          <a:ln>
+            <a:noFill/>
+          </a:ln>
+        </p:spPr>
+        <p:style>
+          <a:lnRef idx="1">
+            <a:schemeClr val="accent1"/>
+          </a:lnRef>
+          <a:fillRef idx="3">
+            <a:schemeClr val="accent1"/>
+          </a:fillRef>
+          <a:effectRef idx="2">
+            <a:schemeClr val="accent1"/>
+          </a:effectRef>
+          <a:fontRef idx="minor">
+            <a:schemeClr val="lt1"/>
+          </a:fontRef>
+        </p:style>
+        <p:txBody>
+          <a:bodyPr rtlCol="0" anchor="ctr"/>
+          <a:lstStyle/>
+          <a:p>
+            <a:pPr algn="ctr"/>
+          </a:p>
+        </p:txBody>
+      </p:sp>
+      <p:sp>
+        <p:nvSpPr>
+          <p:cNvPr id="10" name="Rectangle 9"/>
+          <p:cNvSpPr/>
+          <p:nvPr/>
+        </p:nvSpPr>
+        <p:spPr>
+          <a:xfrm>
+            <a:off x="799186" y="418795"/>
+            <a:ext cx="82296" cy="82296"/>
+          </a:xfrm>
+          <a:prstGeom prst="rect">
+            <a:avLst/>
+          </a:prstGeom>
+          <a:solidFill>
+            <a:srgbClr val="1EAAC8"/>
+          </a:solidFill>
+          <a:ln>
+            <a:noFill/>
+          </a:ln>
+        </p:spPr>
+        <p:style>
+          <a:lnRef idx="1">
+            <a:schemeClr val="accent1"/>
+          </a:lnRef>
+          <a:fillRef idx="3">
+            <a:schemeClr val="accent1"/>
+          </a:fillRef>
+          <a:effectRef idx="2">
+            <a:schemeClr val="accent1"/>
+          </a:effectRef>
+          <a:fontRef idx="minor">
+            <a:schemeClr val="lt1"/>
+          </a:fontRef>
+        </p:style>
+        <p:txBody>
+          <a:bodyPr rtlCol="0" anchor="ctr"/>
+          <a:lstStyle/>
+          <a:p>
+            <a:pPr algn="ctr"/>
+          </a:p>
+        </p:txBody>
+      </p:sp>
+      <p:sp>
+        <p:nvSpPr>
+          <p:cNvPr id="11" name="Rectangle 10"/>
+          <p:cNvSpPr/>
+          <p:nvPr/>
+        </p:nvSpPr>
+        <p:spPr>
+          <a:xfrm>
+            <a:off x="502920" y="517550"/>
+            <a:ext cx="82296" cy="82296"/>
+          </a:xfrm>
+          <a:prstGeom prst="rect">
+            <a:avLst/>
+          </a:prstGeom>
+          <a:solidFill>
+            <a:srgbClr val="94A3AF"/>
+          </a:solidFill>
+          <a:ln>
+            <a:noFill/>
+          </a:ln>
+        </p:spPr>
+        <p:style>
+          <a:lnRef idx="1">
+            <a:schemeClr val="accent1"/>
+          </a:lnRef>
+          <a:fillRef idx="3">
+            <a:schemeClr val="accent1"/>
+          </a:fillRef>
+          <a:effectRef idx="2">
+            <a:schemeClr val="accent1"/>
+          </a:effectRef>
+          <a:fontRef idx="minor">
+            <a:schemeClr val="lt1"/>
+          </a:fontRef>
+        </p:style>
+        <p:txBody>
+          <a:bodyPr rtlCol="0" anchor="ctr"/>
+          <a:lstStyle/>
+          <a:p>
+            <a:pPr algn="ctr"/>
+          </a:p>
+        </p:txBody>
+      </p:sp>
+      <p:sp>
+        <p:nvSpPr>
+          <p:cNvPr id="12" name="Rectangle 11"/>
+          <p:cNvSpPr/>
+          <p:nvPr/>
+        </p:nvSpPr>
+        <p:spPr>
+          <a:xfrm>
+            <a:off x="601675" y="517550"/>
+            <a:ext cx="82296" cy="82296"/>
+          </a:xfrm>
+          <a:prstGeom prst="rect">
+            <a:avLst/>
+          </a:prstGeom>
+          <a:solidFill>
+            <a:srgbClr val="006DB6"/>
+          </a:solidFill>
+          <a:ln>
+            <a:noFill/>
+          </a:ln>
+        </p:spPr>
+        <p:style>
+          <a:lnRef idx="1">
+            <a:schemeClr val="accent1"/>
+          </a:lnRef>
+          <a:fillRef idx="3">
+            <a:schemeClr val="accent1"/>
+          </a:fillRef>
+          <a:effectRef idx="2">
+            <a:schemeClr val="accent1"/>
+          </a:effectRef>
+          <a:fontRef idx="minor">
+            <a:schemeClr val="lt1"/>
+          </a:fontRef>
+        </p:style>
+        <p:txBody>
+          <a:bodyPr rtlCol="0" anchor="ctr"/>
+          <a:lstStyle/>
+          <a:p>
+            <a:pPr algn="ctr"/>
+          </a:p>
+        </p:txBody>
+      </p:sp>
+      <p:sp>
+        <p:nvSpPr>
+          <p:cNvPr id="13" name="Rectangle 12"/>
+          <p:cNvSpPr/>
+          <p:nvPr/>
+        </p:nvSpPr>
+        <p:spPr>
+          <a:xfrm>
+            <a:off x="700430" y="517550"/>
+            <a:ext cx="82296" cy="82296"/>
+          </a:xfrm>
+          <a:prstGeom prst="rect">
+            <a:avLst/>
+          </a:prstGeom>
+          <a:solidFill>
+            <a:srgbClr val="1EAAC8"/>
+          </a:solidFill>
+          <a:ln>
+            <a:noFill/>
+          </a:ln>
+        </p:spPr>
+        <p:style>
+          <a:lnRef idx="1">
+            <a:schemeClr val="accent1"/>
+          </a:lnRef>
+          <a:fillRef idx="3">
+            <a:schemeClr val="accent1"/>
+          </a:fillRef>
+          <a:effectRef idx="2">
+            <a:schemeClr val="accent1"/>
+          </a:effectRef>
+          <a:fontRef idx="minor">
+            <a:schemeClr val="lt1"/>
+          </a:fontRef>
+        </p:style>
+        <p:txBody>
+          <a:bodyPr rtlCol="0" anchor="ctr"/>
+          <a:lstStyle/>
+          <a:p>
+            <a:pPr algn="ctr"/>
+          </a:p>
+        </p:txBody>
+      </p:sp>
+      <p:sp>
+        <p:nvSpPr>
+          <p:cNvPr id="14" name="Rectangle 13"/>
+          <p:cNvSpPr/>
+          <p:nvPr/>
+        </p:nvSpPr>
+        <p:spPr>
+          <a:xfrm>
+            <a:off x="799186" y="517550"/>
+            <a:ext cx="82296" cy="82296"/>
+          </a:xfrm>
+          <a:prstGeom prst="rect">
+            <a:avLst/>
+          </a:prstGeom>
+          <a:solidFill>
+            <a:srgbClr val="64748B"/>
+          </a:solidFill>
+          <a:ln>
+            <a:noFill/>
+          </a:ln>
+        </p:spPr>
+        <p:style>
+          <a:lnRef idx="1">
+            <a:schemeClr val="accent1"/>
+          </a:lnRef>
+          <a:fillRef idx="3">
+            <a:schemeClr val="accent1"/>
+          </a:fillRef>
+          <a:effectRef idx="2">
+            <a:schemeClr val="accent1"/>
+          </a:effectRef>
+          <a:fontRef idx="minor">
+            <a:schemeClr val="lt1"/>
+          </a:fontRef>
+        </p:style>
+        <p:txBody>
+          <a:bodyPr rtlCol="0" anchor="ctr"/>
+          <a:lstStyle/>
+          <a:p>
+            <a:pPr algn="ctr"/>
+          </a:p>
+        </p:txBody>
+      </p:sp>
+      <p:sp>
+        <p:nvSpPr>
+          <p:cNvPr id="15" name="Rectangle 14"/>
+          <p:cNvSpPr/>
+          <p:nvPr/>
+        </p:nvSpPr>
+        <p:spPr>
+          <a:xfrm>
+            <a:off x="989381" y="301752"/>
+            <a:ext cx="1645920" cy="329184"/>
+          </a:xfrm>
+          <a:prstGeom prst="rect">
+            <a:avLst/>
+          </a:prstGeom>
+          <a:noFill/>
+          <a:ln>
+            <a:noFill/>
+          </a:ln>
+        </p:spPr>
+        <p:style>
+          <a:lnRef idx="1">
+            <a:schemeClr val="accent1"/>
+          </a:lnRef>
+          <a:fillRef idx="3">
+            <a:schemeClr val="accent1"/>
+          </a:fillRef>
+          <a:effectRef idx="2">
+            <a:schemeClr val="accent1"/>
+          </a:effectRef>
+          <a:fontRef idx="minor">
+            <a:schemeClr val="lt1"/>
+          </a:fontRef>
+        </p:style>
+        <p:txBody>
+          <a:bodyPr rtlCol="0" anchor="ctr" wrap="square"/>
+          <a:lstStyle/>
+          <a:p>
+            <a:pPr algn="l"/>
+            <a:r>
+              <a:rPr sz="1700" b="1">
+                <a:solidFill>
+                  <a:srgbClr val="1A1A2E"/>
+                </a:solidFill>
+                <a:latin typeface="Arial"/>
+              </a:rPr>
+              <a:t>TECHNIJIAN</a:t>
+            </a:r>
+          </a:p>
+        </p:txBody>
+      </p:sp>
+      <p:sp>
+        <p:nvSpPr>
+          <p:cNvPr id="16" name="Rectangle 15"/>
+          <p:cNvSpPr/>
+          <p:nvPr/>
+        </p:nvSpPr>
+        <p:spPr>
+          <a:xfrm>
+            <a:off x="502920" y="868680"/>
+            <a:ext cx="5486400" cy="256032"/>
+          </a:xfrm>
+          <a:prstGeom prst="rect">
+            <a:avLst/>
+          </a:prstGeom>
+          <a:noFill/>
+          <a:ln>
+            <a:noFill/>
+          </a:ln>
+        </p:spPr>
+        <p:style>
+          <a:lnRef idx="1">
+            <a:schemeClr val="accent1"/>
+          </a:lnRef>
+          <a:fillRef idx="3">
+            <a:schemeClr val="accent1"/>
+          </a:fillRef>
+          <a:effectRef idx="2">
+            <a:schemeClr val="accent1"/>
+          </a:effectRef>
+          <a:fontRef idx="minor">
+            <a:schemeClr val="lt1"/>
+          </a:fontRef>
+        </p:style>
+        <p:txBody>
+          <a:bodyPr rtlCol="0" anchor="ctr" wrap="square"/>
+          <a:lstStyle/>
+          <a:p>
+            <a:pPr algn="l"/>
+            <a:r>
+              <a:rPr sz="1000" b="1">
+                <a:solidFill>
+                  <a:srgbClr val="006DB6"/>
+                </a:solidFill>
+                <a:latin typeface="Arial"/>
+              </a:rPr>
+              <a:t>MOBILE DEVICE CONTROL</a:t>
+            </a:r>
+          </a:p>
+        </p:txBody>
+      </p:sp>
+      <p:sp>
+        <p:nvSpPr>
+          <p:cNvPr id="17" name="Rectangle 16"/>
+          <p:cNvSpPr/>
+          <p:nvPr/>
+        </p:nvSpPr>
+        <p:spPr>
+          <a:xfrm>
+            <a:off x="502920" y="1097280"/>
+            <a:ext cx="11338560" cy="502920"/>
+          </a:xfrm>
+          <a:prstGeom prst="rect">
+            <a:avLst/>
+          </a:prstGeom>
+          <a:noFill/>
+          <a:ln>
+            <a:noFill/>
+          </a:ln>
+        </p:spPr>
+        <p:style>
+          <a:lnRef idx="1">
+            <a:schemeClr val="accent1"/>
+          </a:lnRef>
+          <a:fillRef idx="3">
+            <a:schemeClr val="accent1"/>
+          </a:fillRef>
+          <a:effectRef idx="2">
+            <a:schemeClr val="accent1"/>
+          </a:effectRef>
+          <a:fontRef idx="minor">
+            <a:schemeClr val="lt1"/>
+          </a:fontRef>
+        </p:style>
+        <p:txBody>
+          <a:bodyPr rtlCol="0" anchor="ctr" wrap="square"/>
+          <a:lstStyle/>
+          <a:p>
+            <a:pPr algn="l"/>
+            <a:r>
+              <a:rPr sz="2200" b="1">
+                <a:solidFill>
+                  <a:srgbClr val="1A1A2E"/>
+                </a:solidFill>
+                <a:latin typeface="Arial"/>
+              </a:rPr>
+              <a:t>Corporate Phones With M365 Email And OneDrive Require A Dedicated Control Layer</a:t>
+            </a:r>
+          </a:p>
+        </p:txBody>
+      </p:sp>
+      <p:sp>
+        <p:nvSpPr>
+          <p:cNvPr id="18" name="Rectangle 17"/>
+          <p:cNvSpPr/>
+          <p:nvPr/>
+        </p:nvSpPr>
+        <p:spPr>
+          <a:xfrm>
+            <a:off x="502920" y="1554480"/>
+            <a:ext cx="11338560" cy="320040"/>
+          </a:xfrm>
+          <a:prstGeom prst="rect">
+            <a:avLst/>
+          </a:prstGeom>
+          <a:noFill/>
+          <a:ln>
+            <a:noFill/>
+          </a:ln>
+        </p:spPr>
+        <p:style>
+          <a:lnRef idx="1">
+            <a:schemeClr val="accent1"/>
+          </a:lnRef>
+          <a:fillRef idx="3">
+            <a:schemeClr val="accent1"/>
+          </a:fillRef>
+          <a:effectRef idx="2">
+            <a:schemeClr val="accent1"/>
+          </a:effectRef>
+          <a:fontRef idx="minor">
+            <a:schemeClr val="lt1"/>
+          </a:fontRef>
+        </p:style>
+        <p:txBody>
+          <a:bodyPr rtlCol="0" anchor="ctr" wrap="square"/>
+          <a:lstStyle/>
+          <a:p>
+            <a:pPr algn="l"/>
+            <a:r>
+              <a:rPr sz="1100" b="0">
+                <a:solidFill>
+                  <a:srgbClr val="334155"/>
+                </a:solidFill>
+                <a:latin typeface="Arial"/>
+              </a:rPr>
+              <a:t>A phone with Outlook and OneDrive is a full copy of regulated data outside the VDI boundary. Intune MDM closes this gap at no additional license cost.</a:t>
+            </a:r>
+          </a:p>
+        </p:txBody>
+      </p:sp>
+      <p:sp>
+        <p:nvSpPr>
+          <p:cNvPr id="19" name="Rectangle 18"/>
+          <p:cNvSpPr/>
+          <p:nvPr/>
+        </p:nvSpPr>
+        <p:spPr>
+          <a:xfrm>
+            <a:off x="502920" y="1874520"/>
+            <a:ext cx="11201400" cy="9144"/>
+          </a:xfrm>
+          <a:prstGeom prst="rect">
+            <a:avLst/>
+          </a:prstGeom>
+          <a:solidFill>
+            <a:srgbClr val="D8E0EA"/>
+          </a:solidFill>
+          <a:ln>
+            <a:noFill/>
+          </a:ln>
+        </p:spPr>
+        <p:style>
+          <a:lnRef idx="1">
+            <a:schemeClr val="accent1"/>
+          </a:lnRef>
+          <a:fillRef idx="3">
+            <a:schemeClr val="accent1"/>
+          </a:fillRef>
+          <a:effectRef idx="2">
+            <a:schemeClr val="accent1"/>
+          </a:effectRef>
+          <a:fontRef idx="minor">
+            <a:schemeClr val="lt1"/>
+          </a:fontRef>
+        </p:style>
+        <p:txBody>
+          <a:bodyPr rtlCol="0" anchor="ctr"/>
+          <a:lstStyle/>
+          <a:p>
+            <a:pPr algn="ctr"/>
+          </a:p>
+        </p:txBody>
+      </p:sp>
+      <p:sp>
+        <p:nvSpPr>
+          <p:cNvPr id="20" name="Rectangle 19"/>
+          <p:cNvSpPr/>
+          <p:nvPr/>
+        </p:nvSpPr>
+        <p:spPr>
+          <a:xfrm>
+            <a:off x="457200" y="6446520"/>
+            <a:ext cx="11292840" cy="10973"/>
+          </a:xfrm>
+          <a:prstGeom prst="rect">
+            <a:avLst/>
+          </a:prstGeom>
+          <a:solidFill>
+            <a:srgbClr val="D8E0EA"/>
+          </a:solidFill>
+          <a:ln>
+            <a:noFill/>
+          </a:ln>
+        </p:spPr>
+        <p:style>
+          <a:lnRef idx="1">
+            <a:schemeClr val="accent1"/>
+          </a:lnRef>
+          <a:fillRef idx="3">
+            <a:schemeClr val="accent1"/>
+          </a:fillRef>
+          <a:effectRef idx="2">
+            <a:schemeClr val="accent1"/>
+          </a:effectRef>
+          <a:fontRef idx="minor">
+            <a:schemeClr val="lt1"/>
+          </a:fontRef>
+        </p:style>
+        <p:txBody>
+          <a:bodyPr rtlCol="0" anchor="ctr"/>
+          <a:lstStyle/>
+          <a:p>
+            <a:pPr algn="ctr"/>
+          </a:p>
+        </p:txBody>
+      </p:sp>
+      <p:sp>
+        <p:nvSpPr>
+          <p:cNvPr id="21" name="Rectangle 20"/>
+          <p:cNvSpPr/>
+          <p:nvPr/>
+        </p:nvSpPr>
+        <p:spPr>
+          <a:xfrm>
+            <a:off x="502920" y="6492240"/>
+            <a:ext cx="6858000" cy="228600"/>
+          </a:xfrm>
+          <a:prstGeom prst="rect">
+            <a:avLst/>
+          </a:prstGeom>
+          <a:noFill/>
+          <a:ln>
+            <a:noFill/>
+          </a:ln>
+        </p:spPr>
+        <p:style>
+          <a:lnRef idx="1">
+            <a:schemeClr val="accent1"/>
+          </a:lnRef>
+          <a:fillRef idx="3">
+            <a:schemeClr val="accent1"/>
+          </a:fillRef>
+          <a:effectRef idx="2">
+            <a:schemeClr val="accent1"/>
+          </a:effectRef>
+          <a:fontRef idx="minor">
+            <a:schemeClr val="lt1"/>
+          </a:fontRef>
+        </p:style>
+        <p:txBody>
+          <a:bodyPr rtlCol="0" anchor="ctr" wrap="square"/>
+          <a:lstStyle/>
+          <a:p>
+            <a:pPr algn="l"/>
+            <a:r>
+              <a:rPr sz="900" b="0">
+                <a:solidFill>
+                  <a:srgbClr val="64748B"/>
+                </a:solidFill>
+                <a:latin typeface="Arial"/>
+              </a:rPr>
+              <a:t>Technijian  |  AFFG IT Compliance Strategy - Revised Proposal Review</a:t>
+            </a:r>
+          </a:p>
+        </p:txBody>
+      </p:sp>
+      <p:sp>
+        <p:nvSpPr>
+          <p:cNvPr id="22" name="Rectangle 21"/>
+          <p:cNvSpPr/>
+          <p:nvPr/>
+        </p:nvSpPr>
+        <p:spPr>
+          <a:xfrm>
+            <a:off x="11155680" y="6473952"/>
+            <a:ext cx="548640" cy="228600"/>
+          </a:xfrm>
+          <a:prstGeom prst="rect">
+            <a:avLst/>
+          </a:prstGeom>
+          <a:noFill/>
+          <a:ln>
+            <a:noFill/>
+          </a:ln>
+        </p:spPr>
+        <p:style>
+          <a:lnRef idx="1">
+            <a:schemeClr val="accent1"/>
+          </a:lnRef>
+          <a:fillRef idx="3">
+            <a:schemeClr val="accent1"/>
+          </a:fillRef>
+          <a:effectRef idx="2">
+            <a:schemeClr val="accent1"/>
+          </a:effectRef>
+          <a:fontRef idx="minor">
+            <a:schemeClr val="lt1"/>
+          </a:fontRef>
+        </p:style>
+        <p:txBody>
+          <a:bodyPr rtlCol="0" anchor="ctr" wrap="square"/>
+          <a:lstStyle/>
+          <a:p>
+            <a:pPr algn="r"/>
+            <a:r>
+              <a:rPr sz="1000" b="1">
+                <a:solidFill>
+                  <a:srgbClr val="006DB6"/>
+                </a:solidFill>
+                <a:latin typeface="Arial"/>
+              </a:rPr>
+              <a:t>8</a:t>
+            </a:r>
+          </a:p>
+        </p:txBody>
+      </p:sp>
+      <p:sp>
+        <p:nvSpPr>
+          <p:cNvPr id="23" name="Rectangle 22"/>
+          <p:cNvSpPr/>
+          <p:nvPr/>
+        </p:nvSpPr>
+        <p:spPr>
+          <a:xfrm>
+            <a:off x="502920" y="2103120"/>
+            <a:ext cx="2651760" cy="3977640"/>
+          </a:xfrm>
+          <a:prstGeom prst="rect">
+            <a:avLst/>
+          </a:prstGeom>
+          <a:solidFill>
+            <a:srgbClr val="EAF4FB"/>
+          </a:solidFill>
+          <a:ln>
+            <a:noFill/>
+          </a:ln>
+        </p:spPr>
+        <p:style>
+          <a:lnRef idx="1">
+            <a:schemeClr val="accent1"/>
+          </a:lnRef>
+          <a:fillRef idx="3">
+            <a:schemeClr val="accent1"/>
+          </a:fillRef>
+          <a:effectRef idx="2">
+            <a:schemeClr val="accent1"/>
+          </a:effectRef>
+          <a:fontRef idx="minor">
+            <a:schemeClr val="lt1"/>
+          </a:fontRef>
+        </p:style>
+        <p:txBody>
+          <a:bodyPr rtlCol="0" anchor="ctr"/>
+          <a:lstStyle/>
+          <a:p>
+            <a:pPr algn="ctr"/>
+          </a:p>
+        </p:txBody>
+      </p:sp>
+      <p:sp>
+        <p:nvSpPr>
+          <p:cNvPr id="24" name="Rectangle 23"/>
+          <p:cNvSpPr/>
+          <p:nvPr/>
+        </p:nvSpPr>
+        <p:spPr>
+          <a:xfrm>
+            <a:off x="502920" y="2103120"/>
+            <a:ext cx="2651760" cy="91440"/>
+          </a:xfrm>
+          <a:prstGeom prst="rect">
+            <a:avLst/>
+          </a:prstGeom>
+          <a:solidFill>
+            <a:srgbClr val="006DB6"/>
+          </a:solidFill>
+          <a:ln>
+            <a:noFill/>
+          </a:ln>
+        </p:spPr>
+        <p:style>
+          <a:lnRef idx="1">
+            <a:schemeClr val="accent1"/>
+          </a:lnRef>
+          <a:fillRef idx="3">
+            <a:schemeClr val="accent1"/>
+          </a:fillRef>
+          <a:effectRef idx="2">
+            <a:schemeClr val="accent1"/>
+          </a:effectRef>
+          <a:fontRef idx="minor">
+            <a:schemeClr val="lt1"/>
+          </a:fontRef>
+        </p:style>
+        <p:txBody>
+          <a:bodyPr rtlCol="0" anchor="ctr"/>
+          <a:lstStyle/>
+          <a:p>
+            <a:pPr algn="ctr"/>
+          </a:p>
+        </p:txBody>
+      </p:sp>
+      <p:sp>
+        <p:nvSpPr>
+          <p:cNvPr id="25" name="Rectangle 24"/>
+          <p:cNvSpPr/>
+          <p:nvPr/>
+        </p:nvSpPr>
+        <p:spPr>
+          <a:xfrm>
+            <a:off x="667512" y="2286000"/>
+            <a:ext cx="2322576" cy="201168"/>
+          </a:xfrm>
+          <a:prstGeom prst="rect">
+            <a:avLst/>
+          </a:prstGeom>
+          <a:noFill/>
+          <a:ln>
+            <a:noFill/>
+          </a:ln>
+        </p:spPr>
+        <p:style>
+          <a:lnRef idx="1">
+            <a:schemeClr val="accent1"/>
+          </a:lnRef>
+          <a:fillRef idx="3">
+            <a:schemeClr val="accent1"/>
+          </a:fillRef>
+          <a:effectRef idx="2">
+            <a:schemeClr val="accent1"/>
+          </a:effectRef>
+          <a:fontRef idx="minor">
+            <a:schemeClr val="lt1"/>
+          </a:fontRef>
+        </p:style>
+        <p:txBody>
+          <a:bodyPr rtlCol="0" anchor="ctr" wrap="square"/>
+          <a:lstStyle/>
+          <a:p>
+            <a:pPr algn="l"/>
+            <a:r>
+              <a:rPr sz="900" b="1">
+                <a:solidFill>
+                  <a:srgbClr val="006DB6"/>
+                </a:solidFill>
+                <a:latin typeface="Arial"/>
+              </a:rPr>
+              <a:t>INTUNE MDM ENROLLMENT</a:t>
+            </a:r>
+          </a:p>
+        </p:txBody>
+      </p:sp>
+      <p:sp>
+        <p:nvSpPr>
+          <p:cNvPr id="26" name="Rectangle 25"/>
+          <p:cNvSpPr/>
+          <p:nvPr/>
+        </p:nvSpPr>
+        <p:spPr>
+          <a:xfrm>
+            <a:off x="667512" y="2505456"/>
+            <a:ext cx="2322576" cy="384048"/>
+          </a:xfrm>
+          <a:prstGeom prst="rect">
+            <a:avLst/>
+          </a:prstGeom>
+          <a:noFill/>
+          <a:ln>
+            <a:noFill/>
+          </a:ln>
+        </p:spPr>
+        <p:style>
+          <a:lnRef idx="1">
+            <a:schemeClr val="accent1"/>
+          </a:lnRef>
+          <a:fillRef idx="3">
+            <a:schemeClr val="accent1"/>
+          </a:fillRef>
+          <a:effectRef idx="2">
+            <a:schemeClr val="accent1"/>
+          </a:effectRef>
+          <a:fontRef idx="minor">
+            <a:schemeClr val="lt1"/>
+          </a:fontRef>
+        </p:style>
+        <p:txBody>
+          <a:bodyPr rtlCol="0" anchor="ctr" wrap="square"/>
+          <a:lstStyle/>
+          <a:p>
+            <a:pPr algn="l"/>
+            <a:r>
+              <a:rPr sz="1400" b="1">
+                <a:solidFill>
+                  <a:srgbClr val="1A1A2E"/>
+                </a:solidFill>
+                <a:latin typeface="Arial"/>
+              </a:rPr>
+              <a:t>Device Must Enroll Before M365 Activates</a:t>
+            </a:r>
+          </a:p>
+        </p:txBody>
+      </p:sp>
+      <p:sp>
+        <p:nvSpPr>
+          <p:cNvPr id="27" name="Rectangle 26"/>
+          <p:cNvSpPr/>
+          <p:nvPr/>
+        </p:nvSpPr>
+        <p:spPr>
+          <a:xfrm>
+            <a:off x="667512" y="2889504"/>
+            <a:ext cx="2322576" cy="2600000"/>
+          </a:xfrm>
+          <a:prstGeom prst="rect">
+            <a:avLst/>
+          </a:prstGeom>
+          <a:noFill/>
+          <a:ln>
+            <a:noFill/>
+          </a:ln>
+        </p:spPr>
+        <p:style>
+          <a:lnRef idx="1">
+            <a:schemeClr val="accent1"/>
+          </a:lnRef>
+          <a:fillRef idx="3">
+            <a:schemeClr val="accent1"/>
+          </a:fillRef>
+          <a:effectRef idx="2">
+            <a:schemeClr val="accent1"/>
+          </a:effectRef>
+          <a:fontRef idx="minor">
+            <a:schemeClr val="lt1"/>
+          </a:fontRef>
+        </p:style>
+        <p:txBody>
+          <a:bodyPr rtlCol="0" anchor="ctr" wrap="square"/>
+          <a:lstStyle/>
+          <a:p>
+            <a:pPr algn="ctr">
+              <a:spcBef>
+                <a:spcPts val="200"/>
+              </a:spcBef>
+              <a:spcAft>
+                <a:spcPts val="200"/>
+              </a:spcAft>
+            </a:pPr>
+            <a:r>
+              <a:rPr sz="950" b="0">
+                <a:solidFill>
+                  <a:srgbClr val="334155"/>
+                </a:solidFill>
+                <a:latin typeface="Arial"/>
+              </a:rPr>
+              <a:t>Every corporate phone must enroll in Microsoft Intune before Outlook, OneDrive, or Teams will activate.</a:t>
+            </a:r>
+          </a:p>
+          <a:p>
+            <a:pPr>
+              <a:spcBef>
+                <a:spcPts val="200"/>
+              </a:spcBef>
+              <a:spcAft>
+                <a:spcPts val="200"/>
+              </a:spcAft>
+            </a:pPr>
+            <a:r>
+              <a:rPr sz="950" b="0">
+                <a:solidFill>
+                  <a:srgbClr val="334155"/>
+                </a:solidFill>
+                <a:latin typeface="Arial"/>
+              </a:rPr>
+              <a:t>Enrollment enforces: device encryption, PIN/biometric lock, OS version minimum, jailbreak/root detection.</a:t>
+            </a:r>
+          </a:p>
+          <a:p>
+            <a:pPr>
+              <a:spcBef>
+                <a:spcPts val="200"/>
+              </a:spcBef>
+              <a:spcAft>
+                <a:spcPts val="200"/>
+              </a:spcAft>
+            </a:pPr>
+            <a:r>
+              <a:rPr sz="950" b="0">
+                <a:solidFill>
+                  <a:srgbClr val="334155"/>
+                </a:solidFill>
+                <a:latin typeface="Arial"/>
+              </a:rPr>
+              <a:t>Unenrolled personal phones are blocked from M365 apps entirely - no "shadow access" path exists.</a:t>
+            </a:r>
+          </a:p>
+          <a:p>
+            <a:pPr>
+              <a:spcBef>
+                <a:spcPts val="200"/>
+              </a:spcBef>
+              <a:spcAft>
+                <a:spcPts val="200"/>
+              </a:spcAft>
+            </a:pPr>
+            <a:r>
+              <a:rPr sz="950" b="0">
+                <a:solidFill>
+                  <a:srgbClr val="334155"/>
+                </a:solidFill>
+                <a:latin typeface="Arial"/>
+              </a:rPr>
+              <a:t>Intune is included in the existing M365 E3 license. No additional cost.</a:t>
+            </a:r>
+          </a:p>
+        </p:txBody>
+      </p:sp>
+      <p:sp>
+        <p:nvSpPr>
+          <p:cNvPr id="28" name="Rectangle 27"/>
+          <p:cNvSpPr/>
+          <p:nvPr/>
+        </p:nvSpPr>
+        <p:spPr>
+          <a:xfrm>
+            <a:off x="667512" y="5733120"/>
+            <a:ext cx="2322576" cy="256032"/>
+          </a:xfrm>
+          <a:prstGeom prst="rect">
+            <a:avLst/>
+          </a:prstGeom>
+          <a:noFill/>
+          <a:ln>
+            <a:noFill/>
+          </a:ln>
+        </p:spPr>
+        <p:style>
+          <a:lnRef idx="1">
+            <a:schemeClr val="accent1"/>
+          </a:lnRef>
+          <a:fillRef idx="3">
+            <a:schemeClr val="accent1"/>
+          </a:fillRef>
+          <a:effectRef idx="2">
+            <a:schemeClr val="accent1"/>
+          </a:effectRef>
+          <a:fontRef idx="minor">
+            <a:schemeClr val="lt1"/>
+          </a:fontRef>
+        </p:style>
+        <p:txBody>
+          <a:bodyPr rtlCol="0" anchor="ctr" wrap="square"/>
+          <a:lstStyle/>
+          <a:p>
+            <a:pPr algn="l"/>
+            <a:r>
+              <a:rPr sz="900" b="1">
+                <a:solidFill>
+                  <a:srgbClr val="006DB6"/>
+                </a:solidFill>
+                <a:latin typeface="Arial"/>
+              </a:rPr>
+              <a:t>Reg S-P §248.30(a)(1)-(3); NIST AC-19, MP-5</a:t>
+            </a:r>
+          </a:p>
+        </p:txBody>
+      </p:sp>
+      <p:sp>
+        <p:nvSpPr>
+          <p:cNvPr id="29" name="Rectangle 28"/>
+          <p:cNvSpPr/>
+          <p:nvPr/>
+        </p:nvSpPr>
+        <p:spPr>
+          <a:xfrm>
+            <a:off x="3319272" y="2103120"/>
+            <a:ext cx="2651760" cy="3977640"/>
+          </a:xfrm>
+          <a:prstGeom prst="rect">
+            <a:avLst/>
+          </a:prstGeom>
+          <a:solidFill>
+            <a:srgbClr val="E8F8FB"/>
+          </a:solidFill>
+          <a:ln>
+            <a:noFill/>
+          </a:ln>
+        </p:spPr>
+        <p:style>
+          <a:lnRef idx="1">
+            <a:schemeClr val="accent1"/>
+          </a:lnRef>
+          <a:fillRef idx="3">
+            <a:schemeClr val="accent1"/>
+          </a:fillRef>
+          <a:effectRef idx="2">
+            <a:schemeClr val="accent1"/>
+          </a:effectRef>
+          <a:fontRef idx="minor">
+            <a:schemeClr val="lt1"/>
+          </a:fontRef>
+        </p:style>
+        <p:txBody>
+          <a:bodyPr rtlCol="0" anchor="ctr"/>
+          <a:lstStyle/>
+          <a:p>
+            <a:pPr algn="ctr"/>
+          </a:p>
+        </p:txBody>
+      </p:sp>
+      <p:sp>
+        <p:nvSpPr>
+          <p:cNvPr id="30" name="Rectangle 29"/>
+          <p:cNvSpPr/>
+          <p:nvPr/>
+        </p:nvSpPr>
+        <p:spPr>
+          <a:xfrm>
+            <a:off x="3319272" y="2103120"/>
+            <a:ext cx="2651760" cy="91440"/>
+          </a:xfrm>
+          <a:prstGeom prst="rect">
+            <a:avLst/>
+          </a:prstGeom>
+          <a:solidFill>
+            <a:srgbClr val="1EAAC8"/>
+          </a:solidFill>
+          <a:ln>
+            <a:noFill/>
+          </a:ln>
+        </p:spPr>
+        <p:style>
+          <a:lnRef idx="1">
+            <a:schemeClr val="accent1"/>
+          </a:lnRef>
+          <a:fillRef idx="3">
+            <a:schemeClr val="accent1"/>
+          </a:fillRef>
+          <a:effectRef idx="2">
+            <a:schemeClr val="accent1"/>
+          </a:effectRef>
+          <a:fontRef idx="minor">
+            <a:schemeClr val="lt1"/>
+          </a:fontRef>
+        </p:style>
+        <p:txBody>
+          <a:bodyPr rtlCol="0" anchor="ctr"/>
+          <a:lstStyle/>
+          <a:p>
+            <a:pPr algn="ctr"/>
+          </a:p>
+        </p:txBody>
+      </p:sp>
+      <p:sp>
+        <p:nvSpPr>
+          <p:cNvPr id="31" name="Rectangle 30"/>
+          <p:cNvSpPr/>
+          <p:nvPr/>
+        </p:nvSpPr>
+        <p:spPr>
+          <a:xfrm>
+            <a:off x="3483864" y="2286000"/>
+            <a:ext cx="2322576" cy="201168"/>
+          </a:xfrm>
+          <a:prstGeom prst="rect">
+            <a:avLst/>
+          </a:prstGeom>
+          <a:noFill/>
+          <a:ln>
+            <a:noFill/>
+          </a:ln>
+        </p:spPr>
+        <p:style>
+          <a:lnRef idx="1">
+            <a:schemeClr val="accent1"/>
+          </a:lnRef>
+          <a:fillRef idx="3">
+            <a:schemeClr val="accent1"/>
+          </a:fillRef>
+          <a:effectRef idx="2">
+            <a:schemeClr val="accent1"/>
+          </a:effectRef>
+          <a:fontRef idx="minor">
+            <a:schemeClr val="lt1"/>
+          </a:fontRef>
+        </p:style>
+        <p:txBody>
+          <a:bodyPr rtlCol="0" anchor="ctr" wrap="square"/>
+          <a:lstStyle/>
+          <a:p>
+            <a:pPr algn="l"/>
+            <a:r>
+              <a:rPr sz="900" b="1">
+                <a:solidFill>
+                  <a:srgbClr val="1EAAC8"/>
+                </a:solidFill>
+                <a:latin typeface="Arial"/>
+              </a:rPr>
+              <a:t>APP PROTECTION (MAM)</a:t>
+            </a:r>
+          </a:p>
+        </p:txBody>
+      </p:sp>
+      <p:sp>
+        <p:nvSpPr>
+          <p:cNvPr id="32" name="Rectangle 31"/>
+          <p:cNvSpPr/>
+          <p:nvPr/>
+        </p:nvSpPr>
+        <p:spPr>
+          <a:xfrm>
+            <a:off x="3483864" y="2505456"/>
+            <a:ext cx="2322576" cy="384048"/>
+          </a:xfrm>
+          <a:prstGeom prst="rect">
+            <a:avLst/>
+          </a:prstGeom>
+          <a:noFill/>
+          <a:ln>
+            <a:noFill/>
+          </a:ln>
+        </p:spPr>
+        <p:style>
+          <a:lnRef idx="1">
+            <a:schemeClr val="accent1"/>
+          </a:lnRef>
+          <a:fillRef idx="3">
+            <a:schemeClr val="accent1"/>
+          </a:fillRef>
+          <a:effectRef idx="2">
+            <a:schemeClr val="accent1"/>
+          </a:effectRef>
+          <a:fontRef idx="minor">
+            <a:schemeClr val="lt1"/>
+          </a:fontRef>
+        </p:style>
+        <p:txBody>
+          <a:bodyPr rtlCol="0" anchor="ctr" wrap="square"/>
+          <a:lstStyle/>
+          <a:p>
+            <a:pPr algn="l"/>
+            <a:r>
+              <a:rPr sz="1400" b="1">
+                <a:solidFill>
+                  <a:srgbClr val="1A1A2E"/>
+                </a:solidFill>
+                <a:latin typeface="Arial"/>
+              </a:rPr>
+              <a:t>Corporate Data Stays In A Managed Container</a:t>
+            </a:r>
+          </a:p>
+        </p:txBody>
+      </p:sp>
+      <p:sp>
+        <p:nvSpPr>
+          <p:cNvPr id="33" name="Rectangle 32"/>
+          <p:cNvSpPr/>
+          <p:nvPr/>
+        </p:nvSpPr>
+        <p:spPr>
+          <a:xfrm>
+            <a:off x="3483864" y="2889504"/>
+            <a:ext cx="2322576" cy="2600000"/>
+          </a:xfrm>
+          <a:prstGeom prst="rect">
+            <a:avLst/>
+          </a:prstGeom>
+          <a:noFill/>
+          <a:ln>
+            <a:noFill/>
+          </a:ln>
+        </p:spPr>
+        <p:style>
+          <a:lnRef idx="1">
+            <a:schemeClr val="accent1"/>
+          </a:lnRef>
+          <a:fillRef idx="3">
+            <a:schemeClr val="accent1"/>
+          </a:fillRef>
+          <a:effectRef idx="2">
+            <a:schemeClr val="accent1"/>
+          </a:effectRef>
+          <a:fontRef idx="minor">
+            <a:schemeClr val="lt1"/>
+          </a:fontRef>
+        </p:style>
+        <p:txBody>
+          <a:bodyPr rtlCol="0" anchor="ctr" wrap="square"/>
+          <a:lstStyle/>
+          <a:p>
+            <a:pPr algn="ctr">
+              <a:spcBef>
+                <a:spcPts val="200"/>
+              </a:spcBef>
+              <a:spcAft>
+                <a:spcPts val="200"/>
+              </a:spcAft>
+            </a:pPr>
+            <a:r>
+              <a:rPr sz="950" b="0">
+                <a:solidFill>
+                  <a:srgbClr val="334155"/>
+                </a:solidFill>
+                <a:latin typeface="Arial"/>
+              </a:rPr>
+              <a:t>Intune App Protection Policies create a managed container around Outlook, OneDrive, and Teams on the phone.</a:t>
+            </a:r>
+          </a:p>
+          <a:p>
+            <a:pPr>
+              <a:spcBef>
+                <a:spcPts val="200"/>
+              </a:spcBef>
+              <a:spcAft>
+                <a:spcPts val="200"/>
+              </a:spcAft>
+            </a:pPr>
+            <a:r>
+              <a:rPr sz="950" b="0">
+                <a:solidFill>
+                  <a:srgbClr val="334155"/>
+                </a:solidFill>
+                <a:latin typeface="Arial"/>
+              </a:rPr>
+              <a:t>Blocked: copy/paste to personal apps, save-as to personal storage, screenshots of corporate content, backup to personal iCloud/Google.</a:t>
+            </a:r>
+          </a:p>
+          <a:p>
+            <a:pPr>
+              <a:spcBef>
+                <a:spcPts val="200"/>
+              </a:spcBef>
+              <a:spcAft>
+                <a:spcPts val="200"/>
+              </a:spcAft>
+            </a:pPr>
+            <a:r>
+              <a:rPr sz="950" b="0">
+                <a:solidFill>
+                  <a:srgbClr val="334155"/>
+                </a:solidFill>
+                <a:latin typeface="Arial"/>
+              </a:rPr>
+              <a:t>Corporate email attachments open only in managed apps - cannot leak to personal WhatsApp, iMessage, or file manager.</a:t>
+            </a:r>
+          </a:p>
+          <a:p>
+            <a:pPr>
+              <a:spcBef>
+                <a:spcPts val="200"/>
+              </a:spcBef>
+              <a:spcAft>
+                <a:spcPts val="200"/>
+              </a:spcAft>
+            </a:pPr>
+            <a:r>
+              <a:rPr sz="950" b="0">
+                <a:solidFill>
+                  <a:srgbClr val="334155"/>
+                </a:solidFill>
+                <a:latin typeface="Arial"/>
+              </a:rPr>
+              <a:t>Data-in-transit and data-at-rest encrypted within the container independently of phone-level encryption.</a:t>
+            </a:r>
+          </a:p>
+        </p:txBody>
+      </p:sp>
+      <p:sp>
+        <p:nvSpPr>
+          <p:cNvPr id="34" name="Rectangle 33"/>
+          <p:cNvSpPr/>
+          <p:nvPr/>
+        </p:nvSpPr>
+        <p:spPr>
+          <a:xfrm>
+            <a:off x="3483864" y="5733120"/>
+            <a:ext cx="2322576" cy="256032"/>
+          </a:xfrm>
+          <a:prstGeom prst="rect">
+            <a:avLst/>
+          </a:prstGeom>
+          <a:noFill/>
+          <a:ln>
+            <a:noFill/>
+          </a:ln>
+        </p:spPr>
+        <p:style>
+          <a:lnRef idx="1">
+            <a:schemeClr val="accent1"/>
+          </a:lnRef>
+          <a:fillRef idx="3">
+            <a:schemeClr val="accent1"/>
+          </a:fillRef>
+          <a:effectRef idx="2">
+            <a:schemeClr val="accent1"/>
+          </a:effectRef>
+          <a:fontRef idx="minor">
+            <a:schemeClr val="lt1"/>
+          </a:fontRef>
+        </p:style>
+        <p:txBody>
+          <a:bodyPr rtlCol="0" anchor="ctr" wrap="square"/>
+          <a:lstStyle/>
+          <a:p>
+            <a:pPr algn="l"/>
+            <a:r>
+              <a:rPr sz="900" b="1">
+                <a:solidFill>
+                  <a:srgbClr val="1EAAC8"/>
+                </a:solidFill>
+                <a:latin typeface="Arial"/>
+              </a:rPr>
+              <a:t>Reg S-P §248.30(a)(3); NIST AC-19, MP-7, SC-8</a:t>
+            </a:r>
+          </a:p>
+        </p:txBody>
+      </p:sp>
+      <p:sp>
+        <p:nvSpPr>
+          <p:cNvPr id="35" name="Rectangle 34"/>
+          <p:cNvSpPr/>
+          <p:nvPr/>
+        </p:nvSpPr>
+        <p:spPr>
+          <a:xfrm>
+            <a:off x="6135624" y="2103120"/>
+            <a:ext cx="2651760" cy="3977640"/>
+          </a:xfrm>
+          <a:prstGeom prst="rect">
+            <a:avLst/>
+          </a:prstGeom>
+          <a:solidFill>
+            <a:srgbClr val="FFF1EA"/>
+          </a:solidFill>
+          <a:ln>
+            <a:noFill/>
+          </a:ln>
+        </p:spPr>
+        <p:style>
+          <a:lnRef idx="1">
+            <a:schemeClr val="accent1"/>
+          </a:lnRef>
+          <a:fillRef idx="3">
+            <a:schemeClr val="accent1"/>
+          </a:fillRef>
+          <a:effectRef idx="2">
+            <a:schemeClr val="accent1"/>
+          </a:effectRef>
+          <a:fontRef idx="minor">
+            <a:schemeClr val="lt1"/>
+          </a:fontRef>
+        </p:style>
+        <p:txBody>
+          <a:bodyPr rtlCol="0" anchor="ctr"/>
+          <a:lstStyle/>
+          <a:p>
+            <a:pPr algn="ctr"/>
+          </a:p>
+        </p:txBody>
+      </p:sp>
+      <p:sp>
+        <p:nvSpPr>
+          <p:cNvPr id="36" name="Rectangle 35"/>
+          <p:cNvSpPr/>
+          <p:nvPr/>
+        </p:nvSpPr>
+        <p:spPr>
+          <a:xfrm>
+            <a:off x="6135624" y="2103120"/>
+            <a:ext cx="2651760" cy="91440"/>
+          </a:xfrm>
+          <a:prstGeom prst="rect">
+            <a:avLst/>
+          </a:prstGeom>
+          <a:solidFill>
+            <a:srgbClr val="F67D4B"/>
+          </a:solidFill>
+          <a:ln>
+            <a:noFill/>
+          </a:ln>
+        </p:spPr>
+        <p:style>
+          <a:lnRef idx="1">
+            <a:schemeClr val="accent1"/>
+          </a:lnRef>
+          <a:fillRef idx="3">
+            <a:schemeClr val="accent1"/>
+          </a:fillRef>
+          <a:effectRef idx="2">
+            <a:schemeClr val="accent1"/>
+          </a:effectRef>
+          <a:fontRef idx="minor">
+            <a:schemeClr val="lt1"/>
+          </a:fontRef>
+        </p:style>
+        <p:txBody>
+          <a:bodyPr rtlCol="0" anchor="ctr"/>
+          <a:lstStyle/>
+          <a:p>
+            <a:pPr algn="ctr"/>
+          </a:p>
+        </p:txBody>
+      </p:sp>
+      <p:sp>
+        <p:nvSpPr>
+          <p:cNvPr id="37" name="Rectangle 36"/>
+          <p:cNvSpPr/>
+          <p:nvPr/>
+        </p:nvSpPr>
+        <p:spPr>
+          <a:xfrm>
+            <a:off x="6300216" y="2286000"/>
+            <a:ext cx="2322576" cy="201168"/>
+          </a:xfrm>
+          <a:prstGeom prst="rect">
+            <a:avLst/>
+          </a:prstGeom>
+          <a:noFill/>
+          <a:ln>
+            <a:noFill/>
+          </a:ln>
+        </p:spPr>
+        <p:style>
+          <a:lnRef idx="1">
+            <a:schemeClr val="accent1"/>
+          </a:lnRef>
+          <a:fillRef idx="3">
+            <a:schemeClr val="accent1"/>
+          </a:fillRef>
+          <a:effectRef idx="2">
+            <a:schemeClr val="accent1"/>
+          </a:effectRef>
+          <a:fontRef idx="minor">
+            <a:schemeClr val="lt1"/>
+          </a:fontRef>
+        </p:style>
+        <p:txBody>
+          <a:bodyPr rtlCol="0" anchor="ctr" wrap="square"/>
+          <a:lstStyle/>
+          <a:p>
+            <a:pPr algn="l"/>
+            <a:r>
+              <a:rPr sz="900" b="1">
+                <a:solidFill>
+                  <a:srgbClr val="F67D4B"/>
+                </a:solidFill>
+                <a:latin typeface="Arial"/>
+              </a:rPr>
+              <a:t>REMOTE WIPE</a:t>
+            </a:r>
+          </a:p>
+        </p:txBody>
+      </p:sp>
+      <p:sp>
+        <p:nvSpPr>
+          <p:cNvPr id="38" name="Rectangle 37"/>
+          <p:cNvSpPr/>
+          <p:nvPr/>
+        </p:nvSpPr>
+        <p:spPr>
+          <a:xfrm>
+            <a:off x="6300216" y="2505456"/>
+            <a:ext cx="2322576" cy="384048"/>
+          </a:xfrm>
+          <a:prstGeom prst="rect">
+            <a:avLst/>
+          </a:prstGeom>
+          <a:noFill/>
+          <a:ln>
+            <a:noFill/>
+          </a:ln>
+        </p:spPr>
+        <p:style>
+          <a:lnRef idx="1">
+            <a:schemeClr val="accent1"/>
+          </a:lnRef>
+          <a:fillRef idx="3">
+            <a:schemeClr val="accent1"/>
+          </a:fillRef>
+          <a:effectRef idx="2">
+            <a:schemeClr val="accent1"/>
+          </a:effectRef>
+          <a:fontRef idx="minor">
+            <a:schemeClr val="lt1"/>
+          </a:fontRef>
+        </p:style>
+        <p:txBody>
+          <a:bodyPr rtlCol="0" anchor="ctr" wrap="square"/>
+          <a:lstStyle/>
+          <a:p>
+            <a:pPr algn="l"/>
+            <a:r>
+              <a:rPr sz="1400" b="1">
+                <a:solidFill>
+                  <a:srgbClr val="1A1A2E"/>
+                </a:solidFill>
+                <a:latin typeface="Arial"/>
+              </a:rPr>
+              <a:t>Lost, Stolen, Or Terminated — Data Gone In Minutes</a:t>
+            </a:r>
+          </a:p>
+        </p:txBody>
+      </p:sp>
+      <p:sp>
+        <p:nvSpPr>
+          <p:cNvPr id="39" name="Rectangle 38"/>
+          <p:cNvSpPr/>
+          <p:nvPr/>
+        </p:nvSpPr>
+        <p:spPr>
+          <a:xfrm>
+            <a:off x="6300216" y="2889504"/>
+            <a:ext cx="2322576" cy="2600000"/>
+          </a:xfrm>
+          <a:prstGeom prst="rect">
+            <a:avLst/>
+          </a:prstGeom>
+          <a:noFill/>
+          <a:ln>
+            <a:noFill/>
+          </a:ln>
+        </p:spPr>
+        <p:style>
+          <a:lnRef idx="1">
+            <a:schemeClr val="accent1"/>
+          </a:lnRef>
+          <a:fillRef idx="3">
+            <a:schemeClr val="accent1"/>
+          </a:fillRef>
+          <a:effectRef idx="2">
+            <a:schemeClr val="accent1"/>
+          </a:effectRef>
+          <a:fontRef idx="minor">
+            <a:schemeClr val="lt1"/>
+          </a:fontRef>
+        </p:style>
+        <p:txBody>
+          <a:bodyPr rtlCol="0" anchor="ctr" wrap="square"/>
+          <a:lstStyle/>
+          <a:p>
+            <a:pPr algn="ctr">
+              <a:spcBef>
+                <a:spcPts val="200"/>
+              </a:spcBef>
+              <a:spcAft>
+                <a:spcPts val="200"/>
+              </a:spcAft>
+            </a:pPr>
+            <a:r>
+              <a:rPr sz="950" b="0">
+                <a:solidFill>
+                  <a:srgbClr val="334155"/>
+                </a:solidFill>
+                <a:latin typeface="Arial"/>
+              </a:rPr>
+              <a:t>Selective wipe: removes only corporate data (M365 apps, email cache, OneDrive files). Personal photos and apps untouched.</a:t>
+            </a:r>
+          </a:p>
+          <a:p>
+            <a:pPr>
+              <a:spcBef>
+                <a:spcPts val="200"/>
+              </a:spcBef>
+              <a:spcAft>
+                <a:spcPts val="200"/>
+              </a:spcAft>
+            </a:pPr>
+            <a:r>
+              <a:rPr sz="950" b="0">
+                <a:solidFill>
+                  <a:srgbClr val="334155"/>
+                </a:solidFill>
+                <a:latin typeface="Arial"/>
+              </a:rPr>
+              <a:t>Full wipe: factory reset available for company-owned devices on termination or confirmed compromise.</a:t>
+            </a:r>
+          </a:p>
+          <a:p>
+            <a:pPr>
+              <a:spcBef>
+                <a:spcPts val="200"/>
+              </a:spcBef>
+              <a:spcAft>
+                <a:spcPts val="200"/>
+              </a:spcAft>
+            </a:pPr>
+            <a:r>
+              <a:rPr sz="950" b="0">
+                <a:solidFill>
+                  <a:srgbClr val="334155"/>
+                </a:solidFill>
+                <a:latin typeface="Arial"/>
+              </a:rPr>
+              <a:t>Automated wipe triggers: jailbreak detected, X days offline, compliance policy violation.</a:t>
+            </a:r>
+          </a:p>
+          <a:p>
+            <a:pPr>
+              <a:spcBef>
+                <a:spcPts val="200"/>
+              </a:spcBef>
+              <a:spcAft>
+                <a:spcPts val="200"/>
+              </a:spcAft>
+            </a:pPr>
+            <a:r>
+              <a:rPr sz="950" b="0">
+                <a:solidFill>
+                  <a:srgbClr val="334155"/>
+                </a:solidFill>
+                <a:latin typeface="Arial"/>
+              </a:rPr>
+              <a:t>Wipe history logged and auditable for examiner evidence.</a:t>
+            </a:r>
+          </a:p>
+        </p:txBody>
+      </p:sp>
+      <p:sp>
+        <p:nvSpPr>
+          <p:cNvPr id="40" name="Rectangle 39"/>
+          <p:cNvSpPr/>
+          <p:nvPr/>
+        </p:nvSpPr>
+        <p:spPr>
+          <a:xfrm>
+            <a:off x="6300216" y="5733120"/>
+            <a:ext cx="2322576" cy="256032"/>
+          </a:xfrm>
+          <a:prstGeom prst="rect">
+            <a:avLst/>
+          </a:prstGeom>
+          <a:noFill/>
+          <a:ln>
+            <a:noFill/>
+          </a:ln>
+        </p:spPr>
+        <p:style>
+          <a:lnRef idx="1">
+            <a:schemeClr val="accent1"/>
+          </a:lnRef>
+          <a:fillRef idx="3">
+            <a:schemeClr val="accent1"/>
+          </a:fillRef>
+          <a:effectRef idx="2">
+            <a:schemeClr val="accent1"/>
+          </a:effectRef>
+          <a:fontRef idx="minor">
+            <a:schemeClr val="lt1"/>
+          </a:fontRef>
+        </p:style>
+        <p:txBody>
+          <a:bodyPr rtlCol="0" anchor="ctr" wrap="square"/>
+          <a:lstStyle/>
+          <a:p>
+            <a:pPr algn="l"/>
+            <a:r>
+              <a:rPr sz="900" b="1">
+                <a:solidFill>
+                  <a:srgbClr val="F67D4B"/>
+                </a:solidFill>
+                <a:latin typeface="Arial"/>
+              </a:rPr>
+              <a:t>Reg S-P §248.30(a); FINRA 3110(a); NIST MP-6</a:t>
+            </a:r>
+          </a:p>
+        </p:txBody>
+      </p:sp>
+      <p:sp>
+        <p:nvSpPr>
+          <p:cNvPr id="41" name="Rectangle 40"/>
+          <p:cNvSpPr/>
+          <p:nvPr/>
+        </p:nvSpPr>
+        <p:spPr>
+          <a:xfrm>
+            <a:off x="8951976" y="2103120"/>
+            <a:ext cx="2651760" cy="3977640"/>
+          </a:xfrm>
+          <a:prstGeom prst="rect">
+            <a:avLst/>
+          </a:prstGeom>
+          <a:solidFill>
+            <a:srgbClr val="EAFBF0"/>
+          </a:solidFill>
+          <a:ln>
+            <a:noFill/>
+          </a:ln>
+        </p:spPr>
+        <p:style>
+          <a:lnRef idx="1">
+            <a:schemeClr val="accent1"/>
+          </a:lnRef>
+          <a:fillRef idx="3">
+            <a:schemeClr val="accent1"/>
+          </a:fillRef>
+          <a:effectRef idx="2">
+            <a:schemeClr val="accent1"/>
+          </a:effectRef>
+          <a:fontRef idx="minor">
+            <a:schemeClr val="lt1"/>
+          </a:fontRef>
+        </p:style>
+        <p:txBody>
+          <a:bodyPr rtlCol="0" anchor="ctr"/>
+          <a:lstStyle/>
+          <a:p>
+            <a:pPr algn="ctr"/>
+          </a:p>
+        </p:txBody>
+      </p:sp>
+      <p:sp>
+        <p:nvSpPr>
+          <p:cNvPr id="42" name="Rectangle 41"/>
+          <p:cNvSpPr/>
+          <p:nvPr/>
+        </p:nvSpPr>
+        <p:spPr>
+          <a:xfrm>
+            <a:off x="8951976" y="2103120"/>
+            <a:ext cx="2651760" cy="91440"/>
+          </a:xfrm>
+          <a:prstGeom prst="rect">
+            <a:avLst/>
+          </a:prstGeom>
+          <a:solidFill>
+            <a:srgbClr val="16A34A"/>
+          </a:solidFill>
+          <a:ln>
+            <a:noFill/>
+          </a:ln>
+        </p:spPr>
+        <p:style>
+          <a:lnRef idx="1">
+            <a:schemeClr val="accent1"/>
+          </a:lnRef>
+          <a:fillRef idx="3">
+            <a:schemeClr val="accent1"/>
+          </a:fillRef>
+          <a:effectRef idx="2">
+            <a:schemeClr val="accent1"/>
+          </a:effectRef>
+          <a:fontRef idx="minor">
+            <a:schemeClr val="lt1"/>
+          </a:fontRef>
+        </p:style>
+        <p:txBody>
+          <a:bodyPr rtlCol="0" anchor="ctr"/>
+          <a:lstStyle/>
+          <a:p>
+            <a:pPr algn="ctr"/>
+          </a:p>
+        </p:txBody>
+      </p:sp>
+      <p:sp>
+        <p:nvSpPr>
+          <p:cNvPr id="43" name="Rectangle 42"/>
+          <p:cNvSpPr/>
+          <p:nvPr/>
+        </p:nvSpPr>
+        <p:spPr>
+          <a:xfrm>
+            <a:off x="9116568" y="2286000"/>
+            <a:ext cx="2322576" cy="201168"/>
+          </a:xfrm>
+          <a:prstGeom prst="rect">
+            <a:avLst/>
+          </a:prstGeom>
+          <a:noFill/>
+          <a:ln>
+            <a:noFill/>
+          </a:ln>
+        </p:spPr>
+        <p:style>
+          <a:lnRef idx="1">
+            <a:schemeClr val="accent1"/>
+          </a:lnRef>
+          <a:fillRef idx="3">
+            <a:schemeClr val="accent1"/>
+          </a:fillRef>
+          <a:effectRef idx="2">
+            <a:schemeClr val="accent1"/>
+          </a:effectRef>
+          <a:fontRef idx="minor">
+            <a:schemeClr val="lt1"/>
+          </a:fontRef>
+        </p:style>
+        <p:txBody>
+          <a:bodyPr rtlCol="0" anchor="ctr" wrap="square"/>
+          <a:lstStyle/>
+          <a:p>
+            <a:pPr algn="l"/>
+            <a:r>
+              <a:rPr sz="900" b="1">
+                <a:solidFill>
+                  <a:srgbClr val="16A34A"/>
+                </a:solidFill>
+                <a:latin typeface="Arial"/>
+              </a:rPr>
+              <a:t>MONTHLY MOBILE AUDIT</a:t>
+            </a:r>
+          </a:p>
+        </p:txBody>
+      </p:sp>
+      <p:sp>
+        <p:nvSpPr>
+          <p:cNvPr id="44" name="Rectangle 43"/>
+          <p:cNvSpPr/>
+          <p:nvPr/>
+        </p:nvSpPr>
+        <p:spPr>
+          <a:xfrm>
+            <a:off x="9116568" y="2505456"/>
+            <a:ext cx="2322576" cy="384048"/>
+          </a:xfrm>
+          <a:prstGeom prst="rect">
+            <a:avLst/>
+          </a:prstGeom>
+          <a:noFill/>
+          <a:ln>
+            <a:noFill/>
+          </a:ln>
+        </p:spPr>
+        <p:style>
+          <a:lnRef idx="1">
+            <a:schemeClr val="accent1"/>
+          </a:lnRef>
+          <a:fillRef idx="3">
+            <a:schemeClr val="accent1"/>
+          </a:fillRef>
+          <a:effectRef idx="2">
+            <a:schemeClr val="accent1"/>
+          </a:effectRef>
+          <a:fontRef idx="minor">
+            <a:schemeClr val="lt1"/>
+          </a:fontRef>
+        </p:style>
+        <p:txBody>
+          <a:bodyPr rtlCol="0" anchor="ctr" wrap="square"/>
+          <a:lstStyle/>
+          <a:p>
+            <a:pPr algn="l"/>
+            <a:r>
+              <a:rPr sz="1400" b="1">
+                <a:solidFill>
+                  <a:srgbClr val="1A1A2E"/>
+                </a:solidFill>
+                <a:latin typeface="Arial"/>
+              </a:rPr>
+              <a:t>Added To Existing Assessment Cadence</a:t>
+            </a:r>
+          </a:p>
+        </p:txBody>
+      </p:sp>
+      <p:sp>
+        <p:nvSpPr>
+          <p:cNvPr id="45" name="Rectangle 44"/>
+          <p:cNvSpPr/>
+          <p:nvPr/>
+        </p:nvSpPr>
+        <p:spPr>
+          <a:xfrm>
+            <a:off x="9116568" y="2889504"/>
+            <a:ext cx="2322576" cy="2600000"/>
+          </a:xfrm>
+          <a:prstGeom prst="rect">
+            <a:avLst/>
+          </a:prstGeom>
+          <a:noFill/>
+          <a:ln>
+            <a:noFill/>
+          </a:ln>
+        </p:spPr>
+        <p:style>
+          <a:lnRef idx="1">
+            <a:schemeClr val="accent1"/>
+          </a:lnRef>
+          <a:fillRef idx="3">
+            <a:schemeClr val="accent1"/>
+          </a:fillRef>
+          <a:effectRef idx="2">
+            <a:schemeClr val="accent1"/>
+          </a:effectRef>
+          <a:fontRef idx="minor">
+            <a:schemeClr val="lt1"/>
+          </a:fontRef>
+        </p:style>
+        <p:txBody>
+          <a:bodyPr rtlCol="0" anchor="ctr" wrap="square"/>
+          <a:lstStyle/>
+          <a:p>
+            <a:pPr algn="ctr">
+              <a:spcBef>
+                <a:spcPts val="200"/>
+              </a:spcBef>
+              <a:spcAft>
+                <a:spcPts val="200"/>
+              </a:spcAft>
+            </a:pPr>
+            <a:r>
+              <a:rPr sz="950" b="0">
+                <a:solidFill>
+                  <a:srgbClr val="334155"/>
+                </a:solidFill>
+                <a:latin typeface="Arial"/>
+              </a:rPr>
+              <a:t>Monthly check added to existing Technijian assessment: enrolled device count vs. headcount, compliance violations, wipe history.</a:t>
+            </a:r>
+          </a:p>
+          <a:p>
+            <a:pPr>
+              <a:spcBef>
+                <a:spcPts val="200"/>
+              </a:spcBef>
+              <a:spcAft>
+                <a:spcPts val="200"/>
+              </a:spcAft>
+            </a:pPr>
+            <a:r>
+              <a:rPr sz="950" b="0">
+                <a:solidFill>
+                  <a:srgbClr val="334155"/>
+                </a:solidFill>
+                <a:latin typeface="Arial"/>
+              </a:rPr>
+              <a:t>Detect: unenrolled devices accessing tenant, expired compliance policies, disabled enrollment requirements.</a:t>
+            </a:r>
+          </a:p>
+          <a:p>
+            <a:pPr>
+              <a:spcBef>
+                <a:spcPts val="200"/>
+              </a:spcBef>
+              <a:spcAft>
+                <a:spcPts val="200"/>
+              </a:spcAft>
+            </a:pPr>
+            <a:r>
+              <a:rPr sz="950" b="0">
+                <a:solidFill>
+                  <a:srgbClr val="334155"/>
+                </a:solidFill>
+                <a:latin typeface="Arial"/>
+              </a:rPr>
+              <a:t>Evidence packet includes mobile device inventory and compliance posture — ready for FINRA 3110(c) inspection.</a:t>
+            </a:r>
+          </a:p>
+          <a:p>
+            <a:pPr>
+              <a:spcBef>
+                <a:spcPts val="200"/>
+              </a:spcBef>
+              <a:spcAft>
+                <a:spcPts val="200"/>
+              </a:spcAft>
+            </a:pPr>
+            <a:r>
+              <a:rPr sz="950" b="0">
+                <a:solidFill>
+                  <a:srgbClr val="334155"/>
+                </a:solidFill>
+                <a:latin typeface="Arial"/>
+              </a:rPr>
+              <a:t>No separate engagement — folds into the existing $50/mo assessment.</a:t>
+            </a:r>
+          </a:p>
+        </p:txBody>
+      </p:sp>
+      <p:sp>
+        <p:nvSpPr>
+          <p:cNvPr id="46" name="Rectangle 45"/>
+          <p:cNvSpPr/>
+          <p:nvPr/>
+        </p:nvSpPr>
+        <p:spPr>
+          <a:xfrm>
+            <a:off x="9116568" y="5733120"/>
+            <a:ext cx="2322576" cy="256032"/>
+          </a:xfrm>
+          <a:prstGeom prst="rect">
+            <a:avLst/>
+          </a:prstGeom>
+          <a:noFill/>
+          <a:ln>
+            <a:noFill/>
+          </a:ln>
+        </p:spPr>
+        <p:style>
+          <a:lnRef idx="1">
+            <a:schemeClr val="accent1"/>
+          </a:lnRef>
+          <a:fillRef idx="3">
+            <a:schemeClr val="accent1"/>
+          </a:fillRef>
+          <a:effectRef idx="2">
+            <a:schemeClr val="accent1"/>
+          </a:effectRef>
+          <a:fontRef idx="minor">
+            <a:schemeClr val="lt1"/>
+          </a:fontRef>
+        </p:style>
+        <p:txBody>
+          <a:bodyPr rtlCol="0" anchor="ctr" wrap="square"/>
+          <a:lstStyle/>
+          <a:p>
+            <a:pPr algn="l"/>
+            <a:r>
+              <a:rPr sz="900" b="1">
+                <a:solidFill>
+                  <a:srgbClr val="16A34A"/>
+                </a:solidFill>
+                <a:latin typeface="Arial"/>
+              </a:rPr>
+              <a:t>FINRA 3110(c); FINRA 3120; Reg S-P annual review</a:t>
+            </a:r>
+          </a:p>
+        </p:txBody>
+      </p:sp>
+    </p:spTree>
+  </p:cSld>
+  <p:clrMapOvr>
+    <a:masterClrMapping/>
+  </p:clrMapOvr>
+</p:sld>
+</file>
+
+<file path=ppt/slides/slide9.xml><?xml version="1.0" encoding="utf-8"?>
 <p:sld xmlns:a="http://schemas.openxmlformats.org/drawingml/2006/main" xmlns:r="http://schemas.openxmlformats.org/officeDocument/2006/relationships" xmlns:p="http://schemas.openxmlformats.org/presentationml/2006/main">
   <p:cSld name="Slide 8">
     <p:bg>
@@ -17747,6 +22928,10 @@
             <a:prstDash val="solid"/>
           </a:ln>
         </p:spPr>
+        <p:txBody>
+          <a:bodyPr/>
+          <a:p/>
+        </p:txBody>
       </p:sp>
       <p:sp>
         <p:nvSpPr>
@@ -17776,6 +22961,10 @@
             <a:prstDash val="solid"/>
           </a:ln>
         </p:spPr>
+        <p:txBody>
+          <a:bodyPr/>
+          <a:p/>
+        </p:txBody>
       </p:sp>
       <p:sp>
         <p:nvSpPr>
@@ -17805,6 +22994,10 @@
             <a:prstDash val="solid"/>
           </a:ln>
         </p:spPr>
+        <p:txBody>
+          <a:bodyPr/>
+          <a:p/>
+        </p:txBody>
       </p:sp>
       <p:sp>
         <p:nvSpPr>
@@ -17834,6 +23027,10 @@
             <a:prstDash val="solid"/>
           </a:ln>
         </p:spPr>
+        <p:txBody>
+          <a:bodyPr/>
+          <a:p/>
+        </p:txBody>
       </p:sp>
       <p:sp>
         <p:nvSpPr>
@@ -17863,6 +23060,10 @@
             <a:prstDash val="solid"/>
           </a:ln>
         </p:spPr>
+        <p:txBody>
+          <a:bodyPr/>
+          <a:p/>
+        </p:txBody>
       </p:sp>
       <p:sp>
         <p:nvSpPr>
@@ -17892,6 +23093,10 @@
             <a:prstDash val="solid"/>
           </a:ln>
         </p:spPr>
+        <p:txBody>
+          <a:bodyPr/>
+          <a:p/>
+        </p:txBody>
       </p:sp>
       <p:sp>
         <p:nvSpPr>
@@ -17921,6 +23126,10 @@
             <a:prstDash val="solid"/>
           </a:ln>
         </p:spPr>
+        <p:txBody>
+          <a:bodyPr/>
+          <a:p/>
+        </p:txBody>
       </p:sp>
       <p:sp>
         <p:nvSpPr>
@@ -17950,6 +23159,10 @@
             <a:prstDash val="solid"/>
           </a:ln>
         </p:spPr>
+        <p:txBody>
+          <a:bodyPr/>
+          <a:p/>
+        </p:txBody>
       </p:sp>
       <p:sp>
         <p:nvSpPr>
@@ -17979,6 +23192,10 @@
             <a:prstDash val="solid"/>
           </a:ln>
         </p:spPr>
+        <p:txBody>
+          <a:bodyPr/>
+          <a:p/>
+        </p:txBody>
       </p:sp>
       <p:sp>
         <p:nvSpPr>
@@ -18008,6 +23225,10 @@
             <a:prstDash val="solid"/>
           </a:ln>
         </p:spPr>
+        <p:txBody>
+          <a:bodyPr/>
+          <a:p/>
+        </p:txBody>
       </p:sp>
       <p:sp>
         <p:nvSpPr>
@@ -18037,6 +23258,10 @@
             <a:prstDash val="solid"/>
           </a:ln>
         </p:spPr>
+        <p:txBody>
+          <a:bodyPr/>
+          <a:p/>
+        </p:txBody>
       </p:sp>
       <p:sp>
         <p:nvSpPr>
@@ -18066,6 +23291,10 @@
             <a:prstDash val="solid"/>
           </a:ln>
         </p:spPr>
+        <p:txBody>
+          <a:bodyPr/>
+          <a:p/>
+        </p:txBody>
       </p:sp>
       <p:sp>
         <p:nvSpPr>
@@ -18095,6 +23324,10 @@
             <a:prstDash val="solid"/>
           </a:ln>
         </p:spPr>
+        <p:txBody>
+          <a:bodyPr/>
+          <a:p/>
+        </p:txBody>
       </p:sp>
       <p:sp>
         <p:nvSpPr>
@@ -18278,6 +23511,10 @@
             <a:prstDash val="solid"/>
           </a:ln>
         </p:spPr>
+        <p:txBody>
+          <a:bodyPr/>
+          <a:p/>
+        </p:txBody>
       </p:sp>
       <p:sp>
         <p:nvSpPr>
@@ -18305,6 +23542,10 @@
             <a:prstDash val="solid"/>
           </a:ln>
         </p:spPr>
+        <p:txBody>
+          <a:bodyPr/>
+          <a:p/>
+        </p:txBody>
       </p:sp>
       <p:sp>
         <p:nvSpPr>
@@ -18378,7 +23619,7 @@
                 <a:ea typeface="Arial" pitchFamily="34" charset="-122"/>
                 <a:cs typeface="Arial" pitchFamily="34" charset="-120"/>
               </a:rPr>
-              <a:t>8</a:t>
+              <a:t>9</a:t>
             </a:r>
             <a:endParaRPr lang="en-US" sz="1000" dirty="0"/>
           </a:p>
@@ -18412,6 +23653,10 @@
             <a:prstDash val="solid"/>
           </a:ln>
         </p:spPr>
+        <p:txBody>
+          <a:bodyPr/>
+          <a:p/>
+        </p:txBody>
       </p:sp>
       <p:sp>
         <p:nvSpPr>
@@ -18554,6 +23799,10 @@
             <a:prstDash val="solid"/>
           </a:ln>
         </p:spPr>
+        <p:txBody>
+          <a:bodyPr/>
+          <a:p/>
+        </p:txBody>
       </p:sp>
       <p:sp>
         <p:nvSpPr>
@@ -18696,6 +23945,10 @@
             <a:prstDash val="solid"/>
           </a:ln>
         </p:spPr>
+        <p:txBody>
+          <a:bodyPr/>
+          <a:p/>
+        </p:txBody>
       </p:sp>
       <p:sp>
         <p:nvSpPr>
@@ -18838,6 +24091,10 @@
             <a:prstDash val="solid"/>
           </a:ln>
         </p:spPr>
+        <p:txBody>
+          <a:bodyPr/>
+          <a:p/>
+        </p:txBody>
       </p:sp>
       <p:sp>
         <p:nvSpPr>
@@ -18980,6 +24237,10 @@
             <a:prstDash val="solid"/>
           </a:ln>
         </p:spPr>
+        <p:txBody>
+          <a:bodyPr/>
+          <a:p/>
+        </p:txBody>
       </p:sp>
       <p:sp>
         <p:nvSpPr>
@@ -19122,6 +24383,10 @@
             <a:prstDash val="solid"/>
           </a:ln>
         </p:spPr>
+        <p:txBody>
+          <a:bodyPr/>
+          <a:p/>
+        </p:txBody>
       </p:sp>
       <p:sp>
         <p:nvSpPr>
@@ -19264,6 +24529,10 @@
             <a:prstDash val="solid"/>
           </a:ln>
         </p:spPr>
+        <p:txBody>
+          <a:bodyPr/>
+          <a:p/>
+        </p:txBody>
       </p:sp>
       <p:sp>
         <p:nvSpPr>
@@ -19406,6 +24675,10 @@
             <a:prstDash val="solid"/>
           </a:ln>
         </p:spPr>
+        <p:txBody>
+          <a:bodyPr/>
+          <a:p/>
+        </p:txBody>
       </p:sp>
       <p:sp>
         <p:nvSpPr>
@@ -19548,6 +24821,10 @@
             <a:prstDash val="solid"/>
           </a:ln>
         </p:spPr>
+        <p:txBody>
+          <a:bodyPr/>
+          <a:p/>
+        </p:txBody>
       </p:sp>
       <p:sp>
         <p:nvSpPr>
@@ -19692,6 +24969,10 @@
             <a:prstDash val="solid"/>
           </a:ln>
         </p:spPr>
+        <p:txBody>
+          <a:bodyPr/>
+          <a:p/>
+        </p:txBody>
       </p:sp>
       <p:sp>
         <p:nvSpPr>
@@ -19729,1310 +25010,6 @@
               <a:t>Citation: Reg S-P §248.30(a)(3) - safeguards to prevent unauthorized access or use  |  NIST SP 800-53 AC-19, MP-7, SC-8</a:t>
             </a:r>
             <a:endParaRPr lang="en-US" sz="1000" dirty="0"/>
-          </a:p>
-        </p:txBody>
-      </p:sp>
-    </p:spTree>
-  </p:cSld>
-  <p:clrMapOvr>
-    <a:masterClrMapping/>
-  </p:clrMapOvr>
-</p:sld>
-</file>
-
-<file path=ppt/slides/slide9.xml><?xml version="1.0" encoding="utf-8"?>
-<p:sld xmlns:a="http://schemas.openxmlformats.org/drawingml/2006/main" xmlns:r="http://schemas.openxmlformats.org/officeDocument/2006/relationships" xmlns:p="http://schemas.openxmlformats.org/presentationml/2006/main">
-  <p:cSld name="Slide 9">
-    <p:bg>
-      <p:bgPr>
-        <a:solidFill>
-          <a:srgbClr val="F8FAFC"/>
-        </a:solidFill>
-      </p:bgPr>
-    </p:bg>
-    <p:spTree>
-      <p:nvGrpSpPr>
-        <p:cNvPr id="1" name=""/>
-        <p:cNvGrpSpPr/>
-        <p:nvPr/>
-      </p:nvGrpSpPr>
-      <p:grpSpPr>
-        <a:xfrm>
-          <a:off x="0" y="0"/>
-          <a:ext cx="0" cy="0"/>
-          <a:chOff x="0" y="0"/>
-          <a:chExt cx="0" cy="0"/>
-        </a:xfrm>
-      </p:grpSpPr>
-      <p:sp>
-        <p:nvSpPr>
-          <p:cNvPr id="2" name="Shape 0"/>
-          <p:cNvSpPr/>
-          <p:nvPr/>
-        </p:nvSpPr>
-        <p:spPr>
-          <a:xfrm>
-            <a:off x="0" y="0"/>
-            <a:ext cx="12188952" cy="164592"/>
-          </a:xfrm>
-          <a:prstGeom prst="rect">
-            <a:avLst/>
-          </a:prstGeom>
-          <a:solidFill>
-            <a:srgbClr val="006DB6"/>
-          </a:solidFill>
-          <a:ln w="12700">
-            <a:solidFill>
-              <a:srgbClr val="006DB6">
-                <a:alpha val="0"/>
-              </a:srgbClr>
-            </a:solidFill>
-            <a:prstDash val="solid"/>
-          </a:ln>
-        </p:spPr>
-      </p:sp>
-      <p:sp>
-        <p:nvSpPr>
-          <p:cNvPr id="3" name="Shape 1"/>
-          <p:cNvSpPr/>
-          <p:nvPr/>
-        </p:nvSpPr>
-        <p:spPr>
-          <a:xfrm>
-            <a:off x="502920" y="320040"/>
-            <a:ext cx="82296" cy="82296"/>
-          </a:xfrm>
-          <a:prstGeom prst="roundRect">
-            <a:avLst>
-              <a:gd name="adj" fmla="val 16667"/>
-            </a:avLst>
-          </a:prstGeom>
-          <a:solidFill>
-            <a:srgbClr val="64748B"/>
-          </a:solidFill>
-          <a:ln w="12700">
-            <a:solidFill>
-              <a:srgbClr val="64748B">
-                <a:alpha val="0"/>
-              </a:srgbClr>
-            </a:solidFill>
-            <a:prstDash val="solid"/>
-          </a:ln>
-        </p:spPr>
-      </p:sp>
-      <p:sp>
-        <p:nvSpPr>
-          <p:cNvPr id="4" name="Shape 2"/>
-          <p:cNvSpPr/>
-          <p:nvPr/>
-        </p:nvSpPr>
-        <p:spPr>
-          <a:xfrm>
-            <a:off x="601675" y="320040"/>
-            <a:ext cx="82296" cy="82296"/>
-          </a:xfrm>
-          <a:prstGeom prst="roundRect">
-            <a:avLst>
-              <a:gd name="adj" fmla="val 16667"/>
-            </a:avLst>
-          </a:prstGeom>
-          <a:solidFill>
-            <a:srgbClr val="006DB6"/>
-          </a:solidFill>
-          <a:ln w="12700">
-            <a:solidFill>
-              <a:srgbClr val="006DB6">
-                <a:alpha val="0"/>
-              </a:srgbClr>
-            </a:solidFill>
-            <a:prstDash val="solid"/>
-          </a:ln>
-        </p:spPr>
-      </p:sp>
-      <p:sp>
-        <p:nvSpPr>
-          <p:cNvPr id="5" name="Shape 3"/>
-          <p:cNvSpPr/>
-          <p:nvPr/>
-        </p:nvSpPr>
-        <p:spPr>
-          <a:xfrm>
-            <a:off x="700430" y="320040"/>
-            <a:ext cx="82296" cy="82296"/>
-          </a:xfrm>
-          <a:prstGeom prst="roundRect">
-            <a:avLst>
-              <a:gd name="adj" fmla="val 16667"/>
-            </a:avLst>
-          </a:prstGeom>
-          <a:solidFill>
-            <a:srgbClr val="F67D4B"/>
-          </a:solidFill>
-          <a:ln w="12700">
-            <a:solidFill>
-              <a:srgbClr val="F67D4B">
-                <a:alpha val="0"/>
-              </a:srgbClr>
-            </a:solidFill>
-            <a:prstDash val="solid"/>
-          </a:ln>
-        </p:spPr>
-      </p:sp>
-      <p:sp>
-        <p:nvSpPr>
-          <p:cNvPr id="6" name="Shape 4"/>
-          <p:cNvSpPr/>
-          <p:nvPr/>
-        </p:nvSpPr>
-        <p:spPr>
-          <a:xfrm>
-            <a:off x="799186" y="320040"/>
-            <a:ext cx="82296" cy="82296"/>
-          </a:xfrm>
-          <a:prstGeom prst="roundRect">
-            <a:avLst>
-              <a:gd name="adj" fmla="val 16667"/>
-            </a:avLst>
-          </a:prstGeom>
-          <a:solidFill>
-            <a:srgbClr val="64748B"/>
-          </a:solidFill>
-          <a:ln w="12700">
-            <a:solidFill>
-              <a:srgbClr val="64748B">
-                <a:alpha val="0"/>
-              </a:srgbClr>
-            </a:solidFill>
-            <a:prstDash val="solid"/>
-          </a:ln>
-        </p:spPr>
-      </p:sp>
-      <p:sp>
-        <p:nvSpPr>
-          <p:cNvPr id="7" name="Shape 5"/>
-          <p:cNvSpPr/>
-          <p:nvPr/>
-        </p:nvSpPr>
-        <p:spPr>
-          <a:xfrm>
-            <a:off x="502920" y="418795"/>
-            <a:ext cx="82296" cy="82296"/>
-          </a:xfrm>
-          <a:prstGeom prst="roundRect">
-            <a:avLst>
-              <a:gd name="adj" fmla="val 16667"/>
-            </a:avLst>
-          </a:prstGeom>
-          <a:solidFill>
-            <a:srgbClr val="64748B"/>
-          </a:solidFill>
-          <a:ln w="12700">
-            <a:solidFill>
-              <a:srgbClr val="64748B">
-                <a:alpha val="0"/>
-              </a:srgbClr>
-            </a:solidFill>
-            <a:prstDash val="solid"/>
-          </a:ln>
-        </p:spPr>
-      </p:sp>
-      <p:sp>
-        <p:nvSpPr>
-          <p:cNvPr id="8" name="Shape 6"/>
-          <p:cNvSpPr/>
-          <p:nvPr/>
-        </p:nvSpPr>
-        <p:spPr>
-          <a:xfrm>
-            <a:off x="601675" y="418795"/>
-            <a:ext cx="82296" cy="82296"/>
-          </a:xfrm>
-          <a:prstGeom prst="roundRect">
-            <a:avLst>
-              <a:gd name="adj" fmla="val 16667"/>
-            </a:avLst>
-          </a:prstGeom>
-          <a:solidFill>
-            <a:srgbClr val="1EAAC8"/>
-          </a:solidFill>
-          <a:ln w="12700">
-            <a:solidFill>
-              <a:srgbClr val="1EAAC8">
-                <a:alpha val="0"/>
-              </a:srgbClr>
-            </a:solidFill>
-            <a:prstDash val="solid"/>
-          </a:ln>
-        </p:spPr>
-      </p:sp>
-      <p:sp>
-        <p:nvSpPr>
-          <p:cNvPr id="9" name="Shape 7"/>
-          <p:cNvSpPr/>
-          <p:nvPr/>
-        </p:nvSpPr>
-        <p:spPr>
-          <a:xfrm>
-            <a:off x="700430" y="418795"/>
-            <a:ext cx="82296" cy="82296"/>
-          </a:xfrm>
-          <a:prstGeom prst="roundRect">
-            <a:avLst>
-              <a:gd name="adj" fmla="val 16667"/>
-            </a:avLst>
-          </a:prstGeom>
-          <a:solidFill>
-            <a:srgbClr val="64748B"/>
-          </a:solidFill>
-          <a:ln w="12700">
-            <a:solidFill>
-              <a:srgbClr val="64748B">
-                <a:alpha val="0"/>
-              </a:srgbClr>
-            </a:solidFill>
-            <a:prstDash val="solid"/>
-          </a:ln>
-        </p:spPr>
-      </p:sp>
-      <p:sp>
-        <p:nvSpPr>
-          <p:cNvPr id="10" name="Shape 8"/>
-          <p:cNvSpPr/>
-          <p:nvPr/>
-        </p:nvSpPr>
-        <p:spPr>
-          <a:xfrm>
-            <a:off x="799186" y="418795"/>
-            <a:ext cx="82296" cy="82296"/>
-          </a:xfrm>
-          <a:prstGeom prst="roundRect">
-            <a:avLst>
-              <a:gd name="adj" fmla="val 16667"/>
-            </a:avLst>
-          </a:prstGeom>
-          <a:solidFill>
-            <a:srgbClr val="1EAAC8"/>
-          </a:solidFill>
-          <a:ln w="12700">
-            <a:solidFill>
-              <a:srgbClr val="1EAAC8">
-                <a:alpha val="0"/>
-              </a:srgbClr>
-            </a:solidFill>
-            <a:prstDash val="solid"/>
-          </a:ln>
-        </p:spPr>
-      </p:sp>
-      <p:sp>
-        <p:nvSpPr>
-          <p:cNvPr id="11" name="Shape 9"/>
-          <p:cNvSpPr/>
-          <p:nvPr/>
-        </p:nvSpPr>
-        <p:spPr>
-          <a:xfrm>
-            <a:off x="502920" y="517550"/>
-            <a:ext cx="82296" cy="82296"/>
-          </a:xfrm>
-          <a:prstGeom prst="roundRect">
-            <a:avLst>
-              <a:gd name="adj" fmla="val 16667"/>
-            </a:avLst>
-          </a:prstGeom>
-          <a:solidFill>
-            <a:srgbClr val="94A3AF"/>
-          </a:solidFill>
-          <a:ln w="12700">
-            <a:solidFill>
-              <a:srgbClr val="94A3AF">
-                <a:alpha val="0"/>
-              </a:srgbClr>
-            </a:solidFill>
-            <a:prstDash val="solid"/>
-          </a:ln>
-        </p:spPr>
-      </p:sp>
-      <p:sp>
-        <p:nvSpPr>
-          <p:cNvPr id="12" name="Shape 10"/>
-          <p:cNvSpPr/>
-          <p:nvPr/>
-        </p:nvSpPr>
-        <p:spPr>
-          <a:xfrm>
-            <a:off x="601675" y="517550"/>
-            <a:ext cx="82296" cy="82296"/>
-          </a:xfrm>
-          <a:prstGeom prst="roundRect">
-            <a:avLst>
-              <a:gd name="adj" fmla="val 16667"/>
-            </a:avLst>
-          </a:prstGeom>
-          <a:solidFill>
-            <a:srgbClr val="006DB6"/>
-          </a:solidFill>
-          <a:ln w="12700">
-            <a:solidFill>
-              <a:srgbClr val="006DB6">
-                <a:alpha val="0"/>
-              </a:srgbClr>
-            </a:solidFill>
-            <a:prstDash val="solid"/>
-          </a:ln>
-        </p:spPr>
-      </p:sp>
-      <p:sp>
-        <p:nvSpPr>
-          <p:cNvPr id="13" name="Shape 11"/>
-          <p:cNvSpPr/>
-          <p:nvPr/>
-        </p:nvSpPr>
-        <p:spPr>
-          <a:xfrm>
-            <a:off x="700430" y="517550"/>
-            <a:ext cx="82296" cy="82296"/>
-          </a:xfrm>
-          <a:prstGeom prst="roundRect">
-            <a:avLst>
-              <a:gd name="adj" fmla="val 16667"/>
-            </a:avLst>
-          </a:prstGeom>
-          <a:solidFill>
-            <a:srgbClr val="1EAAC8"/>
-          </a:solidFill>
-          <a:ln w="12700">
-            <a:solidFill>
-              <a:srgbClr val="1EAAC8">
-                <a:alpha val="0"/>
-              </a:srgbClr>
-            </a:solidFill>
-            <a:prstDash val="solid"/>
-          </a:ln>
-        </p:spPr>
-      </p:sp>
-      <p:sp>
-        <p:nvSpPr>
-          <p:cNvPr id="14" name="Shape 12"/>
-          <p:cNvSpPr/>
-          <p:nvPr/>
-        </p:nvSpPr>
-        <p:spPr>
-          <a:xfrm>
-            <a:off x="799186" y="517550"/>
-            <a:ext cx="82296" cy="82296"/>
-          </a:xfrm>
-          <a:prstGeom prst="roundRect">
-            <a:avLst>
-              <a:gd name="adj" fmla="val 16667"/>
-            </a:avLst>
-          </a:prstGeom>
-          <a:solidFill>
-            <a:srgbClr val="64748B"/>
-          </a:solidFill>
-          <a:ln w="12700">
-            <a:solidFill>
-              <a:srgbClr val="64748B">
-                <a:alpha val="0"/>
-              </a:srgbClr>
-            </a:solidFill>
-            <a:prstDash val="solid"/>
-          </a:ln>
-        </p:spPr>
-      </p:sp>
-      <p:sp>
-        <p:nvSpPr>
-          <p:cNvPr id="15" name="Text 13"/>
-          <p:cNvSpPr/>
-          <p:nvPr/>
-        </p:nvSpPr>
-        <p:spPr>
-          <a:xfrm>
-            <a:off x="989381" y="301752"/>
-            <a:ext cx="1645920" cy="329184"/>
-          </a:xfrm>
-          <a:prstGeom prst="rect">
-            <a:avLst/>
-          </a:prstGeom>
-          <a:noFill/>
-          <a:ln/>
-        </p:spPr>
-        <p:txBody>
-          <a:bodyPr wrap="square" lIns="0" tIns="0" rIns="0" bIns="0" rtlCol="0" anchor="ctr"/>
-          <a:lstStyle/>
-          <a:p>
-            <a:pPr indent="0" marL="0">
-              <a:buNone/>
-            </a:pPr>
-            <a:r>
-              <a:rPr lang="en-US" sz="1700" b="1" dirty="0">
-                <a:solidFill>
-                  <a:srgbClr val="1A1A2E"/>
-                </a:solidFill>
-                <a:latin typeface="Arial" pitchFamily="34" charset="0"/>
-                <a:ea typeface="Arial" pitchFamily="34" charset="-122"/>
-                <a:cs typeface="Arial" pitchFamily="34" charset="-120"/>
-              </a:rPr>
-              <a:t>TECHNIJIAN</a:t>
-            </a:r>
-            <a:endParaRPr lang="en-US" sz="1700" dirty="0"/>
-          </a:p>
-        </p:txBody>
-      </p:sp>
-      <p:sp>
-        <p:nvSpPr>
-          <p:cNvPr id="16" name="Text 14"/>
-          <p:cNvSpPr/>
-          <p:nvPr/>
-        </p:nvSpPr>
-        <p:spPr>
-          <a:xfrm>
-            <a:off x="502920" y="868680"/>
-            <a:ext cx="5486400" cy="256032"/>
-          </a:xfrm>
-          <a:prstGeom prst="rect">
-            <a:avLst/>
-          </a:prstGeom>
-          <a:noFill/>
-          <a:ln/>
-        </p:spPr>
-        <p:txBody>
-          <a:bodyPr wrap="square" lIns="0" tIns="0" rIns="0" bIns="0" rtlCol="0" anchor="ctr"/>
-          <a:lstStyle/>
-          <a:p>
-            <a:pPr indent="0" marL="0">
-              <a:buNone/>
-            </a:pPr>
-            <a:r>
-              <a:rPr lang="en-US" sz="1000" b="1" dirty="0">
-                <a:solidFill>
-                  <a:srgbClr val="006DB6"/>
-                </a:solidFill>
-                <a:latin typeface="Arial" pitchFamily="34" charset="0"/>
-                <a:ea typeface="Arial" pitchFamily="34" charset="-122"/>
-                <a:cs typeface="Arial" pitchFamily="34" charset="-120"/>
-              </a:rPr>
-              <a:t>TENANT BACKUP</a:t>
-            </a:r>
-            <a:endParaRPr lang="en-US" sz="1000" dirty="0"/>
-          </a:p>
-        </p:txBody>
-      </p:sp>
-      <p:sp>
-        <p:nvSpPr>
-          <p:cNvPr id="17" name="Text 15"/>
-          <p:cNvSpPr/>
-          <p:nvPr/>
-        </p:nvSpPr>
-        <p:spPr>
-          <a:xfrm>
-            <a:off x="502920" y="1097280"/>
-            <a:ext cx="11338560" cy="502920"/>
-          </a:xfrm>
-          <a:prstGeom prst="rect">
-            <a:avLst/>
-          </a:prstGeom>
-          <a:noFill/>
-          <a:ln/>
-        </p:spPr>
-        <p:txBody>
-          <a:bodyPr wrap="square" lIns="0" tIns="0" rIns="0" bIns="0" rtlCol="0" anchor="ctr"/>
-          <a:lstStyle/>
-          <a:p>
-            <a:pPr indent="0" marL="0">
-              <a:buNone/>
-            </a:pPr>
-            <a:r>
-              <a:rPr lang="en-US" sz="2200" b="1" dirty="0">
-                <a:solidFill>
-                  <a:srgbClr val="1A1A2E"/>
-                </a:solidFill>
-                <a:latin typeface="Arial" pitchFamily="34" charset="0"/>
-                <a:ea typeface="Arial" pitchFamily="34" charset="-122"/>
-                <a:cs typeface="Arial" pitchFamily="34" charset="-120"/>
-              </a:rPr>
-              <a:t>Veeam Is Full-Tenant Backup - M365 Retention Is Not A Backup</a:t>
-            </a:r>
-            <a:endParaRPr lang="en-US" sz="2200" dirty="0"/>
-          </a:p>
-        </p:txBody>
-      </p:sp>
-      <p:sp>
-        <p:nvSpPr>
-          <p:cNvPr id="18" name="Text 16"/>
-          <p:cNvSpPr/>
-          <p:nvPr/>
-        </p:nvSpPr>
-        <p:spPr>
-          <a:xfrm>
-            <a:off x="502920" y="1554480"/>
-            <a:ext cx="11338560" cy="320040"/>
-          </a:xfrm>
-          <a:prstGeom prst="rect">
-            <a:avLst/>
-          </a:prstGeom>
-          <a:noFill/>
-          <a:ln/>
-        </p:spPr>
-        <p:txBody>
-          <a:bodyPr wrap="square" lIns="0" tIns="0" rIns="0" bIns="0" rtlCol="0" anchor="ctr"/>
-          <a:lstStyle/>
-          <a:p>
-            <a:pPr indent="0" marL="0">
-              <a:buNone/>
-            </a:pPr>
-            <a:r>
-              <a:rPr lang="en-US" sz="1100" dirty="0">
-                <a:solidFill>
-                  <a:srgbClr val="334155"/>
-                </a:solidFill>
-                <a:latin typeface="Arial" pitchFamily="34" charset="0"/>
-                <a:ea typeface="Arial" pitchFamily="34" charset="-122"/>
-                <a:cs typeface="Arial" pitchFamily="34" charset="-120"/>
-              </a:rPr>
-              <a:t>SEC Rule 17a-4(f) requires non-rewriteable, non-erasable preservation. Microsoft native retention does not meet that standard on its own.</a:t>
-            </a:r>
-            <a:endParaRPr lang="en-US" sz="1100" dirty="0"/>
-          </a:p>
-        </p:txBody>
-      </p:sp>
-      <p:sp>
-        <p:nvSpPr>
-          <p:cNvPr id="19" name="Shape 17"/>
-          <p:cNvSpPr/>
-          <p:nvPr/>
-        </p:nvSpPr>
-        <p:spPr>
-          <a:xfrm>
-            <a:off x="502920" y="1874520"/>
-            <a:ext cx="11201400" cy="9144"/>
-          </a:xfrm>
-          <a:prstGeom prst="rect">
-            <a:avLst/>
-          </a:prstGeom>
-          <a:solidFill>
-            <a:srgbClr val="D8E0EA"/>
-          </a:solidFill>
-          <a:ln w="12700">
-            <a:solidFill>
-              <a:srgbClr val="D8E0EA">
-                <a:alpha val="0"/>
-              </a:srgbClr>
-            </a:solidFill>
-            <a:prstDash val="solid"/>
-          </a:ln>
-        </p:spPr>
-      </p:sp>
-      <p:sp>
-        <p:nvSpPr>
-          <p:cNvPr id="20" name="Shape 18"/>
-          <p:cNvSpPr/>
-          <p:nvPr/>
-        </p:nvSpPr>
-        <p:spPr>
-          <a:xfrm>
-            <a:off x="457200" y="6446520"/>
-            <a:ext cx="11292840" cy="10973"/>
-          </a:xfrm>
-          <a:prstGeom prst="rect">
-            <a:avLst/>
-          </a:prstGeom>
-          <a:solidFill>
-            <a:srgbClr val="D8E0EA"/>
-          </a:solidFill>
-          <a:ln w="12700">
-            <a:solidFill>
-              <a:srgbClr val="D8E0EA">
-                <a:alpha val="0"/>
-              </a:srgbClr>
-            </a:solidFill>
-            <a:prstDash val="solid"/>
-          </a:ln>
-        </p:spPr>
-      </p:sp>
-      <p:sp>
-        <p:nvSpPr>
-          <p:cNvPr id="21" name="Text 19"/>
-          <p:cNvSpPr/>
-          <p:nvPr/>
-        </p:nvSpPr>
-        <p:spPr>
-          <a:xfrm>
-            <a:off x="502920" y="6492240"/>
-            <a:ext cx="6858000" cy="228600"/>
-          </a:xfrm>
-          <a:prstGeom prst="rect">
-            <a:avLst/>
-          </a:prstGeom>
-          <a:noFill/>
-          <a:ln/>
-        </p:spPr>
-        <p:txBody>
-          <a:bodyPr wrap="square" lIns="0" tIns="0" rIns="0" bIns="0" rtlCol="0" anchor="ctr"/>
-          <a:lstStyle/>
-          <a:p>
-            <a:pPr indent="0" marL="0">
-              <a:buNone/>
-            </a:pPr>
-            <a:r>
-              <a:rPr lang="en-US" sz="900" dirty="0">
-                <a:solidFill>
-                  <a:srgbClr val="64748B"/>
-                </a:solidFill>
-                <a:latin typeface="Arial" pitchFamily="34" charset="0"/>
-                <a:ea typeface="Arial" pitchFamily="34" charset="-122"/>
-                <a:cs typeface="Arial" pitchFamily="34" charset="-120"/>
-              </a:rPr>
-              <a:t>Technijian  |  AFFG IT Compliance Strategy - Revised Proposal Review</a:t>
-            </a:r>
-            <a:endParaRPr lang="en-US" sz="900" dirty="0"/>
-          </a:p>
-        </p:txBody>
-      </p:sp>
-      <p:sp>
-        <p:nvSpPr>
-          <p:cNvPr id="22" name="Text 20"/>
-          <p:cNvSpPr/>
-          <p:nvPr/>
-        </p:nvSpPr>
-        <p:spPr>
-          <a:xfrm>
-            <a:off x="11155680" y="6473952"/>
-            <a:ext cx="548640" cy="228600"/>
-          </a:xfrm>
-          <a:prstGeom prst="rect">
-            <a:avLst/>
-          </a:prstGeom>
-          <a:noFill/>
-          <a:ln/>
-        </p:spPr>
-        <p:txBody>
-          <a:bodyPr wrap="square" lIns="0" tIns="0" rIns="0" bIns="0" rtlCol="0" anchor="ctr"/>
-          <a:lstStyle/>
-          <a:p>
-            <a:pPr algn="r" indent="0" marL="0">
-              <a:buNone/>
-            </a:pPr>
-            <a:r>
-              <a:rPr lang="en-US" sz="1000" b="1" dirty="0">
-                <a:solidFill>
-                  <a:srgbClr val="006DB6"/>
-                </a:solidFill>
-                <a:latin typeface="Arial" pitchFamily="34" charset="0"/>
-                <a:ea typeface="Arial" pitchFamily="34" charset="-122"/>
-                <a:cs typeface="Arial" pitchFamily="34" charset="-120"/>
-              </a:rPr>
-              <a:t>9</a:t>
-            </a:r>
-            <a:endParaRPr lang="en-US" sz="1000" dirty="0"/>
-          </a:p>
-        </p:txBody>
-      </p:sp>
-      <p:sp>
-        <p:nvSpPr>
-          <p:cNvPr id="23" name="Shape 21"/>
-          <p:cNvSpPr/>
-          <p:nvPr/>
-        </p:nvSpPr>
-        <p:spPr>
-          <a:xfrm>
-            <a:off x="594360" y="2103120"/>
-            <a:ext cx="5486400" cy="3977640"/>
-          </a:xfrm>
-          <a:prstGeom prst="roundRect">
-            <a:avLst>
-              <a:gd name="adj" fmla="val 1839"/>
-            </a:avLst>
-          </a:prstGeom>
-          <a:solidFill>
-            <a:srgbClr val="FFFFFF"/>
-          </a:solidFill>
-          <a:ln w="12700">
-            <a:solidFill>
-              <a:srgbClr val="D8E0EA"/>
-            </a:solidFill>
-            <a:prstDash val="solid"/>
-          </a:ln>
-        </p:spPr>
-      </p:sp>
-      <p:sp>
-        <p:nvSpPr>
-          <p:cNvPr id="24" name="Shape 22"/>
-          <p:cNvSpPr/>
-          <p:nvPr/>
-        </p:nvSpPr>
-        <p:spPr>
-          <a:xfrm>
-            <a:off x="594360" y="2103120"/>
-            <a:ext cx="5486400" cy="91440"/>
-          </a:xfrm>
-          <a:prstGeom prst="rect">
-            <a:avLst/>
-          </a:prstGeom>
-          <a:solidFill>
-            <a:srgbClr val="B42318"/>
-          </a:solidFill>
-          <a:ln w="12700">
-            <a:solidFill>
-              <a:srgbClr val="B42318">
-                <a:alpha val="0"/>
-              </a:srgbClr>
-            </a:solidFill>
-            <a:prstDash val="solid"/>
-          </a:ln>
-        </p:spPr>
-      </p:sp>
-      <p:sp>
-        <p:nvSpPr>
-          <p:cNvPr id="25" name="Text 23"/>
-          <p:cNvSpPr/>
-          <p:nvPr/>
-        </p:nvSpPr>
-        <p:spPr>
-          <a:xfrm>
-            <a:off x="758952" y="2286000"/>
-            <a:ext cx="5157216" cy="201168"/>
-          </a:xfrm>
-          <a:prstGeom prst="rect">
-            <a:avLst/>
-          </a:prstGeom>
-          <a:noFill/>
-          <a:ln/>
-        </p:spPr>
-        <p:txBody>
-          <a:bodyPr wrap="square" lIns="0" tIns="0" rIns="0" bIns="0" rtlCol="0" anchor="ctr"/>
-          <a:lstStyle/>
-          <a:p>
-            <a:pPr indent="0" marL="0">
-              <a:buNone/>
-            </a:pPr>
-            <a:r>
-              <a:rPr lang="en-US" sz="900" b="1" dirty="0">
-                <a:solidFill>
-                  <a:srgbClr val="B42318"/>
-                </a:solidFill>
-                <a:latin typeface="Arial" pitchFamily="34" charset="0"/>
-                <a:ea typeface="Arial" pitchFamily="34" charset="-122"/>
-                <a:cs typeface="Arial" pitchFamily="34" charset="-120"/>
-              </a:rPr>
-              <a:t>WHAT M365 RETENTION DOES NOT COVER</a:t>
-            </a:r>
-            <a:endParaRPr lang="en-US" sz="900" dirty="0"/>
-          </a:p>
-        </p:txBody>
-      </p:sp>
-      <p:sp>
-        <p:nvSpPr>
-          <p:cNvPr id="26" name="Text 24"/>
-          <p:cNvSpPr/>
-          <p:nvPr/>
-        </p:nvSpPr>
-        <p:spPr>
-          <a:xfrm>
-            <a:off x="758952" y="2889504"/>
-            <a:ext cx="5157216" cy="2779776"/>
-          </a:xfrm>
-          <a:prstGeom prst="rect">
-            <a:avLst/>
-          </a:prstGeom>
-          <a:noFill/>
-          <a:ln/>
-        </p:spPr>
-        <p:txBody>
-          <a:bodyPr wrap="square" lIns="0" tIns="0" rIns="0" bIns="0" rtlCol="0" anchor="t"/>
-          <a:lstStyle/>
-          <a:p>
-            <a:pPr indent="0" marL="0">
-              <a:buNone/>
-            </a:pPr>
-            <a:r>
-              <a:rPr lang="en-US" sz="1050" dirty="0">
-                <a:solidFill>
-                  <a:srgbClr val="334155"/>
-                </a:solidFill>
-                <a:latin typeface="Arial" pitchFamily="34" charset="0"/>
-                <a:ea typeface="Arial" pitchFamily="34" charset="-122"/>
-                <a:cs typeface="Arial" pitchFamily="34" charset="-120"/>
-              </a:rPr>
-              <a:t>- Tenant-level events (malicious admin, account takeover)</a:t>
-            </a:r>
-            <a:endParaRPr lang="en-US" sz="1050" dirty="0"/>
-          </a:p>
-          <a:p>
-            <a:pPr indent="0" marL="0">
-              <a:buNone/>
-            </a:pPr>
-            <a:r>
-              <a:rPr lang="en-US" sz="1050" dirty="0">
-                <a:solidFill>
-                  <a:srgbClr val="334155"/>
-                </a:solidFill>
-                <a:latin typeface="Arial" pitchFamily="34" charset="0"/>
-                <a:ea typeface="Arial" pitchFamily="34" charset="-122"/>
-                <a:cs typeface="Arial" pitchFamily="34" charset="-120"/>
-              </a:rPr>
-              <a:t>- Ransomware encrypting OneDrive / SharePoint via sync</a:t>
-            </a:r>
-            <a:endParaRPr lang="en-US" sz="1050" dirty="0"/>
-          </a:p>
-          <a:p>
-            <a:pPr indent="0" marL="0">
-              <a:buNone/>
-            </a:pPr>
-            <a:r>
-              <a:rPr lang="en-US" sz="1050" dirty="0">
-                <a:solidFill>
-                  <a:srgbClr val="334155"/>
-                </a:solidFill>
-                <a:latin typeface="Arial" pitchFamily="34" charset="0"/>
-                <a:ea typeface="Arial" pitchFamily="34" charset="-122"/>
-                <a:cs typeface="Arial" pitchFamily="34" charset="-120"/>
-              </a:rPr>
-              <a:t>- Accidental or malicious mass deletion across the tenant</a:t>
-            </a:r>
-            <a:endParaRPr lang="en-US" sz="1050" dirty="0"/>
-          </a:p>
-          <a:p>
-            <a:pPr indent="0" marL="0">
-              <a:buNone/>
-            </a:pPr>
-            <a:r>
-              <a:rPr lang="en-US" sz="1050" dirty="0">
-                <a:solidFill>
-                  <a:srgbClr val="334155"/>
-                </a:solidFill>
-                <a:latin typeface="Arial" pitchFamily="34" charset="0"/>
-                <a:ea typeface="Arial" pitchFamily="34" charset="-122"/>
-                <a:cs typeface="Arial" pitchFamily="34" charset="-120"/>
-              </a:rPr>
-              <a:t>- Retention-policy changes that shorten preservation</a:t>
-            </a:r>
-            <a:endParaRPr lang="en-US" sz="1050" dirty="0"/>
-          </a:p>
-          <a:p>
-            <a:pPr indent="0" marL="0">
-              <a:buNone/>
-            </a:pPr>
-            <a:r>
-              <a:rPr lang="en-US" sz="1050" dirty="0">
-                <a:solidFill>
-                  <a:srgbClr val="334155"/>
-                </a:solidFill>
-                <a:latin typeface="Arial" pitchFamily="34" charset="0"/>
-                <a:ea typeface="Arial" pitchFamily="34" charset="-122"/>
-                <a:cs typeface="Arial" pitchFamily="34" charset="-120"/>
-              </a:rPr>
-              <a:t>- Point-in-time restore at item, folder, or site granularity</a:t>
-            </a:r>
-            <a:endParaRPr lang="en-US" sz="1050" dirty="0"/>
-          </a:p>
-          <a:p>
-            <a:pPr indent="0" marL="0">
-              <a:buNone/>
-            </a:pPr>
-            <a:r>
-              <a:rPr lang="en-US" sz="1050" dirty="0">
-                <a:solidFill>
-                  <a:srgbClr val="334155"/>
-                </a:solidFill>
-                <a:latin typeface="Arial" pitchFamily="34" charset="0"/>
-                <a:ea typeface="Arial" pitchFamily="34" charset="-122"/>
-                <a:cs typeface="Arial" pitchFamily="34" charset="-120"/>
-              </a:rPr>
-              <a:t>- SharePoint site recovery after structural damage</a:t>
-            </a:r>
-            <a:endParaRPr lang="en-US" sz="1050" dirty="0"/>
-          </a:p>
-          <a:p>
-            <a:pPr indent="0" marL="0">
-              <a:buNone/>
-            </a:pPr>
-            <a:r>
-              <a:rPr lang="en-US" sz="1050" dirty="0">
-                <a:solidFill>
-                  <a:srgbClr val="334155"/>
-                </a:solidFill>
-                <a:latin typeface="Arial" pitchFamily="34" charset="0"/>
-                <a:ea typeface="Arial" pitchFamily="34" charset="-122"/>
-                <a:cs typeface="Arial" pitchFamily="34" charset="-120"/>
-              </a:rPr>
-              <a:t>- Teams channel, chat, and tab content recovery</a:t>
-            </a:r>
-            <a:endParaRPr lang="en-US" sz="1050" dirty="0"/>
-          </a:p>
-          <a:p>
-            <a:pPr indent="0" marL="0">
-              <a:buNone/>
-            </a:pPr>
-            <a:r>
-              <a:rPr lang="en-US" sz="1050" dirty="0">
-                <a:solidFill>
-                  <a:srgbClr val="334155"/>
-                </a:solidFill>
-                <a:latin typeface="Arial" pitchFamily="34" charset="0"/>
-                <a:ea typeface="Arial" pitchFamily="34" charset="-122"/>
-                <a:cs typeface="Arial" pitchFamily="34" charset="-120"/>
-              </a:rPr>
-              <a:t>- Independent chain-of-custody outside the tenant</a:t>
-            </a:r>
-            <a:endParaRPr lang="en-US" sz="1050" dirty="0"/>
-          </a:p>
-          <a:p>
-            <a:pPr indent="0" marL="0">
-              <a:buNone/>
-            </a:pPr>
-            <a:endParaRPr lang="en-US" sz="1050" dirty="0"/>
-          </a:p>
-          <a:p>
-            <a:pPr indent="0" marL="0">
-              <a:buNone/>
-            </a:pPr>
-            <a:r>
-              <a:rPr lang="en-US" sz="1050" dirty="0">
-                <a:solidFill>
-                  <a:srgbClr val="334155"/>
-                </a:solidFill>
-                <a:latin typeface="Arial" pitchFamily="34" charset="0"/>
-                <a:ea typeface="Arial" pitchFamily="34" charset="-122"/>
-                <a:cs typeface="Arial" pitchFamily="34" charset="-120"/>
-              </a:rPr>
-              <a:t>Microsoft retention is a policy inside the tenant. If the tenant is the attack surface, retention is not a backup.</a:t>
-            </a:r>
-            <a:endParaRPr lang="en-US" sz="1050" dirty="0"/>
-          </a:p>
-        </p:txBody>
-      </p:sp>
-      <p:sp>
-        <p:nvSpPr>
-          <p:cNvPr id="27" name="Text 25"/>
-          <p:cNvSpPr/>
-          <p:nvPr/>
-        </p:nvSpPr>
-        <p:spPr>
-          <a:xfrm>
-            <a:off x="758952" y="5733288"/>
-            <a:ext cx="5157216" cy="256032"/>
-          </a:xfrm>
-          <a:prstGeom prst="rect">
-            <a:avLst/>
-          </a:prstGeom>
-          <a:noFill/>
-          <a:ln/>
-        </p:spPr>
-        <p:txBody>
-          <a:bodyPr wrap="square" lIns="0" tIns="0" rIns="0" bIns="0" rtlCol="0" anchor="ctr"/>
-          <a:lstStyle/>
-          <a:p>
-            <a:pPr indent="0" marL="0">
-              <a:buNone/>
-            </a:pPr>
-            <a:r>
-              <a:rPr lang="en-US" sz="900" b="1" i="1" dirty="0">
-                <a:solidFill>
-                  <a:srgbClr val="B42318"/>
-                </a:solidFill>
-                <a:latin typeface="Arial" pitchFamily="34" charset="0"/>
-                <a:ea typeface="Arial" pitchFamily="34" charset="-122"/>
-                <a:cs typeface="Arial" pitchFamily="34" charset="-120"/>
-              </a:rPr>
-              <a:t>SEC Rule 17a-4(f); FINRA 4511</a:t>
-            </a:r>
-            <a:endParaRPr lang="en-US" sz="900" dirty="0"/>
-          </a:p>
-        </p:txBody>
-      </p:sp>
-      <p:sp>
-        <p:nvSpPr>
-          <p:cNvPr id="28" name="Shape 26"/>
-          <p:cNvSpPr/>
-          <p:nvPr/>
-        </p:nvSpPr>
-        <p:spPr>
-          <a:xfrm>
-            <a:off x="6263640" y="2103120"/>
-            <a:ext cx="5486400" cy="3977640"/>
-          </a:xfrm>
-          <a:prstGeom prst="roundRect">
-            <a:avLst>
-              <a:gd name="adj" fmla="val 1839"/>
-            </a:avLst>
-          </a:prstGeom>
-          <a:solidFill>
-            <a:srgbClr val="FFFFFF"/>
-          </a:solidFill>
-          <a:ln w="12700">
-            <a:solidFill>
-              <a:srgbClr val="D8E0EA"/>
-            </a:solidFill>
-            <a:prstDash val="solid"/>
-          </a:ln>
-        </p:spPr>
-      </p:sp>
-      <p:sp>
-        <p:nvSpPr>
-          <p:cNvPr id="29" name="Shape 27"/>
-          <p:cNvSpPr/>
-          <p:nvPr/>
-        </p:nvSpPr>
-        <p:spPr>
-          <a:xfrm>
-            <a:off x="6263640" y="2103120"/>
-            <a:ext cx="5486400" cy="91440"/>
-          </a:xfrm>
-          <a:prstGeom prst="rect">
-            <a:avLst/>
-          </a:prstGeom>
-          <a:solidFill>
-            <a:srgbClr val="006DB6"/>
-          </a:solidFill>
-          <a:ln w="12700">
-            <a:solidFill>
-              <a:srgbClr val="006DB6">
-                <a:alpha val="0"/>
-              </a:srgbClr>
-            </a:solidFill>
-            <a:prstDash val="solid"/>
-          </a:ln>
-        </p:spPr>
-      </p:sp>
-      <p:sp>
-        <p:nvSpPr>
-          <p:cNvPr id="30" name="Text 28"/>
-          <p:cNvSpPr/>
-          <p:nvPr/>
-        </p:nvSpPr>
-        <p:spPr>
-          <a:xfrm>
-            <a:off x="6428232" y="2286000"/>
-            <a:ext cx="5157216" cy="201168"/>
-          </a:xfrm>
-          <a:prstGeom prst="rect">
-            <a:avLst/>
-          </a:prstGeom>
-          <a:noFill/>
-          <a:ln/>
-        </p:spPr>
-        <p:txBody>
-          <a:bodyPr wrap="square" lIns="0" tIns="0" rIns="0" bIns="0" rtlCol="0" anchor="ctr"/>
-          <a:lstStyle/>
-          <a:p>
-            <a:pPr indent="0" marL="0">
-              <a:buNone/>
-            </a:pPr>
-            <a:r>
-              <a:rPr lang="en-US" sz="900" b="1" dirty="0">
-                <a:solidFill>
-                  <a:srgbClr val="006DB6"/>
-                </a:solidFill>
-                <a:latin typeface="Arial" pitchFamily="34" charset="0"/>
-                <a:ea typeface="Arial" pitchFamily="34" charset="-122"/>
-                <a:cs typeface="Arial" pitchFamily="34" charset="-120"/>
-              </a:rPr>
-              <a:t>WHAT VEEAM BACKUP FOR M365 ADDS</a:t>
-            </a:r>
-            <a:endParaRPr lang="en-US" sz="900" dirty="0"/>
-          </a:p>
-        </p:txBody>
-      </p:sp>
-      <p:sp>
-        <p:nvSpPr>
-          <p:cNvPr id="31" name="Text 29"/>
-          <p:cNvSpPr/>
-          <p:nvPr/>
-        </p:nvSpPr>
-        <p:spPr>
-          <a:xfrm>
-            <a:off x="6428232" y="2889504"/>
-            <a:ext cx="5157216" cy="2779776"/>
-          </a:xfrm>
-          <a:prstGeom prst="rect">
-            <a:avLst/>
-          </a:prstGeom>
-          <a:noFill/>
-          <a:ln/>
-        </p:spPr>
-        <p:txBody>
-          <a:bodyPr wrap="square" lIns="0" tIns="0" rIns="0" bIns="0" rtlCol="0" anchor="t"/>
-          <a:lstStyle/>
-          <a:p>
-            <a:pPr indent="0" marL="0">
-              <a:buNone/>
-            </a:pPr>
-            <a:r>
-              <a:rPr lang="en-US" sz="1050" dirty="0">
-                <a:solidFill>
-                  <a:srgbClr val="334155"/>
-                </a:solidFill>
-                <a:latin typeface="Arial" pitchFamily="34" charset="0"/>
-                <a:ea typeface="Arial" pitchFamily="34" charset="-122"/>
-                <a:cs typeface="Arial" pitchFamily="34" charset="-120"/>
-              </a:rPr>
-              <a:t>- Full tenant backup: Exchange, SharePoint, OneDrive, Teams</a:t>
-            </a:r>
-            <a:endParaRPr lang="en-US" sz="1050" dirty="0"/>
-          </a:p>
-          <a:p>
-            <a:pPr indent="0" marL="0">
-              <a:buNone/>
-            </a:pPr>
-            <a:r>
-              <a:rPr lang="en-US" sz="1050" dirty="0">
-                <a:solidFill>
-                  <a:srgbClr val="334155"/>
-                </a:solidFill>
-                <a:latin typeface="Arial" pitchFamily="34" charset="0"/>
-                <a:ea typeface="Arial" pitchFamily="34" charset="-122"/>
-                <a:cs typeface="Arial" pitchFamily="34" charset="-120"/>
-              </a:rPr>
-              <a:t>- Immutable off-tenant storage (WORM-capable)</a:t>
-            </a:r>
-            <a:endParaRPr lang="en-US" sz="1050" dirty="0"/>
-          </a:p>
-          <a:p>
-            <a:pPr indent="0" marL="0">
-              <a:buNone/>
-            </a:pPr>
-            <a:r>
-              <a:rPr lang="en-US" sz="1050" dirty="0">
-                <a:solidFill>
-                  <a:srgbClr val="334155"/>
-                </a:solidFill>
-                <a:latin typeface="Arial" pitchFamily="34" charset="0"/>
-                <a:ea typeface="Arial" pitchFamily="34" charset="-122"/>
-                <a:cs typeface="Arial" pitchFamily="34" charset="-120"/>
-              </a:rPr>
-              <a:t>- Granular restore to item, folder, mailbox, or site level</a:t>
-            </a:r>
-            <a:endParaRPr lang="en-US" sz="1050" dirty="0"/>
-          </a:p>
-          <a:p>
-            <a:pPr indent="0" marL="0">
-              <a:buNone/>
-            </a:pPr>
-            <a:r>
-              <a:rPr lang="en-US" sz="1050" dirty="0">
-                <a:solidFill>
-                  <a:srgbClr val="334155"/>
-                </a:solidFill>
-                <a:latin typeface="Arial" pitchFamily="34" charset="0"/>
-                <a:ea typeface="Arial" pitchFamily="34" charset="-122"/>
-                <a:cs typeface="Arial" pitchFamily="34" charset="-120"/>
-              </a:rPr>
-              <a:t>- Point-in-time recovery for ransomware scenarios</a:t>
-            </a:r>
-            <a:endParaRPr lang="en-US" sz="1050" dirty="0"/>
-          </a:p>
-          <a:p>
-            <a:pPr indent="0" marL="0">
-              <a:buNone/>
-            </a:pPr>
-            <a:r>
-              <a:rPr lang="en-US" sz="1050" dirty="0">
-                <a:solidFill>
-                  <a:srgbClr val="334155"/>
-                </a:solidFill>
-                <a:latin typeface="Arial" pitchFamily="34" charset="0"/>
-                <a:ea typeface="Arial" pitchFamily="34" charset="-122"/>
-                <a:cs typeface="Arial" pitchFamily="34" charset="-120"/>
-              </a:rPr>
-              <a:t>- Independent encryption keys and access controls</a:t>
-            </a:r>
-            <a:endParaRPr lang="en-US" sz="1050" dirty="0"/>
-          </a:p>
-          <a:p>
-            <a:pPr indent="0" marL="0">
-              <a:buNone/>
-            </a:pPr>
-            <a:r>
-              <a:rPr lang="en-US" sz="1050" dirty="0">
-                <a:solidFill>
-                  <a:srgbClr val="334155"/>
-                </a:solidFill>
-                <a:latin typeface="Arial" pitchFamily="34" charset="0"/>
-                <a:ea typeface="Arial" pitchFamily="34" charset="-122"/>
-                <a:cs typeface="Arial" pitchFamily="34" charset="-120"/>
-              </a:rPr>
-              <a:t>- Restore to alternate tenant for DR</a:t>
-            </a:r>
-            <a:endParaRPr lang="en-US" sz="1050" dirty="0"/>
-          </a:p>
-          <a:p>
-            <a:pPr indent="0" marL="0">
-              <a:buNone/>
-            </a:pPr>
-            <a:r>
-              <a:rPr lang="en-US" sz="1050" dirty="0">
-                <a:solidFill>
-                  <a:srgbClr val="334155"/>
-                </a:solidFill>
-                <a:latin typeface="Arial" pitchFamily="34" charset="0"/>
-                <a:ea typeface="Arial" pitchFamily="34" charset="-122"/>
-                <a:cs typeface="Arial" pitchFamily="34" charset="-120"/>
-              </a:rPr>
-              <a:t>- Evidence chain suitable for 17a-4(f) attestation</a:t>
-            </a:r>
-            <a:endParaRPr lang="en-US" sz="1050" dirty="0"/>
-          </a:p>
-          <a:p>
-            <a:pPr indent="0" marL="0">
-              <a:buNone/>
-            </a:pPr>
-            <a:endParaRPr lang="en-US" sz="1050" dirty="0"/>
-          </a:p>
-          <a:p>
-            <a:pPr indent="0" marL="0">
-              <a:buNone/>
-            </a:pPr>
-            <a:r>
-              <a:rPr lang="en-US" sz="1050" dirty="0">
-                <a:solidFill>
-                  <a:srgbClr val="334155"/>
-                </a:solidFill>
-                <a:latin typeface="Arial" pitchFamily="34" charset="0"/>
-                <a:ea typeface="Arial" pitchFamily="34" charset="-122"/>
-                <a:cs typeface="Arial" pitchFamily="34" charset="-120"/>
-              </a:rPr>
-              <a:t>The $100/month storage line is the backup repository. Not duplicative of M365 retention - it is the control that makes 17a-4(f) defensible.</a:t>
-            </a:r>
-            <a:endParaRPr lang="en-US" sz="1050" dirty="0"/>
-          </a:p>
-        </p:txBody>
-      </p:sp>
-      <p:sp>
-        <p:nvSpPr>
-          <p:cNvPr id="32" name="Text 30"/>
-          <p:cNvSpPr/>
-          <p:nvPr/>
-        </p:nvSpPr>
-        <p:spPr>
-          <a:xfrm>
-            <a:off x="6428232" y="5733288"/>
-            <a:ext cx="5157216" cy="256032"/>
-          </a:xfrm>
-          <a:prstGeom prst="rect">
-            <a:avLst/>
-          </a:prstGeom>
-          <a:noFill/>
-          <a:ln/>
-        </p:spPr>
-        <p:txBody>
-          <a:bodyPr wrap="square" lIns="0" tIns="0" rIns="0" bIns="0" rtlCol="0" anchor="ctr"/>
-          <a:lstStyle/>
-          <a:p>
-            <a:pPr indent="0" marL="0">
-              <a:buNone/>
-            </a:pPr>
-            <a:r>
-              <a:rPr lang="en-US" sz="900" b="1" i="1" dirty="0">
-                <a:solidFill>
-                  <a:srgbClr val="006DB6"/>
-                </a:solidFill>
-                <a:latin typeface="Arial" pitchFamily="34" charset="0"/>
-                <a:ea typeface="Arial" pitchFamily="34" charset="-122"/>
-                <a:cs typeface="Arial" pitchFamily="34" charset="-120"/>
-              </a:rPr>
-              <a:t>SEC Rule 17a-4(b),(f); FINRA 4511; Reg S-P availability</a:t>
-            </a:r>
-            <a:endParaRPr lang="en-US" sz="900" dirty="0"/>
           </a:p>
         </p:txBody>
       </p:sp>
